--- a/陕师大报考介绍.pptx
+++ b/陕师大报考介绍.pptx
@@ -9,6 +9,15 @@
   </p:notesMasterIdLst>
   <p:sldIdLst>
     <p:sldId id="256" r:id="R99bb2e99037b4ebc"/>
+    <p:sldId id="257" r:id="R5313e51a9d6641b7"/>
+    <p:sldId id="258" r:id="R9f5baf3e238c4aca"/>
+    <p:sldId id="259" r:id="Rb86b3bc736884ceb"/>
+    <p:sldId id="260" r:id="Ra99c63c4e26c4eda"/>
+    <p:sldId id="261" r:id="Ra96ab8a85b3a426a"/>
+    <p:sldId id="262" r:id="Rdacddf55cb2f4f2c"/>
+    <p:sldId id="263" r:id="R0b6d62edb9c14d8d"/>
+    <p:sldId id="264" r:id="R39d1c57c4fe44650"/>
+    <p:sldId id="265" r:id="Re041e870de354030"/>
   </p:sldIdLst>
   <p:sldSz cx="12192000" cy="6858000"/>
   <p:notesSz cx="6858000" cy="9144000"/>
@@ -430,7 +439,7 @@
 </file>
 
 <file path=ppt/notesSlides/notesSlide1.xml><?xml version="1.0" encoding="utf-8"?>
-<p:notes xmlns:p="http://schemas.openxmlformats.org/presentationml/2006/main">
+<p:notes xmlns:a="http://schemas.openxmlformats.org/drawingml/2006/main" xmlns:p="http://schemas.openxmlformats.org/presentationml/2006/main">
   <p:cSld>
     <p:spTree>
       <p:nvGrpSpPr>
@@ -472,6 +481,501 @@
             <a:r>
               <a:rPr lang="en-US"/>
               <a:t>开篇点明这是面向高考考生及家长的报考指南，介绍陕西师范大学报考全流程。</a:t>
+            </a:r>
+          </a:p>
+        </p:txBody>
+      </p:sp>
+    </p:spTree>
+  </p:cSld>
+  <p:clrMapOvr>
+    <a:masterClrMapping xmlns:a="http://schemas.openxmlformats.org/drawingml/2006/main"/>
+  </p:clrMapOvr>
+</p:notes>
+</file>
+
+<file path=ppt/notesSlides/notesSlide10.xml><?xml version="1.0" encoding="utf-8"?>
+<p:notes xmlns:a="http://schemas.openxmlformats.org/drawingml/2006/main" xmlns:p="http://schemas.openxmlformats.org/presentationml/2006/main">
+  <p:cSld>
+    <p:spTree>
+      <p:nvGrpSpPr>
+        <p:cNvPr id="1" name=""/>
+        <p:cNvGrpSpPr/>
+        <p:nvPr/>
+      </p:nvGrpSpPr>
+      <p:grpSpPr>
+        <a:xfrm xmlns:a="http://schemas.openxmlformats.org/drawingml/2006/main"/>
+      </p:grpSpPr>
+      <p:sp>
+        <p:nvSpPr>
+          <p:cNvPr id="2" name="Slide Image Placeholder 1"/>
+          <p:cNvSpPr/>
+          <p:nvPr>
+            <p:ph type="sldImg" idx="0"/>
+          </p:nvPr>
+        </p:nvSpPr>
+        <p:spPr/>
+        <p:txBody>
+          <a:bodyPr xmlns:a="http://schemas.openxmlformats.org/drawingml/2006/main"/>
+          <a:lstStyle xmlns:a="http://schemas.openxmlformats.org/drawingml/2006/main"/>
+          <a:p xmlns:a="http://schemas.openxmlformats.org/drawingml/2006/main"/>
+        </p:txBody>
+      </p:sp>
+      <p:sp>
+        <p:nvSpPr>
+          <p:cNvPr id="3" name="Notes Placeholder 2"/>
+          <p:cNvSpPr/>
+          <p:nvPr>
+            <p:ph type="body" idx="1"/>
+          </p:nvPr>
+        </p:nvSpPr>
+        <p:spPr/>
+        <p:txBody>
+          <a:bodyPr xmlns:a="http://schemas.openxmlformats.org/drawingml/2006/main"/>
+          <a:lstStyle xmlns:a="http://schemas.openxmlformats.org/drawingml/2006/main"/>
+          <a:p xmlns:a="http://schemas.openxmlformats.org/drawingml/2006/main">
+            <a:r>
+              <a:rPr lang="en-US"/>
+              <a:t>结语收束：表达欢迎报考，给出官方信息渠道提醒，并送上祝愿。</a:t>
+            </a:r>
+          </a:p>
+        </p:txBody>
+      </p:sp>
+    </p:spTree>
+  </p:cSld>
+  <p:clrMapOvr>
+    <a:masterClrMapping xmlns:a="http://schemas.openxmlformats.org/drawingml/2006/main"/>
+  </p:clrMapOvr>
+</p:notes>
+</file>
+
+<file path=ppt/notesSlides/notesSlide2.xml><?xml version="1.0" encoding="utf-8"?>
+<p:notes xmlns:a="http://schemas.openxmlformats.org/drawingml/2006/main" xmlns:p="http://schemas.openxmlformats.org/presentationml/2006/main">
+  <p:cSld>
+    <p:spTree>
+      <p:nvGrpSpPr>
+        <p:cNvPr id="1" name=""/>
+        <p:cNvGrpSpPr/>
+        <p:nvPr/>
+      </p:nvGrpSpPr>
+      <p:grpSpPr>
+        <a:xfrm xmlns:a="http://schemas.openxmlformats.org/drawingml/2006/main"/>
+      </p:grpSpPr>
+      <p:sp>
+        <p:nvSpPr>
+          <p:cNvPr id="2" name="Slide Image Placeholder 1"/>
+          <p:cNvSpPr/>
+          <p:nvPr>
+            <p:ph type="sldImg" idx="0"/>
+          </p:nvPr>
+        </p:nvSpPr>
+        <p:spPr/>
+        <p:txBody>
+          <a:bodyPr xmlns:a="http://schemas.openxmlformats.org/drawingml/2006/main"/>
+          <a:lstStyle xmlns:a="http://schemas.openxmlformats.org/drawingml/2006/main"/>
+          <a:p xmlns:a="http://schemas.openxmlformats.org/drawingml/2006/main"/>
+        </p:txBody>
+      </p:sp>
+      <p:sp>
+        <p:nvSpPr>
+          <p:cNvPr id="3" name="Notes Placeholder 2"/>
+          <p:cNvSpPr/>
+          <p:nvPr>
+            <p:ph type="body" idx="1"/>
+          </p:nvPr>
+        </p:nvSpPr>
+        <p:spPr/>
+        <p:txBody>
+          <a:bodyPr xmlns:a="http://schemas.openxmlformats.org/drawingml/2006/main"/>
+          <a:lstStyle xmlns:a="http://schemas.openxmlformats.org/drawingml/2006/main"/>
+          <a:p xmlns:a="http://schemas.openxmlformats.org/drawingml/2006/main">
+            <a:r>
+              <a:rPr lang="en-US"/>
+              <a:t>介绍学校定位、区位与两校区，强调双一流与211平台，用三张卡片快速建立印象。</a:t>
+            </a:r>
+          </a:p>
+        </p:txBody>
+      </p:sp>
+    </p:spTree>
+  </p:cSld>
+  <p:clrMapOvr>
+    <a:masterClrMapping xmlns:a="http://schemas.openxmlformats.org/drawingml/2006/main"/>
+  </p:clrMapOvr>
+</p:notes>
+</file>
+
+<file path=ppt/notesSlides/notesSlide3.xml><?xml version="1.0" encoding="utf-8"?>
+<p:notes xmlns:a="http://schemas.openxmlformats.org/drawingml/2006/main" xmlns:p="http://schemas.openxmlformats.org/presentationml/2006/main">
+  <p:cSld>
+    <p:spTree>
+      <p:nvGrpSpPr>
+        <p:cNvPr id="1" name=""/>
+        <p:cNvGrpSpPr/>
+        <p:nvPr/>
+      </p:nvGrpSpPr>
+      <p:grpSpPr>
+        <a:xfrm xmlns:a="http://schemas.openxmlformats.org/drawingml/2006/main"/>
+      </p:grpSpPr>
+      <p:sp>
+        <p:nvSpPr>
+          <p:cNvPr id="2" name="Slide Image Placeholder 1"/>
+          <p:cNvSpPr/>
+          <p:nvPr>
+            <p:ph type="sldImg" idx="0"/>
+          </p:nvPr>
+        </p:nvSpPr>
+        <p:spPr/>
+        <p:txBody>
+          <a:bodyPr xmlns:a="http://schemas.openxmlformats.org/drawingml/2006/main"/>
+          <a:lstStyle xmlns:a="http://schemas.openxmlformats.org/drawingml/2006/main"/>
+          <a:p xmlns:a="http://schemas.openxmlformats.org/drawingml/2006/main"/>
+        </p:txBody>
+      </p:sp>
+      <p:sp>
+        <p:nvSpPr>
+          <p:cNvPr id="3" name="Notes Placeholder 2"/>
+          <p:cNvSpPr/>
+          <p:nvPr>
+            <p:ph type="body" idx="1"/>
+          </p:nvPr>
+        </p:nvSpPr>
+        <p:spPr/>
+        <p:txBody>
+          <a:bodyPr xmlns:a="http://schemas.openxmlformats.org/drawingml/2006/main"/>
+          <a:lstStyle xmlns:a="http://schemas.openxmlformats.org/drawingml/2006/main"/>
+          <a:p xmlns:a="http://schemas.openxmlformats.org/drawingml/2006/main">
+            <a:r>
+              <a:rPr lang="en-US"/>
+              <a:t>用三张卡片讲清师范为本、学科交叉、人文底蕴三大特色。</a:t>
+            </a:r>
+          </a:p>
+        </p:txBody>
+      </p:sp>
+    </p:spTree>
+  </p:cSld>
+  <p:clrMapOvr>
+    <a:masterClrMapping xmlns:a="http://schemas.openxmlformats.org/drawingml/2006/main"/>
+  </p:clrMapOvr>
+</p:notes>
+</file>
+
+<file path=ppt/notesSlides/notesSlide4.xml><?xml version="1.0" encoding="utf-8"?>
+<p:notes xmlns:a="http://schemas.openxmlformats.org/drawingml/2006/main" xmlns:p="http://schemas.openxmlformats.org/presentationml/2006/main">
+  <p:cSld>
+    <p:spTree>
+      <p:nvGrpSpPr>
+        <p:cNvPr id="1" name=""/>
+        <p:cNvGrpSpPr/>
+        <p:nvPr/>
+      </p:nvGrpSpPr>
+      <p:grpSpPr>
+        <a:xfrm xmlns:a="http://schemas.openxmlformats.org/drawingml/2006/main"/>
+      </p:grpSpPr>
+      <p:sp>
+        <p:nvSpPr>
+          <p:cNvPr id="2" name="Slide Image Placeholder 1"/>
+          <p:cNvSpPr/>
+          <p:nvPr>
+            <p:ph type="sldImg" idx="0"/>
+          </p:nvPr>
+        </p:nvSpPr>
+        <p:spPr/>
+        <p:txBody>
+          <a:bodyPr xmlns:a="http://schemas.openxmlformats.org/drawingml/2006/main"/>
+          <a:lstStyle xmlns:a="http://schemas.openxmlformats.org/drawingml/2006/main"/>
+          <a:p xmlns:a="http://schemas.openxmlformats.org/drawingml/2006/main"/>
+        </p:txBody>
+      </p:sp>
+      <p:sp>
+        <p:nvSpPr>
+          <p:cNvPr id="3" name="Notes Placeholder 2"/>
+          <p:cNvSpPr/>
+          <p:nvPr>
+            <p:ph type="body" idx="1"/>
+          </p:nvPr>
+        </p:nvSpPr>
+        <p:spPr/>
+        <p:txBody>
+          <a:bodyPr xmlns:a="http://schemas.openxmlformats.org/drawingml/2006/main"/>
+          <a:lstStyle xmlns:a="http://schemas.openxmlformats.org/drawingml/2006/main"/>
+          <a:p xmlns:a="http://schemas.openxmlformats.org/drawingml/2006/main">
+            <a:r>
+              <a:rPr lang="en-US"/>
+              <a:t>列举传统优势与传统师范王牌专业，强调以师范特色为基础的学科实力。</a:t>
+            </a:r>
+          </a:p>
+        </p:txBody>
+      </p:sp>
+    </p:spTree>
+  </p:cSld>
+  <p:clrMapOvr>
+    <a:masterClrMapping xmlns:a="http://schemas.openxmlformats.org/drawingml/2006/main"/>
+  </p:clrMapOvr>
+</p:notes>
+</file>
+
+<file path=ppt/notesSlides/notesSlide5.xml><?xml version="1.0" encoding="utf-8"?>
+<p:notes xmlns:a="http://schemas.openxmlformats.org/drawingml/2006/main" xmlns:p="http://schemas.openxmlformats.org/presentationml/2006/main">
+  <p:cSld>
+    <p:spTree>
+      <p:nvGrpSpPr>
+        <p:cNvPr id="1" name=""/>
+        <p:cNvGrpSpPr/>
+        <p:nvPr/>
+      </p:nvGrpSpPr>
+      <p:grpSpPr>
+        <a:xfrm xmlns:a="http://schemas.openxmlformats.org/drawingml/2006/main"/>
+      </p:grpSpPr>
+      <p:sp>
+        <p:nvSpPr>
+          <p:cNvPr id="2" name="Slide Image Placeholder 1"/>
+          <p:cNvSpPr/>
+          <p:nvPr>
+            <p:ph type="sldImg" idx="0"/>
+          </p:nvPr>
+        </p:nvSpPr>
+        <p:spPr/>
+        <p:txBody>
+          <a:bodyPr xmlns:a="http://schemas.openxmlformats.org/drawingml/2006/main"/>
+          <a:lstStyle xmlns:a="http://schemas.openxmlformats.org/drawingml/2006/main"/>
+          <a:p xmlns:a="http://schemas.openxmlformats.org/drawingml/2006/main"/>
+        </p:txBody>
+      </p:sp>
+      <p:sp>
+        <p:nvSpPr>
+          <p:cNvPr id="3" name="Notes Placeholder 2"/>
+          <p:cNvSpPr/>
+          <p:nvPr>
+            <p:ph type="body" idx="1"/>
+          </p:nvPr>
+        </p:nvSpPr>
+        <p:spPr/>
+        <p:txBody>
+          <a:bodyPr xmlns:a="http://schemas.openxmlformats.org/drawingml/2006/main"/>
+          <a:lstStyle xmlns:a="http://schemas.openxmlformats.org/drawingml/2006/main"/>
+          <a:p xmlns:a="http://schemas.openxmlformats.org/drawingml/2006/main">
+            <a:r>
+              <a:rPr lang="en-US"/>
+              <a:t>讲师资规模与培养贯通，突出名师团队和本硕博/师范生一体化培养。</a:t>
+            </a:r>
+          </a:p>
+        </p:txBody>
+      </p:sp>
+    </p:spTree>
+  </p:cSld>
+  <p:clrMapOvr>
+    <a:masterClrMapping xmlns:a="http://schemas.openxmlformats.org/drawingml/2006/main"/>
+  </p:clrMapOvr>
+</p:notes>
+</file>
+
+<file path=ppt/notesSlides/notesSlide6.xml><?xml version="1.0" encoding="utf-8"?>
+<p:notes xmlns:a="http://schemas.openxmlformats.org/drawingml/2006/main" xmlns:p="http://schemas.openxmlformats.org/presentationml/2006/main">
+  <p:cSld>
+    <p:spTree>
+      <p:nvGrpSpPr>
+        <p:cNvPr id="1" name=""/>
+        <p:cNvGrpSpPr/>
+        <p:nvPr/>
+      </p:nvGrpSpPr>
+      <p:grpSpPr>
+        <a:xfrm xmlns:a="http://schemas.openxmlformats.org/drawingml/2006/main"/>
+      </p:grpSpPr>
+      <p:sp>
+        <p:nvSpPr>
+          <p:cNvPr id="2" name="Slide Image Placeholder 1"/>
+          <p:cNvSpPr/>
+          <p:nvPr>
+            <p:ph type="sldImg" idx="0"/>
+          </p:nvPr>
+        </p:nvSpPr>
+        <p:spPr/>
+        <p:txBody>
+          <a:bodyPr xmlns:a="http://schemas.openxmlformats.org/drawingml/2006/main"/>
+          <a:lstStyle xmlns:a="http://schemas.openxmlformats.org/drawingml/2006/main"/>
+          <a:p xmlns:a="http://schemas.openxmlformats.org/drawingml/2006/main"/>
+        </p:txBody>
+      </p:sp>
+      <p:sp>
+        <p:nvSpPr>
+          <p:cNvPr id="3" name="Notes Placeholder 2"/>
+          <p:cNvSpPr/>
+          <p:nvPr>
+            <p:ph type="body" idx="1"/>
+          </p:nvPr>
+        </p:nvSpPr>
+        <p:spPr/>
+        <p:txBody>
+          <a:bodyPr xmlns:a="http://schemas.openxmlformats.org/drawingml/2006/main"/>
+          <a:lstStyle xmlns:a="http://schemas.openxmlformats.org/drawingml/2006/main"/>
+          <a:p xmlns:a="http://schemas.openxmlformats.org/drawingml/2006/main">
+            <a:r>
+              <a:rPr lang="en-US"/>
+              <a:t>用四张卡片呈现双校区、社团、人文氛围与西安城市资源四大校园生活切面。</a:t>
+            </a:r>
+          </a:p>
+        </p:txBody>
+      </p:sp>
+    </p:spTree>
+  </p:cSld>
+  <p:clrMapOvr>
+    <a:masterClrMapping xmlns:a="http://schemas.openxmlformats.org/drawingml/2006/main"/>
+  </p:clrMapOvr>
+</p:notes>
+</file>
+
+<file path=ppt/notesSlides/notesSlide7.xml><?xml version="1.0" encoding="utf-8"?>
+<p:notes xmlns:a="http://schemas.openxmlformats.org/drawingml/2006/main" xmlns:p="http://schemas.openxmlformats.org/presentationml/2006/main">
+  <p:cSld>
+    <p:spTree>
+      <p:nvGrpSpPr>
+        <p:cNvPr id="1" name=""/>
+        <p:cNvGrpSpPr/>
+        <p:nvPr/>
+      </p:nvGrpSpPr>
+      <p:grpSpPr>
+        <a:xfrm xmlns:a="http://schemas.openxmlformats.org/drawingml/2006/main"/>
+      </p:grpSpPr>
+      <p:sp>
+        <p:nvSpPr>
+          <p:cNvPr id="2" name="Slide Image Placeholder 1"/>
+          <p:cNvSpPr/>
+          <p:nvPr>
+            <p:ph type="sldImg" idx="0"/>
+          </p:nvPr>
+        </p:nvSpPr>
+        <p:spPr/>
+        <p:txBody>
+          <a:bodyPr xmlns:a="http://schemas.openxmlformats.org/drawingml/2006/main"/>
+          <a:lstStyle xmlns:a="http://schemas.openxmlformats.org/drawingml/2006/main"/>
+          <a:p xmlns:a="http://schemas.openxmlformats.org/drawingml/2006/main"/>
+        </p:txBody>
+      </p:sp>
+      <p:sp>
+        <p:nvSpPr>
+          <p:cNvPr id="3" name="Notes Placeholder 2"/>
+          <p:cNvSpPr/>
+          <p:nvPr>
+            <p:ph type="body" idx="1"/>
+          </p:nvPr>
+        </p:nvSpPr>
+        <p:spPr/>
+        <p:txBody>
+          <a:bodyPr xmlns:a="http://schemas.openxmlformats.org/drawingml/2006/main"/>
+          <a:lstStyle xmlns:a="http://schemas.openxmlformats.org/drawingml/2006/main"/>
+          <a:p xmlns:a="http://schemas.openxmlformats.org/drawingml/2006/main">
+            <a:r>
+              <a:rPr lang="en-US"/>
+              <a:t>分就业与深造两块讲毕业去向，避免编造具体数据，引导查看官方就业质量报告。</a:t>
+            </a:r>
+          </a:p>
+        </p:txBody>
+      </p:sp>
+    </p:spTree>
+  </p:cSld>
+  <p:clrMapOvr>
+    <a:masterClrMapping xmlns:a="http://schemas.openxmlformats.org/drawingml/2006/main"/>
+  </p:clrMapOvr>
+</p:notes>
+</file>
+
+<file path=ppt/notesSlides/notesSlide8.xml><?xml version="1.0" encoding="utf-8"?>
+<p:notes xmlns:a="http://schemas.openxmlformats.org/drawingml/2006/main" xmlns:p="http://schemas.openxmlformats.org/presentationml/2006/main">
+  <p:cSld>
+    <p:spTree>
+      <p:nvGrpSpPr>
+        <p:cNvPr id="1" name=""/>
+        <p:cNvGrpSpPr/>
+        <p:nvPr/>
+      </p:nvGrpSpPr>
+      <p:grpSpPr>
+        <a:xfrm xmlns:a="http://schemas.openxmlformats.org/drawingml/2006/main"/>
+      </p:grpSpPr>
+      <p:sp>
+        <p:nvSpPr>
+          <p:cNvPr id="2" name="Slide Image Placeholder 1"/>
+          <p:cNvSpPr/>
+          <p:nvPr>
+            <p:ph type="sldImg" idx="0"/>
+          </p:nvPr>
+        </p:nvSpPr>
+        <p:spPr/>
+        <p:txBody>
+          <a:bodyPr xmlns:a="http://schemas.openxmlformats.org/drawingml/2006/main"/>
+          <a:lstStyle xmlns:a="http://schemas.openxmlformats.org/drawingml/2006/main"/>
+          <a:p xmlns:a="http://schemas.openxmlformats.org/drawingml/2006/main"/>
+        </p:txBody>
+      </p:sp>
+      <p:sp>
+        <p:nvSpPr>
+          <p:cNvPr id="3" name="Notes Placeholder 2"/>
+          <p:cNvSpPr/>
+          <p:nvPr>
+            <p:ph type="body" idx="1"/>
+          </p:nvPr>
+        </p:nvSpPr>
+        <p:spPr/>
+        <p:txBody>
+          <a:bodyPr xmlns:a="http://schemas.openxmlformats.org/drawingml/2006/main"/>
+          <a:lstStyle xmlns:a="http://schemas.openxmlformats.org/drawingml/2006/main"/>
+          <a:p xmlns:a="http://schemas.openxmlformats.org/drawingml/2006/main">
+            <a:r>
+              <a:rPr lang="en-US"/>
+              <a:t>用四张卡片覆盖批次、选科、分数位次与官方渠道，强调一切以当年官方政策为准。</a:t>
+            </a:r>
+          </a:p>
+        </p:txBody>
+      </p:sp>
+    </p:spTree>
+  </p:cSld>
+  <p:clrMapOvr>
+    <a:masterClrMapping xmlns:a="http://schemas.openxmlformats.org/drawingml/2006/main"/>
+  </p:clrMapOvr>
+</p:notes>
+</file>
+
+<file path=ppt/notesSlides/notesSlide9.xml><?xml version="1.0" encoding="utf-8"?>
+<p:notes xmlns:a="http://schemas.openxmlformats.org/drawingml/2006/main" xmlns:p="http://schemas.openxmlformats.org/presentationml/2006/main">
+  <p:cSld>
+    <p:spTree>
+      <p:nvGrpSpPr>
+        <p:cNvPr id="1" name=""/>
+        <p:cNvGrpSpPr/>
+        <p:nvPr/>
+      </p:nvGrpSpPr>
+      <p:grpSpPr>
+        <a:xfrm xmlns:a="http://schemas.openxmlformats.org/drawingml/2006/main"/>
+      </p:grpSpPr>
+      <p:sp>
+        <p:nvSpPr>
+          <p:cNvPr id="2" name="Slide Image Placeholder 1"/>
+          <p:cNvSpPr/>
+          <p:nvPr>
+            <p:ph type="sldImg" idx="0"/>
+          </p:nvPr>
+        </p:nvSpPr>
+        <p:spPr/>
+        <p:txBody>
+          <a:bodyPr xmlns:a="http://schemas.openxmlformats.org/drawingml/2006/main"/>
+          <a:lstStyle xmlns:a="http://schemas.openxmlformats.org/drawingml/2006/main"/>
+          <a:p xmlns:a="http://schemas.openxmlformats.org/drawingml/2006/main"/>
+        </p:txBody>
+      </p:sp>
+      <p:sp>
+        <p:nvSpPr>
+          <p:cNvPr id="3" name="Notes Placeholder 2"/>
+          <p:cNvSpPr/>
+          <p:nvPr>
+            <p:ph type="body" idx="1"/>
+          </p:nvPr>
+        </p:nvSpPr>
+        <p:spPr/>
+        <p:txBody>
+          <a:bodyPr xmlns:a="http://schemas.openxmlformats.org/drawingml/2006/main"/>
+          <a:lstStyle xmlns:a="http://schemas.openxmlformats.org/drawingml/2006/main"/>
+          <a:p xmlns:a="http://schemas.openxmlformats.org/drawingml/2006/main">
+            <a:r>
+              <a:rPr lang="en-US"/>
+              <a:t>用四步流程+箭头清晰呈现报考路径，强调时间节点以官方发布为准。</a:t>
             </a:r>
           </a:p>
         </p:txBody>
@@ -775,7 +1279,7 @@
 </file>
 
 <file path=ppt/slides/slide1.xml><?xml version="1.0" encoding="utf-8"?>
-<p:sld xmlns:p="http://schemas.openxmlformats.org/presentationml/2006/main">
+<p:sld xmlns:a="http://schemas.openxmlformats.org/drawingml/2006/main" xmlns:p="http://schemas.openxmlformats.org/presentationml/2006/main">
   <p:cSld>
     <p:bg>
       <p:bgPr>
@@ -915,6 +1419,4324 @@
           <a:bodyPr xmlns:a="http://schemas.openxmlformats.org/drawingml/2006/main"/>
           <a:lstStyle xmlns:a="http://schemas.openxmlformats.org/drawingml/2006/main"/>
           <a:p xmlns:a="http://schemas.openxmlformats.org/drawingml/2006/main"/>
+        </p:txBody>
+      </p:sp>
+    </p:spTree>
+  </p:cSld>
+</p:sld>
+</file>
+
+<file path=ppt/slides/slide10.xml><?xml version="1.0" encoding="utf-8"?>
+<p:sld xmlns:a="http://schemas.openxmlformats.org/drawingml/2006/main" xmlns:p="http://schemas.openxmlformats.org/presentationml/2006/main">
+  <p:cSld>
+    <p:bg>
+      <p:bgPr>
+        <a:solidFill xmlns:a="http://schemas.openxmlformats.org/drawingml/2006/main">
+          <a:srgbClr val="8E2430"/>
+        </a:solidFill>
+      </p:bgPr>
+    </p:bg>
+    <p:spTree>
+      <p:nvGrpSpPr>
+        <p:cNvPr id="1" name=""/>
+        <p:cNvGrpSpPr/>
+        <p:nvPr/>
+      </p:nvGrpSpPr>
+      <p:grpSpPr/>
+      <p:sp>
+        <p:nvSpPr>
+          <p:cNvPr id="100131" name="TextBox 1"/>
+          <p:cNvSpPr txBox="1"/>
+          <p:nvPr/>
+        </p:nvSpPr>
+        <p:spPr>
+          <a:xfrm xmlns:a="http://schemas.openxmlformats.org/drawingml/2006/main">
+            <a:off x="720000" y="2088000"/>
+            <a:ext cx="10753200" cy="1080000"/>
+          </a:xfrm>
+          <a:prstGeom xmlns:a="http://schemas.openxmlformats.org/drawingml/2006/main" prst="rect">
+            <a:avLst/>
+          </a:prstGeom>
+        </p:spPr>
+        <p:txBody>
+          <a:bodyPr xmlns:a="http://schemas.openxmlformats.org/drawingml/2006/main"/>
+          <a:lstStyle xmlns:a="http://schemas.openxmlformats.org/drawingml/2006/main"/>
+          <a:p xmlns:a="http://schemas.openxmlformats.org/drawingml/2006/main">
+            <a:pPr algn="ctr"/>
+            <a:r>
+              <a:rPr lang="en-US" sz="4200" b="1">
+                <a:solidFill>
+                  <a:srgbClr val="FFFFFF"/>
+                </a:solidFill>
+                <a:latin typeface="微软雅黑"/>
+                <a:ea typeface="微软雅黑"/>
+              </a:rPr>
+              <a:t>金榜题名 · 陕师大等你来</a:t>
+            </a:r>
+          </a:p>
+        </p:txBody>
+      </p:sp>
+      <p:sp>
+        <p:nvSpPr>
+          <p:cNvPr id="100132" name="TextBox 2"/>
+          <p:cNvSpPr txBox="1"/>
+          <p:nvPr/>
+        </p:nvSpPr>
+        <p:spPr>
+          <a:xfrm xmlns:a="http://schemas.openxmlformats.org/drawingml/2006/main">
+            <a:off x="720000" y="3312000"/>
+            <a:ext cx="10753200" cy="504000"/>
+          </a:xfrm>
+          <a:prstGeom xmlns:a="http://schemas.openxmlformats.org/drawingml/2006/main" prst="rect">
+            <a:avLst/>
+          </a:prstGeom>
+        </p:spPr>
+        <p:txBody>
+          <a:bodyPr xmlns:a="http://schemas.openxmlformats.org/drawingml/2006/main"/>
+          <a:lstStyle xmlns:a="http://schemas.openxmlformats.org/drawingml/2006/main"/>
+          <a:p xmlns:a="http://schemas.openxmlformats.org/drawingml/2006/main">
+            <a:pPr algn="ctr"/>
+            <a:r>
+              <a:rPr lang="en-US" sz="2000">
+                <a:solidFill>
+                  <a:srgbClr val="F4E5D2"/>
+                </a:solidFill>
+                <a:latin typeface="微软雅黑"/>
+                <a:ea typeface="微软雅黑"/>
+              </a:rPr>
+              <a:t>选择陕西师范大学，成就更好的自己</a:t>
+            </a:r>
+          </a:p>
+        </p:txBody>
+      </p:sp>
+      <p:sp>
+        <p:nvSpPr>
+          <p:cNvPr id="100133" name="TextBox 3"/>
+          <p:cNvSpPr txBox="1"/>
+          <p:nvPr/>
+        </p:nvSpPr>
+        <p:spPr>
+          <a:xfrm xmlns:a="http://schemas.openxmlformats.org/drawingml/2006/main">
+            <a:off x="720000" y="4032000"/>
+            <a:ext cx="10753200" cy="432000"/>
+          </a:xfrm>
+          <a:prstGeom xmlns:a="http://schemas.openxmlformats.org/drawingml/2006/main" prst="rect">
+            <a:avLst/>
+          </a:prstGeom>
+        </p:spPr>
+        <p:txBody>
+          <a:bodyPr xmlns:a="http://schemas.openxmlformats.org/drawingml/2006/main"/>
+          <a:lstStyle xmlns:a="http://schemas.openxmlformats.org/drawingml/2006/main"/>
+          <a:p xmlns:a="http://schemas.openxmlformats.org/drawingml/2006/main">
+            <a:pPr algn="ctr"/>
+            <a:r>
+              <a:rPr lang="en-US" sz="1500">
+                <a:solidFill>
+                  <a:srgbClr val="D4A843"/>
+                </a:solidFill>
+                <a:latin typeface="微软雅黑"/>
+                <a:ea typeface="微软雅黑"/>
+              </a:rPr>
+              <a:t>招生信息发布：学校本科招生网 · 官方微信公众号</a:t>
+            </a:r>
+          </a:p>
+        </p:txBody>
+      </p:sp>
+      <p:sp>
+        <p:nvSpPr>
+          <p:cNvPr id="100134" name="TextBox 4"/>
+          <p:cNvSpPr txBox="1"/>
+          <p:nvPr/>
+        </p:nvSpPr>
+        <p:spPr>
+          <a:xfrm xmlns:a="http://schemas.openxmlformats.org/drawingml/2006/main">
+            <a:off x="720000" y="4536000"/>
+            <a:ext cx="10753200" cy="432000"/>
+          </a:xfrm>
+          <a:prstGeom xmlns:a="http://schemas.openxmlformats.org/drawingml/2006/main" prst="rect">
+            <a:avLst/>
+          </a:prstGeom>
+        </p:spPr>
+        <p:txBody>
+          <a:bodyPr xmlns:a="http://schemas.openxmlformats.org/drawingml/2006/main"/>
+          <a:lstStyle xmlns:a="http://schemas.openxmlformats.org/drawingml/2006/main"/>
+          <a:p xmlns:a="http://schemas.openxmlformats.org/drawingml/2006/main">
+            <a:pPr algn="ctr"/>
+            <a:r>
+              <a:rPr lang="en-US" sz="1300">
+                <a:solidFill>
+                  <a:srgbClr val="F4E5D2"/>
+                </a:solidFill>
+                <a:latin typeface="微软雅黑"/>
+                <a:ea typeface="微软雅黑"/>
+              </a:rPr>
+              <a:t>咨询方式以官网公布为准，谨防冒充官方人员实施的收费骗局</a:t>
+            </a:r>
+          </a:p>
+        </p:txBody>
+      </p:sp>
+      <p:sp>
+        <p:nvSpPr>
+          <p:cNvPr id="100135" name="TextBox 5"/>
+          <p:cNvSpPr txBox="1"/>
+          <p:nvPr/>
+        </p:nvSpPr>
+        <p:spPr>
+          <a:xfrm xmlns:a="http://schemas.openxmlformats.org/drawingml/2006/main">
+            <a:off x="720000" y="5616000"/>
+            <a:ext cx="10753200" cy="432000"/>
+          </a:xfrm>
+          <a:prstGeom xmlns:a="http://schemas.openxmlformats.org/drawingml/2006/main" prst="rect">
+            <a:avLst/>
+          </a:prstGeom>
+        </p:spPr>
+        <p:txBody>
+          <a:bodyPr xmlns:a="http://schemas.openxmlformats.org/drawingml/2006/main"/>
+          <a:lstStyle xmlns:a="http://schemas.openxmlformats.org/drawingml/2006/main"/>
+          <a:p xmlns:a="http://schemas.openxmlformats.org/drawingml/2006/main">
+            <a:pPr algn="ctr"/>
+            <a:r>
+              <a:rPr lang="en-US" sz="1600">
+                <a:solidFill>
+                  <a:srgbClr val="F4E5D2"/>
+                </a:solidFill>
+                <a:latin typeface="微软雅黑"/>
+                <a:ea typeface="微软雅黑"/>
+              </a:rPr>
+              <a:t>祝所有考生金榜题名、前程似锦！</a:t>
+            </a:r>
+          </a:p>
+        </p:txBody>
+      </p:sp>
+      <p:sp>
+        <p:nvSpPr>
+          <p:cNvPr id="100136" name="TextBox 6"/>
+          <p:cNvSpPr/>
+          <p:nvPr/>
+        </p:nvSpPr>
+        <p:spPr>
+          <a:xfrm xmlns:a="http://schemas.openxmlformats.org/drawingml/2006/main">
+            <a:off x="0" y="6642000"/>
+            <a:ext cx="12193200" cy="216000"/>
+          </a:xfrm>
+          <a:prstGeom xmlns:a="http://schemas.openxmlformats.org/drawingml/2006/main" prst="rect">
+            <a:avLst/>
+          </a:prstGeom>
+          <a:solidFill xmlns:a="http://schemas.openxmlformats.org/drawingml/2006/main">
+            <a:srgbClr val="D4A843"/>
+          </a:solidFill>
+          <a:ln xmlns:a="http://schemas.openxmlformats.org/drawingml/2006/main">
+            <a:noFill/>
+          </a:ln>
+        </p:spPr>
+        <p:txBody>
+          <a:bodyPr xmlns:a="http://schemas.openxmlformats.org/drawingml/2006/main"/>
+          <a:lstStyle xmlns:a="http://schemas.openxmlformats.org/drawingml/2006/main"/>
+          <a:p xmlns:a="http://schemas.openxmlformats.org/drawingml/2006/main"/>
+        </p:txBody>
+      </p:sp>
+      <p:sp>
+        <p:nvSpPr>
+          <p:cNvPr id="100137" name="TextBox 7"/>
+          <p:cNvSpPr txBox="1"/>
+          <p:nvPr/>
+        </p:nvSpPr>
+        <p:spPr>
+          <a:xfrm xmlns:a="http://schemas.openxmlformats.org/drawingml/2006/main">
+            <a:off x="10800000" y="6480000"/>
+            <a:ext cx="936000" cy="324000"/>
+          </a:xfrm>
+          <a:prstGeom xmlns:a="http://schemas.openxmlformats.org/drawingml/2006/main" prst="rect">
+            <a:avLst/>
+          </a:prstGeom>
+        </p:spPr>
+        <p:txBody>
+          <a:bodyPr xmlns:a="http://schemas.openxmlformats.org/drawingml/2006/main"/>
+          <a:lstStyle xmlns:a="http://schemas.openxmlformats.org/drawingml/2006/main"/>
+          <a:p xmlns:a="http://schemas.openxmlformats.org/drawingml/2006/main">
+            <a:pPr algn="r"/>
+            <a:r>
+              <a:rPr lang="en-US" sz="1200">
+                <a:solidFill>
+                  <a:srgbClr val="F4E5D2"/>
+                </a:solidFill>
+                <a:latin typeface="微软雅黑"/>
+                <a:ea typeface="微软雅黑"/>
+              </a:rPr>
+              <a:t>10 / 10</a:t>
+            </a:r>
+          </a:p>
+        </p:txBody>
+      </p:sp>
+    </p:spTree>
+  </p:cSld>
+</p:sld>
+</file>
+
+<file path=ppt/slides/slide2.xml><?xml version="1.0" encoding="utf-8"?>
+<p:sld xmlns:a="http://schemas.openxmlformats.org/drawingml/2006/main" xmlns:p="http://schemas.openxmlformats.org/presentationml/2006/main">
+  <p:cSld>
+    <p:bg>
+      <p:bgPr>
+        <a:solidFill xmlns:a="http://schemas.openxmlformats.org/drawingml/2006/main">
+          <a:srgbClr val="FFFFFF"/>
+        </a:solidFill>
+      </p:bgPr>
+    </p:bg>
+    <p:spTree>
+      <p:nvGrpSpPr>
+        <p:cNvPr id="1" name=""/>
+        <p:cNvGrpSpPr/>
+        <p:nvPr/>
+      </p:nvGrpSpPr>
+      <p:grpSpPr/>
+      <p:sp>
+        <p:nvSpPr>
+          <p:cNvPr id="100004" name="TextBox 1"/>
+          <p:cNvSpPr txBox="1"/>
+          <p:nvPr/>
+        </p:nvSpPr>
+        <p:spPr>
+          <a:xfrm xmlns:a="http://schemas.openxmlformats.org/drawingml/2006/main">
+            <a:off x="864000" y="396000"/>
+            <a:ext cx="10440000" cy="648000"/>
+          </a:xfrm>
+          <a:prstGeom xmlns:a="http://schemas.openxmlformats.org/drawingml/2006/main" prst="rect">
+            <a:avLst/>
+          </a:prstGeom>
+        </p:spPr>
+        <p:txBody>
+          <a:bodyPr xmlns:a="http://schemas.openxmlformats.org/drawingml/2006/main"/>
+          <a:lstStyle xmlns:a="http://schemas.openxmlformats.org/drawingml/2006/main"/>
+          <a:p xmlns:a="http://schemas.openxmlformats.org/drawingml/2006/main">
+            <a:r>
+              <a:rPr lang="en-US" sz="3000" b="1">
+                <a:solidFill>
+                  <a:srgbClr val="8E2430"/>
+                </a:solidFill>
+                <a:latin typeface="微软雅黑"/>
+                <a:ea typeface="微软雅黑"/>
+              </a:rPr>
+              <a:t>学校概况 · 一所底蕴深厚的师范名校</a:t>
+            </a:r>
+          </a:p>
+        </p:txBody>
+      </p:sp>
+      <p:sp>
+        <p:nvSpPr>
+          <p:cNvPr id="100005" name="TextBox 2"/>
+          <p:cNvSpPr/>
+          <p:nvPr/>
+        </p:nvSpPr>
+        <p:spPr>
+          <a:xfrm xmlns:a="http://schemas.openxmlformats.org/drawingml/2006/main">
+            <a:off x="576000" y="540000"/>
+            <a:ext cx="162000" cy="162000"/>
+          </a:xfrm>
+          <a:prstGeom xmlns:a="http://schemas.openxmlformats.org/drawingml/2006/main" prst="rect">
+            <a:avLst/>
+          </a:prstGeom>
+          <a:solidFill xmlns:a="http://schemas.openxmlformats.org/drawingml/2006/main">
+            <a:srgbClr val="D4A843"/>
+          </a:solidFill>
+          <a:ln xmlns:a="http://schemas.openxmlformats.org/drawingml/2006/main">
+            <a:noFill/>
+          </a:ln>
+        </p:spPr>
+        <p:txBody>
+          <a:bodyPr xmlns:a="http://schemas.openxmlformats.org/drawingml/2006/main"/>
+          <a:lstStyle xmlns:a="http://schemas.openxmlformats.org/drawingml/2006/main"/>
+          <a:p xmlns:a="http://schemas.openxmlformats.org/drawingml/2006/main"/>
+        </p:txBody>
+      </p:sp>
+      <p:sp>
+        <p:nvSpPr>
+          <p:cNvPr id="100006" name="TextBox 3"/>
+          <p:cNvSpPr/>
+          <p:nvPr/>
+        </p:nvSpPr>
+        <p:spPr>
+          <a:xfrm xmlns:a="http://schemas.openxmlformats.org/drawingml/2006/main">
+            <a:off x="576000" y="1224000"/>
+            <a:ext cx="6192000" cy="4500000"/>
+          </a:xfrm>
+          <a:prstGeom xmlns:a="http://schemas.openxmlformats.org/drawingml/2006/main" prst="roundRect">
+            <a:avLst/>
+          </a:prstGeom>
+          <a:solidFill xmlns:a="http://schemas.openxmlformats.org/drawingml/2006/main">
+            <a:srgbClr val="F7F1EA"/>
+          </a:solidFill>
+          <a:ln xmlns:a="http://schemas.openxmlformats.org/drawingml/2006/main">
+            <a:noFill/>
+          </a:ln>
+        </p:spPr>
+        <p:txBody>
+          <a:bodyPr xmlns:a="http://schemas.openxmlformats.org/drawingml/2006/main"/>
+          <a:lstStyle xmlns:a="http://schemas.openxmlformats.org/drawingml/2006/main"/>
+          <a:p xmlns:a="http://schemas.openxmlformats.org/drawingml/2006/main"/>
+        </p:txBody>
+      </p:sp>
+      <p:sp>
+        <p:nvSpPr>
+          <p:cNvPr id="100007" name="TextBox 4"/>
+          <p:cNvSpPr txBox="1"/>
+          <p:nvPr/>
+        </p:nvSpPr>
+        <p:spPr>
+          <a:xfrm xmlns:a="http://schemas.openxmlformats.org/drawingml/2006/main">
+            <a:off x="792000" y="1404000"/>
+            <a:ext cx="5616000" cy="4104000"/>
+          </a:xfrm>
+          <a:prstGeom xmlns:a="http://schemas.openxmlformats.org/drawingml/2006/main" prst="rect">
+            <a:avLst/>
+          </a:prstGeom>
+        </p:spPr>
+        <p:txBody>
+          <a:bodyPr xmlns:a="http://schemas.openxmlformats.org/drawingml/2006/main" anchor="t"/>
+          <a:lstStyle xmlns:a="http://schemas.openxmlformats.org/drawingml/2006/main"/>
+          <a:p xmlns:a="http://schemas.openxmlformats.org/drawingml/2006/main">
+            <a:r>
+              <a:rPr lang="en-US" sz="1700">
+                <a:solidFill>
+                  <a:srgbClr val="333333"/>
+                </a:solidFill>
+                <a:latin typeface="微软雅黑"/>
+                <a:ea typeface="微软雅黑"/>
+              </a:rPr>
+              <a:t>陕西师范大学，坐落于十三朝古都西安，教育部直属的全国重点大学，国家首批“双一流”建设高校，也是国家“211工程”重点建设高校，创建于 1944 年。</a:t>
+            </a:r>
+          </a:p>
+          <a:p xmlns:a="http://schemas.openxmlformats.org/drawingml/2006/main">
+            <a:r>
+              <a:rPr lang="en-US" sz="1700">
+                <a:solidFill>
+                  <a:srgbClr val="333333"/>
+                </a:solidFill>
+                <a:latin typeface="微软雅黑"/>
+                <a:ea typeface="微软雅黑"/>
+              </a:rPr>
+              <a:t>学校以教师教育为特色、多学科协调发展，素有“教师教育的一方高台”之誉，是西北乃至全国基础教育师资培养的重要基地。</a:t>
+            </a:r>
+          </a:p>
+          <a:p xmlns:a="http://schemas.openxmlformats.org/drawingml/2006/main">
+            <a:r>
+              <a:rPr lang="en-US" sz="1700">
+                <a:solidFill>
+                  <a:srgbClr val="333333"/>
+                </a:solidFill>
+                <a:latin typeface="微软雅黑"/>
+                <a:ea typeface="微软雅黑"/>
+              </a:rPr>
+              <a:t>现有长安、雁塔两个校区，校园环境优美，人文底蕴深厚，为学子成长提供了优质平台。</a:t>
+            </a:r>
+          </a:p>
+        </p:txBody>
+      </p:sp>
+      <p:sp>
+        <p:nvSpPr>
+          <p:cNvPr id="100008" name="TextBox 5"/>
+          <p:cNvSpPr/>
+          <p:nvPr/>
+        </p:nvSpPr>
+        <p:spPr>
+          <a:xfrm xmlns:a="http://schemas.openxmlformats.org/drawingml/2006/main">
+            <a:off x="7164000" y="1224000"/>
+            <a:ext cx="4176000" cy="1332000"/>
+          </a:xfrm>
+          <a:prstGeom xmlns:a="http://schemas.openxmlformats.org/drawingml/2006/main" prst="roundRect">
+            <a:avLst/>
+          </a:prstGeom>
+          <a:solidFill xmlns:a="http://schemas.openxmlformats.org/drawingml/2006/main">
+            <a:srgbClr val="8E2430"/>
+          </a:solidFill>
+          <a:ln xmlns:a="http://schemas.openxmlformats.org/drawingml/2006/main">
+            <a:noFill/>
+          </a:ln>
+        </p:spPr>
+        <p:txBody>
+          <a:bodyPr xmlns:a="http://schemas.openxmlformats.org/drawingml/2006/main"/>
+          <a:lstStyle xmlns:a="http://schemas.openxmlformats.org/drawingml/2006/main"/>
+          <a:p xmlns:a="http://schemas.openxmlformats.org/drawingml/2006/main"/>
+        </p:txBody>
+      </p:sp>
+      <p:sp>
+        <p:nvSpPr>
+          <p:cNvPr id="100009" name="TextBox 6"/>
+          <p:cNvSpPr txBox="1"/>
+          <p:nvPr/>
+        </p:nvSpPr>
+        <p:spPr>
+          <a:xfrm xmlns:a="http://schemas.openxmlformats.org/drawingml/2006/main">
+            <a:off x="7308000" y="1332000"/>
+            <a:ext cx="3888000" cy="720000"/>
+          </a:xfrm>
+          <a:prstGeom xmlns:a="http://schemas.openxmlformats.org/drawingml/2006/main" prst="rect">
+            <a:avLst/>
+          </a:prstGeom>
+        </p:spPr>
+        <p:txBody>
+          <a:bodyPr xmlns:a="http://schemas.openxmlformats.org/drawingml/2006/main"/>
+          <a:lstStyle xmlns:a="http://schemas.openxmlformats.org/drawingml/2006/main"/>
+          <a:p xmlns:a="http://schemas.openxmlformats.org/drawingml/2006/main">
+            <a:pPr algn="ctr"/>
+            <a:r>
+              <a:rPr lang="en-US" sz="3800" b="1">
+                <a:solidFill>
+                  <a:srgbClr val="FFFFFF"/>
+                </a:solidFill>
+                <a:latin typeface="微软雅黑"/>
+                <a:ea typeface="微软雅黑"/>
+              </a:rPr>
+              <a:t>1944</a:t>
+            </a:r>
+          </a:p>
+        </p:txBody>
+      </p:sp>
+      <p:sp>
+        <p:nvSpPr>
+          <p:cNvPr id="100010" name="TextBox 7"/>
+          <p:cNvSpPr txBox="1"/>
+          <p:nvPr/>
+        </p:nvSpPr>
+        <p:spPr>
+          <a:xfrm xmlns:a="http://schemas.openxmlformats.org/drawingml/2006/main">
+            <a:off x="7308000" y="2160000"/>
+            <a:ext cx="3888000" cy="360000"/>
+          </a:xfrm>
+          <a:prstGeom xmlns:a="http://schemas.openxmlformats.org/drawingml/2006/main" prst="rect">
+            <a:avLst/>
+          </a:prstGeom>
+        </p:spPr>
+        <p:txBody>
+          <a:bodyPr xmlns:a="http://schemas.openxmlformats.org/drawingml/2006/main"/>
+          <a:lstStyle xmlns:a="http://schemas.openxmlformats.org/drawingml/2006/main"/>
+          <a:p xmlns:a="http://schemas.openxmlformats.org/drawingml/2006/main">
+            <a:pPr algn="ctr"/>
+            <a:r>
+              <a:rPr lang="en-US" sz="1500">
+                <a:solidFill>
+                  <a:srgbClr val="F4E5D2"/>
+                </a:solidFill>
+                <a:latin typeface="微软雅黑"/>
+                <a:ea typeface="微软雅黑"/>
+              </a:rPr>
+              <a:t>建校年份 · 古都西安</a:t>
+            </a:r>
+          </a:p>
+        </p:txBody>
+      </p:sp>
+      <p:sp>
+        <p:nvSpPr>
+          <p:cNvPr id="100011" name="TextBox 8"/>
+          <p:cNvSpPr/>
+          <p:nvPr/>
+        </p:nvSpPr>
+        <p:spPr>
+          <a:xfrm xmlns:a="http://schemas.openxmlformats.org/drawingml/2006/main">
+            <a:off x="7164000" y="2880000"/>
+            <a:ext cx="4176000" cy="1332000"/>
+          </a:xfrm>
+          <a:prstGeom xmlns:a="http://schemas.openxmlformats.org/drawingml/2006/main" prst="roundRect">
+            <a:avLst/>
+          </a:prstGeom>
+          <a:solidFill xmlns:a="http://schemas.openxmlformats.org/drawingml/2006/main">
+            <a:srgbClr val="8E2430"/>
+          </a:solidFill>
+          <a:ln xmlns:a="http://schemas.openxmlformats.org/drawingml/2006/main">
+            <a:noFill/>
+          </a:ln>
+        </p:spPr>
+        <p:txBody>
+          <a:bodyPr xmlns:a="http://schemas.openxmlformats.org/drawingml/2006/main"/>
+          <a:lstStyle xmlns:a="http://schemas.openxmlformats.org/drawingml/2006/main"/>
+          <a:p xmlns:a="http://schemas.openxmlformats.org/drawingml/2006/main"/>
+        </p:txBody>
+      </p:sp>
+      <p:sp>
+        <p:nvSpPr>
+          <p:cNvPr id="100012" name="TextBox 9"/>
+          <p:cNvSpPr txBox="1"/>
+          <p:nvPr/>
+        </p:nvSpPr>
+        <p:spPr>
+          <a:xfrm xmlns:a="http://schemas.openxmlformats.org/drawingml/2006/main">
+            <a:off x="7308000" y="2988000"/>
+            <a:ext cx="3888000" cy="720000"/>
+          </a:xfrm>
+          <a:prstGeom xmlns:a="http://schemas.openxmlformats.org/drawingml/2006/main" prst="rect">
+            <a:avLst/>
+          </a:prstGeom>
+        </p:spPr>
+        <p:txBody>
+          <a:bodyPr xmlns:a="http://schemas.openxmlformats.org/drawingml/2006/main"/>
+          <a:lstStyle xmlns:a="http://schemas.openxmlformats.org/drawingml/2006/main"/>
+          <a:p xmlns:a="http://schemas.openxmlformats.org/drawingml/2006/main">
+            <a:pPr algn="ctr"/>
+            <a:r>
+              <a:rPr lang="en-US" sz="3000" b="1">
+                <a:solidFill>
+                  <a:srgbClr val="FFFFFF"/>
+                </a:solidFill>
+                <a:latin typeface="微软雅黑"/>
+                <a:ea typeface="微软雅黑"/>
+              </a:rPr>
+              <a:t>211 · 双一流</a:t>
+            </a:r>
+          </a:p>
+        </p:txBody>
+      </p:sp>
+      <p:sp>
+        <p:nvSpPr>
+          <p:cNvPr id="100013" name="TextBox 10"/>
+          <p:cNvSpPr txBox="1"/>
+          <p:nvPr/>
+        </p:nvSpPr>
+        <p:spPr>
+          <a:xfrm xmlns:a="http://schemas.openxmlformats.org/drawingml/2006/main">
+            <a:off x="7308000" y="3816000"/>
+            <a:ext cx="3888000" cy="360000"/>
+          </a:xfrm>
+          <a:prstGeom xmlns:a="http://schemas.openxmlformats.org/drawingml/2006/main" prst="rect">
+            <a:avLst/>
+          </a:prstGeom>
+        </p:spPr>
+        <p:txBody>
+          <a:bodyPr xmlns:a="http://schemas.openxmlformats.org/drawingml/2006/main"/>
+          <a:lstStyle xmlns:a="http://schemas.openxmlformats.org/drawingml/2006/main"/>
+          <a:p xmlns:a="http://schemas.openxmlformats.org/drawingml/2006/main">
+            <a:pPr algn="ctr"/>
+            <a:r>
+              <a:rPr lang="en-US" sz="1500">
+                <a:solidFill>
+                  <a:srgbClr val="F4E5D2"/>
+                </a:solidFill>
+                <a:latin typeface="微软雅黑"/>
+                <a:ea typeface="微软雅黑"/>
+              </a:rPr>
+              <a:t>国家重点建设高校平台</a:t>
+            </a:r>
+          </a:p>
+        </p:txBody>
+      </p:sp>
+      <p:sp>
+        <p:nvSpPr>
+          <p:cNvPr id="100014" name="TextBox 11"/>
+          <p:cNvSpPr/>
+          <p:nvPr/>
+        </p:nvSpPr>
+        <p:spPr>
+          <a:xfrm xmlns:a="http://schemas.openxmlformats.org/drawingml/2006/main">
+            <a:off x="7164000" y="4536000"/>
+            <a:ext cx="4176000" cy="1188000"/>
+          </a:xfrm>
+          <a:prstGeom xmlns:a="http://schemas.openxmlformats.org/drawingml/2006/main" prst="roundRect">
+            <a:avLst/>
+          </a:prstGeom>
+          <a:solidFill xmlns:a="http://schemas.openxmlformats.org/drawingml/2006/main">
+            <a:srgbClr val="8E2430"/>
+          </a:solidFill>
+          <a:ln xmlns:a="http://schemas.openxmlformats.org/drawingml/2006/main">
+            <a:noFill/>
+          </a:ln>
+        </p:spPr>
+        <p:txBody>
+          <a:bodyPr xmlns:a="http://schemas.openxmlformats.org/drawingml/2006/main"/>
+          <a:lstStyle xmlns:a="http://schemas.openxmlformats.org/drawingml/2006/main"/>
+          <a:p xmlns:a="http://schemas.openxmlformats.org/drawingml/2006/main"/>
+        </p:txBody>
+      </p:sp>
+      <p:sp>
+        <p:nvSpPr>
+          <p:cNvPr id="100015" name="TextBox 12"/>
+          <p:cNvSpPr txBox="1"/>
+          <p:nvPr/>
+        </p:nvSpPr>
+        <p:spPr>
+          <a:xfrm xmlns:a="http://schemas.openxmlformats.org/drawingml/2006/main">
+            <a:off x="7308000" y="4644000"/>
+            <a:ext cx="3888000" cy="576000"/>
+          </a:xfrm>
+          <a:prstGeom xmlns:a="http://schemas.openxmlformats.org/drawingml/2006/main" prst="rect">
+            <a:avLst/>
+          </a:prstGeom>
+        </p:spPr>
+        <p:txBody>
+          <a:bodyPr xmlns:a="http://schemas.openxmlformats.org/drawingml/2006/main"/>
+          <a:lstStyle xmlns:a="http://schemas.openxmlformats.org/drawingml/2006/main"/>
+          <a:p xmlns:a="http://schemas.openxmlformats.org/drawingml/2006/main">
+            <a:pPr algn="ctr"/>
+            <a:r>
+              <a:rPr lang="en-US" sz="3000" b="1">
+                <a:solidFill>
+                  <a:srgbClr val="FFFFFF"/>
+                </a:solidFill>
+                <a:latin typeface="微软雅黑"/>
+                <a:ea typeface="微软雅黑"/>
+              </a:rPr>
+              <a:t>师范为根</a:t>
+            </a:r>
+          </a:p>
+        </p:txBody>
+      </p:sp>
+      <p:sp>
+        <p:nvSpPr>
+          <p:cNvPr id="100016" name="TextBox 13"/>
+          <p:cNvSpPr txBox="1"/>
+          <p:nvPr/>
+        </p:nvSpPr>
+        <p:spPr>
+          <a:xfrm xmlns:a="http://schemas.openxmlformats.org/drawingml/2006/main">
+            <a:off x="7308000" y="5328000"/>
+            <a:ext cx="3888000" cy="360000"/>
+          </a:xfrm>
+          <a:prstGeom xmlns:a="http://schemas.openxmlformats.org/drawingml/2006/main" prst="rect">
+            <a:avLst/>
+          </a:prstGeom>
+        </p:spPr>
+        <p:txBody>
+          <a:bodyPr xmlns:a="http://schemas.openxmlformats.org/drawingml/2006/main"/>
+          <a:lstStyle xmlns:a="http://schemas.openxmlformats.org/drawingml/2006/main"/>
+          <a:p xmlns:a="http://schemas.openxmlformats.org/drawingml/2006/main">
+            <a:pPr algn="ctr"/>
+            <a:r>
+              <a:rPr lang="en-US" sz="1500">
+                <a:solidFill>
+                  <a:srgbClr val="F4E5D2"/>
+                </a:solidFill>
+                <a:latin typeface="微软雅黑"/>
+                <a:ea typeface="微软雅黑"/>
+              </a:rPr>
+              <a:t>教师教育特色鲜明</a:t>
+            </a:r>
+          </a:p>
+        </p:txBody>
+      </p:sp>
+      <p:sp>
+        <p:nvSpPr>
+          <p:cNvPr id="100017" name="TextBox 14"/>
+          <p:cNvSpPr txBox="1"/>
+          <p:nvPr/>
+        </p:nvSpPr>
+        <p:spPr>
+          <a:xfrm xmlns:a="http://schemas.openxmlformats.org/drawingml/2006/main">
+            <a:off x="10944000" y="6552000"/>
+            <a:ext cx="720000" cy="360000"/>
+          </a:xfrm>
+          <a:prstGeom xmlns:a="http://schemas.openxmlformats.org/drawingml/2006/main" prst="rect">
+            <a:avLst/>
+          </a:prstGeom>
+        </p:spPr>
+        <p:txBody>
+          <a:bodyPr xmlns:a="http://schemas.openxmlformats.org/drawingml/2006/main"/>
+          <a:lstStyle xmlns:a="http://schemas.openxmlformats.org/drawingml/2006/main"/>
+          <a:p xmlns:a="http://schemas.openxmlformats.org/drawingml/2006/main">
+            <a:pPr algn="r"/>
+            <a:r>
+              <a:rPr lang="en-US" sz="1200">
+                <a:solidFill>
+                  <a:srgbClr val="8E7C6E"/>
+                </a:solidFill>
+                <a:latin typeface="微软雅黑"/>
+                <a:ea typeface="微软雅黑"/>
+              </a:rPr>
+              <a:t>2 / 10</a:t>
+            </a:r>
+          </a:p>
+        </p:txBody>
+      </p:sp>
+    </p:spTree>
+  </p:cSld>
+</p:sld>
+</file>
+
+<file path=ppt/slides/slide3.xml><?xml version="1.0" encoding="utf-8"?>
+<p:sld xmlns:a="http://schemas.openxmlformats.org/drawingml/2006/main" xmlns:p="http://schemas.openxmlformats.org/presentationml/2006/main">
+  <p:cSld>
+    <p:bg>
+      <p:bgPr>
+        <a:solidFill xmlns:a="http://schemas.openxmlformats.org/drawingml/2006/main">
+          <a:srgbClr val="FFFFFF"/>
+        </a:solidFill>
+      </p:bgPr>
+    </p:bg>
+    <p:spTree>
+      <p:nvGrpSpPr>
+        <p:cNvPr id="1" name=""/>
+        <p:cNvGrpSpPr/>
+        <p:nvPr/>
+      </p:nvGrpSpPr>
+      <p:grpSpPr/>
+      <p:sp>
+        <p:nvSpPr>
+          <p:cNvPr id="100018" name="TextBox 1"/>
+          <p:cNvSpPr txBox="1"/>
+          <p:nvPr/>
+        </p:nvSpPr>
+        <p:spPr>
+          <a:xfrm xmlns:a="http://schemas.openxmlformats.org/drawingml/2006/main">
+            <a:off x="864000" y="396000"/>
+            <a:ext cx="10440000" cy="648000"/>
+          </a:xfrm>
+          <a:prstGeom xmlns:a="http://schemas.openxmlformats.org/drawingml/2006/main" prst="rect">
+            <a:avLst/>
+          </a:prstGeom>
+        </p:spPr>
+        <p:txBody>
+          <a:bodyPr xmlns:a="http://schemas.openxmlformats.org/drawingml/2006/main"/>
+          <a:lstStyle xmlns:a="http://schemas.openxmlformats.org/drawingml/2006/main"/>
+          <a:p xmlns:a="http://schemas.openxmlformats.org/drawingml/2006/main">
+            <a:r>
+              <a:rPr lang="en-US" sz="3000" b="1">
+                <a:solidFill>
+                  <a:srgbClr val="8E2430"/>
+                </a:solidFill>
+                <a:latin typeface="微软雅黑"/>
+                <a:ea typeface="微软雅黑"/>
+              </a:rPr>
+              <a:t>办学特色 · 师范为根 · 学科交叉</a:t>
+            </a:r>
+          </a:p>
+        </p:txBody>
+      </p:sp>
+      <p:sp>
+        <p:nvSpPr>
+          <p:cNvPr id="100019" name="TextBox 2"/>
+          <p:cNvSpPr/>
+          <p:nvPr/>
+        </p:nvSpPr>
+        <p:spPr>
+          <a:xfrm xmlns:a="http://schemas.openxmlformats.org/drawingml/2006/main">
+            <a:off x="576000" y="540000"/>
+            <a:ext cx="162000" cy="162000"/>
+          </a:xfrm>
+          <a:prstGeom xmlns:a="http://schemas.openxmlformats.org/drawingml/2006/main" prst="rect">
+            <a:avLst/>
+          </a:prstGeom>
+          <a:solidFill xmlns:a="http://schemas.openxmlformats.org/drawingml/2006/main">
+            <a:srgbClr val="D4A843"/>
+          </a:solidFill>
+          <a:ln xmlns:a="http://schemas.openxmlformats.org/drawingml/2006/main">
+            <a:noFill/>
+          </a:ln>
+        </p:spPr>
+        <p:txBody>
+          <a:bodyPr xmlns:a="http://schemas.openxmlformats.org/drawingml/2006/main"/>
+          <a:lstStyle xmlns:a="http://schemas.openxmlformats.org/drawingml/2006/main"/>
+          <a:p xmlns:a="http://schemas.openxmlformats.org/drawingml/2006/main"/>
+        </p:txBody>
+      </p:sp>
+      <p:sp>
+        <p:nvSpPr>
+          <p:cNvPr id="100020" name="TextBox 3"/>
+          <p:cNvSpPr/>
+          <p:nvPr/>
+        </p:nvSpPr>
+        <p:spPr>
+          <a:xfrm xmlns:a="http://schemas.openxmlformats.org/drawingml/2006/main">
+            <a:off x="576000" y="1224000"/>
+            <a:ext cx="3564000" cy="4320000"/>
+          </a:xfrm>
+          <a:prstGeom xmlns:a="http://schemas.openxmlformats.org/drawingml/2006/main" prst="roundRect">
+            <a:avLst/>
+          </a:prstGeom>
+          <a:solidFill xmlns:a="http://schemas.openxmlformats.org/drawingml/2006/main">
+            <a:srgbClr val="8E2430"/>
+          </a:solidFill>
+          <a:ln xmlns:a="http://schemas.openxmlformats.org/drawingml/2006/main">
+            <a:noFill/>
+          </a:ln>
+        </p:spPr>
+        <p:txBody>
+          <a:bodyPr xmlns:a="http://schemas.openxmlformats.org/drawingml/2006/main"/>
+          <a:lstStyle xmlns:a="http://schemas.openxmlformats.org/drawingml/2006/main"/>
+          <a:p xmlns:a="http://schemas.openxmlformats.org/drawingml/2006/main"/>
+        </p:txBody>
+      </p:sp>
+      <p:sp>
+        <p:nvSpPr>
+          <p:cNvPr id="100021" name="TextBox 4"/>
+          <p:cNvSpPr txBox="1"/>
+          <p:nvPr/>
+        </p:nvSpPr>
+        <p:spPr>
+          <a:xfrm xmlns:a="http://schemas.openxmlformats.org/drawingml/2006/main">
+            <a:off x="684000" y="1512000"/>
+            <a:ext cx="3348000" cy="576000"/>
+          </a:xfrm>
+          <a:prstGeom xmlns:a="http://schemas.openxmlformats.org/drawingml/2006/main" prst="rect">
+            <a:avLst/>
+          </a:prstGeom>
+        </p:spPr>
+        <p:txBody>
+          <a:bodyPr xmlns:a="http://schemas.openxmlformats.org/drawingml/2006/main"/>
+          <a:lstStyle xmlns:a="http://schemas.openxmlformats.org/drawingml/2006/main"/>
+          <a:p xmlns:a="http://schemas.openxmlformats.org/drawingml/2006/main">
+            <a:r>
+              <a:rPr lang="en-US" sz="2400" b="1">
+                <a:solidFill>
+                  <a:srgbClr val="FFFFFF"/>
+                </a:solidFill>
+                <a:latin typeface="微软雅黑"/>
+                <a:ea typeface="微软雅黑"/>
+              </a:rPr>
+              <a:t>师范为本</a:t>
+            </a:r>
+          </a:p>
+        </p:txBody>
+      </p:sp>
+      <p:sp>
+        <p:nvSpPr>
+          <p:cNvPr id="100022" name="TextBox 5"/>
+          <p:cNvSpPr txBox="1"/>
+          <p:nvPr/>
+        </p:nvSpPr>
+        <p:spPr>
+          <a:xfrm xmlns:a="http://schemas.openxmlformats.org/drawingml/2006/main">
+            <a:off x="684000" y="2232000"/>
+            <a:ext cx="3348000" cy="2520000"/>
+          </a:xfrm>
+          <a:prstGeom xmlns:a="http://schemas.openxmlformats.org/drawingml/2006/main" prst="rect">
+            <a:avLst/>
+          </a:prstGeom>
+        </p:spPr>
+        <p:txBody>
+          <a:bodyPr xmlns:a="http://schemas.openxmlformats.org/drawingml/2006/main"/>
+          <a:lstStyle xmlns:a="http://schemas.openxmlformats.org/drawingml/2006/main"/>
+          <a:p xmlns:a="http://schemas.openxmlformats.org/drawingml/2006/main">
+            <a:r>
+              <a:rPr lang="en-US" sz="1600">
+                <a:solidFill>
+                  <a:srgbClr val="F4E5D2"/>
+                </a:solidFill>
+                <a:latin typeface="微软雅黑"/>
+                <a:ea typeface="微软雅黑"/>
+              </a:rPr>
+              <a:t>深耕基础教育教师培养，师范生培养体系完备，具备从本科到博士的完整教师教育链条，毕业生广受中西部基础教育欢迎。</a:t>
+            </a:r>
+          </a:p>
+        </p:txBody>
+      </p:sp>
+      <p:sp>
+        <p:nvSpPr>
+          <p:cNvPr id="100023" name="TextBox 6"/>
+          <p:cNvSpPr/>
+          <p:nvPr/>
+        </p:nvSpPr>
+        <p:spPr>
+          <a:xfrm xmlns:a="http://schemas.openxmlformats.org/drawingml/2006/main">
+            <a:off x="4374000" y="1224000"/>
+            <a:ext cx="3564000" cy="4320000"/>
+          </a:xfrm>
+          <a:prstGeom xmlns:a="http://schemas.openxmlformats.org/drawingml/2006/main" prst="roundRect">
+            <a:avLst/>
+          </a:prstGeom>
+          <a:solidFill xmlns:a="http://schemas.openxmlformats.org/drawingml/2006/main">
+            <a:srgbClr val="F7F1EA"/>
+          </a:solidFill>
+          <a:ln xmlns:a="http://schemas.openxmlformats.org/drawingml/2006/main">
+            <a:noFill/>
+          </a:ln>
+        </p:spPr>
+        <p:txBody>
+          <a:bodyPr xmlns:a="http://schemas.openxmlformats.org/drawingml/2006/main"/>
+          <a:lstStyle xmlns:a="http://schemas.openxmlformats.org/drawingml/2006/main"/>
+          <a:p xmlns:a="http://schemas.openxmlformats.org/drawingml/2006/main"/>
+        </p:txBody>
+      </p:sp>
+      <p:sp>
+        <p:nvSpPr>
+          <p:cNvPr id="100024" name="TextBox 7"/>
+          <p:cNvSpPr txBox="1"/>
+          <p:nvPr/>
+        </p:nvSpPr>
+        <p:spPr>
+          <a:xfrm xmlns:a="http://schemas.openxmlformats.org/drawingml/2006/main">
+            <a:off x="4482000" y="1512000"/>
+            <a:ext cx="3348000" cy="576000"/>
+          </a:xfrm>
+          <a:prstGeom xmlns:a="http://schemas.openxmlformats.org/drawingml/2006/main" prst="rect">
+            <a:avLst/>
+          </a:prstGeom>
+        </p:spPr>
+        <p:txBody>
+          <a:bodyPr xmlns:a="http://schemas.openxmlformats.org/drawingml/2006/main"/>
+          <a:lstStyle xmlns:a="http://schemas.openxmlformats.org/drawingml/2006/main"/>
+          <a:p xmlns:a="http://schemas.openxmlformats.org/drawingml/2006/main">
+            <a:r>
+              <a:rPr lang="en-US" sz="2400" b="1">
+                <a:solidFill>
+                  <a:srgbClr val="8E2430"/>
+                </a:solidFill>
+                <a:latin typeface="微软雅黑"/>
+                <a:ea typeface="微软雅黑"/>
+              </a:rPr>
+              <a:t>学科交叉</a:t>
+            </a:r>
+          </a:p>
+        </p:txBody>
+      </p:sp>
+      <p:sp>
+        <p:nvSpPr>
+          <p:cNvPr id="100025" name="TextBox 8"/>
+          <p:cNvSpPr txBox="1"/>
+          <p:nvPr/>
+        </p:nvSpPr>
+        <p:spPr>
+          <a:xfrm xmlns:a="http://schemas.openxmlformats.org/drawingml/2006/main">
+            <a:off x="4482000" y="2232000"/>
+            <a:ext cx="3438000" cy="2520000"/>
+          </a:xfrm>
+          <a:prstGeom xmlns:a="http://schemas.openxmlformats.org/drawingml/2006/main" prst="rect">
+            <a:avLst/>
+          </a:prstGeom>
+        </p:spPr>
+        <p:txBody>
+          <a:bodyPr xmlns:a="http://schemas.openxmlformats.org/drawingml/2006/main"/>
+          <a:lstStyle xmlns:a="http://schemas.openxmlformats.org/drawingml/2006/main"/>
+          <a:p xmlns:a="http://schemas.openxmlformats.org/drawingml/2006/main">
+            <a:r>
+              <a:rPr lang="en-US" sz="1600">
+                <a:solidFill>
+                  <a:srgbClr val="333333"/>
+                </a:solidFill>
+                <a:latin typeface="微软雅黑"/>
+                <a:ea typeface="微软雅黑"/>
+              </a:rPr>
+              <a:t>学科门类齐全，文、理、工、经、管、法、教育、艺术等协调发展，鼓励跨学科融合与复合型人才培养。</a:t>
+            </a:r>
+          </a:p>
+        </p:txBody>
+      </p:sp>
+      <p:sp>
+        <p:nvSpPr>
+          <p:cNvPr id="100026" name="TextBox 9"/>
+          <p:cNvSpPr/>
+          <p:nvPr/>
+        </p:nvSpPr>
+        <p:spPr>
+          <a:xfrm xmlns:a="http://schemas.openxmlformats.org/drawingml/2006/main">
+            <a:off x="8172000" y="1224000"/>
+            <a:ext cx="3564000" cy="4320000"/>
+          </a:xfrm>
+          <a:prstGeom xmlns:a="http://schemas.openxmlformats.org/drawingml/2006/main" prst="roundRect">
+            <a:avLst/>
+          </a:prstGeom>
+          <a:solidFill xmlns:a="http://schemas.openxmlformats.org/drawingml/2006/main">
+            <a:srgbClr val="8E2430"/>
+          </a:solidFill>
+          <a:ln xmlns:a="http://schemas.openxmlformats.org/drawingml/2006/main">
+            <a:noFill/>
+          </a:ln>
+        </p:spPr>
+        <p:txBody>
+          <a:bodyPr xmlns:a="http://schemas.openxmlformats.org/drawingml/2006/main"/>
+          <a:lstStyle xmlns:a="http://schemas.openxmlformats.org/drawingml/2006/main"/>
+          <a:p xmlns:a="http://schemas.openxmlformats.org/drawingml/2006/main"/>
+        </p:txBody>
+      </p:sp>
+      <p:sp>
+        <p:nvSpPr>
+          <p:cNvPr id="100027" name="TextBox 10"/>
+          <p:cNvSpPr txBox="1"/>
+          <p:nvPr/>
+        </p:nvSpPr>
+        <p:spPr>
+          <a:xfrm xmlns:a="http://schemas.openxmlformats.org/drawingml/2006/main">
+            <a:off x="8280000" y="1512000"/>
+            <a:ext cx="3348000" cy="576000"/>
+          </a:xfrm>
+          <a:prstGeom xmlns:a="http://schemas.openxmlformats.org/drawingml/2006/main" prst="rect">
+            <a:avLst/>
+          </a:prstGeom>
+        </p:spPr>
+        <p:txBody>
+          <a:bodyPr xmlns:a="http://schemas.openxmlformats.org/drawingml/2006/main"/>
+          <a:lstStyle xmlns:a="http://schemas.openxmlformats.org/drawingml/2006/main"/>
+          <a:p xmlns:a="http://schemas.openxmlformats.org/drawingml/2006/main">
+            <a:r>
+              <a:rPr lang="en-US" sz="2400" b="1">
+                <a:solidFill>
+                  <a:srgbClr val="FFFFFF"/>
+                </a:solidFill>
+                <a:latin typeface="微软雅黑"/>
+                <a:ea typeface="微软雅黑"/>
+              </a:rPr>
+              <a:t>人文底蕴</a:t>
+            </a:r>
+          </a:p>
+        </p:txBody>
+      </p:sp>
+      <p:sp>
+        <p:nvSpPr>
+          <p:cNvPr id="100028" name="TextBox 11"/>
+          <p:cNvSpPr txBox="1"/>
+          <p:nvPr/>
+        </p:nvSpPr>
+        <p:spPr>
+          <a:xfrm xmlns:a="http://schemas.openxmlformats.org/drawingml/2006/main">
+            <a:off x="8280000" y="2232000"/>
+            <a:ext cx="3438000" cy="2520000"/>
+          </a:xfrm>
+          <a:prstGeom xmlns:a="http://schemas.openxmlformats.org/drawingml/2006/main" prst="rect">
+            <a:avLst/>
+          </a:prstGeom>
+        </p:spPr>
+        <p:txBody>
+          <a:bodyPr xmlns:a="http://schemas.openxmlformats.org/drawingml/2006/main"/>
+          <a:lstStyle xmlns:a="http://schemas.openxmlformats.org/drawingml/2006/main"/>
+          <a:p xmlns:a="http://schemas.openxmlformats.org/drawingml/2006/main">
+            <a:r>
+              <a:rPr lang="en-US" sz="1600">
+                <a:solidFill>
+                  <a:srgbClr val="F4E5D2"/>
+                </a:solidFill>
+                <a:latin typeface="微软雅黑"/>
+                <a:ea typeface="微软雅黑"/>
+              </a:rPr>
+              <a:t>身处古都西安，高校云集、文博资源丰富，博物馆、古迹与名家讲座近在咫尺，学术人文氛围十分浓郁。</a:t>
+            </a:r>
+          </a:p>
+        </p:txBody>
+      </p:sp>
+      <p:sp>
+        <p:nvSpPr>
+          <p:cNvPr id="100029" name="TextBox 12"/>
+          <p:cNvSpPr txBox="1"/>
+          <p:nvPr/>
+        </p:nvSpPr>
+        <p:spPr>
+          <a:xfrm xmlns:a="http://schemas.openxmlformats.org/drawingml/2006/main">
+            <a:off x="10944000" y="6552000"/>
+            <a:ext cx="720000" cy="360000"/>
+          </a:xfrm>
+          <a:prstGeom xmlns:a="http://schemas.openxmlformats.org/drawingml/2006/main" prst="rect">
+            <a:avLst/>
+          </a:prstGeom>
+        </p:spPr>
+        <p:txBody>
+          <a:bodyPr xmlns:a="http://schemas.openxmlformats.org/drawingml/2006/main"/>
+          <a:lstStyle xmlns:a="http://schemas.openxmlformats.org/drawingml/2006/main"/>
+          <a:p xmlns:a="http://schemas.openxmlformats.org/drawingml/2006/main">
+            <a:pPr algn="r"/>
+            <a:r>
+              <a:rPr lang="en-US" sz="1200">
+                <a:solidFill>
+                  <a:srgbClr val="8E7C6E"/>
+                </a:solidFill>
+                <a:latin typeface="微软雅黑"/>
+                <a:ea typeface="微软雅黑"/>
+              </a:rPr>
+              <a:t>3 / 10</a:t>
+            </a:r>
+          </a:p>
+        </p:txBody>
+      </p:sp>
+    </p:spTree>
+  </p:cSld>
+</p:sld>
+</file>
+
+<file path=ppt/slides/slide4.xml><?xml version="1.0" encoding="utf-8"?>
+<p:sld xmlns:a="http://schemas.openxmlformats.org/drawingml/2006/main" xmlns:p="http://schemas.openxmlformats.org/presentationml/2006/main">
+  <p:cSld>
+    <p:bg>
+      <p:bgPr>
+        <a:solidFill xmlns:a="http://schemas.openxmlformats.org/drawingml/2006/main">
+          <a:srgbClr val="FFFFFF"/>
+        </a:solidFill>
+      </p:bgPr>
+    </p:bg>
+    <p:spTree>
+      <p:nvGrpSpPr>
+        <p:cNvPr id="1" name=""/>
+        <p:cNvGrpSpPr/>
+        <p:nvPr/>
+      </p:nvGrpSpPr>
+      <p:grpSpPr/>
+      <p:sp>
+        <p:nvSpPr>
+          <p:cNvPr id="100030" name="TextBox 1"/>
+          <p:cNvSpPr txBox="1"/>
+          <p:nvPr/>
+        </p:nvSpPr>
+        <p:spPr>
+          <a:xfrm xmlns:a="http://schemas.openxmlformats.org/drawingml/2006/main">
+            <a:off x="864000" y="396000"/>
+            <a:ext cx="10440000" cy="648000"/>
+          </a:xfrm>
+          <a:prstGeom xmlns:a="http://schemas.openxmlformats.org/drawingml/2006/main" prst="rect">
+            <a:avLst/>
+          </a:prstGeom>
+        </p:spPr>
+        <p:txBody>
+          <a:bodyPr xmlns:a="http://schemas.openxmlformats.org/drawingml/2006/main"/>
+          <a:lstStyle xmlns:a="http://schemas.openxmlformats.org/drawingml/2006/main"/>
+          <a:p xmlns:a="http://schemas.openxmlformats.org/drawingml/2006/main">
+            <a:r>
+              <a:rPr lang="en-US" sz="3000" b="1">
+                <a:solidFill>
+                  <a:srgbClr val="8E2430"/>
+                </a:solidFill>
+                <a:latin typeface="微软雅黑"/>
+                <a:ea typeface="微软雅黑"/>
+              </a:rPr>
+              <a:t>优势学科 · 一流建设与王牌专业</a:t>
+            </a:r>
+          </a:p>
+        </p:txBody>
+      </p:sp>
+      <p:sp>
+        <p:nvSpPr>
+          <p:cNvPr id="100031" name="TextBox 2"/>
+          <p:cNvSpPr/>
+          <p:nvPr/>
+        </p:nvSpPr>
+        <p:spPr>
+          <a:xfrm xmlns:a="http://schemas.openxmlformats.org/drawingml/2006/main">
+            <a:off x="576000" y="540000"/>
+            <a:ext cx="162000" cy="162000"/>
+          </a:xfrm>
+          <a:prstGeom xmlns:a="http://schemas.openxmlformats.org/drawingml/2006/main" prst="rect">
+            <a:avLst/>
+          </a:prstGeom>
+          <a:solidFill xmlns:a="http://schemas.openxmlformats.org/drawingml/2006/main">
+            <a:srgbClr val="D4A843"/>
+          </a:solidFill>
+          <a:ln xmlns:a="http://schemas.openxmlformats.org/drawingml/2006/main">
+            <a:noFill/>
+          </a:ln>
+        </p:spPr>
+        <p:txBody>
+          <a:bodyPr xmlns:a="http://schemas.openxmlformats.org/drawingml/2006/main"/>
+          <a:lstStyle xmlns:a="http://schemas.openxmlformats.org/drawingml/2006/main"/>
+          <a:p xmlns:a="http://schemas.openxmlformats.org/drawingml/2006/main"/>
+        </p:txBody>
+      </p:sp>
+      <p:sp>
+        <p:nvSpPr>
+          <p:cNvPr id="100032" name="TextBox 3"/>
+          <p:cNvSpPr/>
+          <p:nvPr/>
+        </p:nvSpPr>
+        <p:spPr>
+          <a:xfrm xmlns:a="http://schemas.openxmlformats.org/drawingml/2006/main">
+            <a:off x="576000" y="1188000"/>
+            <a:ext cx="3420000" cy="2016000"/>
+          </a:xfrm>
+          <a:prstGeom xmlns:a="http://schemas.openxmlformats.org/drawingml/2006/main" prst="roundRect">
+            <a:avLst/>
+          </a:prstGeom>
+          <a:solidFill xmlns:a="http://schemas.openxmlformats.org/drawingml/2006/main">
+            <a:srgbClr val="F7F1EA"/>
+          </a:solidFill>
+          <a:ln xmlns:a="http://schemas.openxmlformats.org/drawingml/2006/main">
+            <a:noFill/>
+          </a:ln>
+        </p:spPr>
+        <p:txBody>
+          <a:bodyPr xmlns:a="http://schemas.openxmlformats.org/drawingml/2006/main"/>
+          <a:lstStyle xmlns:a="http://schemas.openxmlformats.org/drawingml/2006/main"/>
+          <a:p xmlns:a="http://schemas.openxmlformats.org/drawingml/2006/main"/>
+        </p:txBody>
+      </p:sp>
+      <p:sp>
+        <p:nvSpPr>
+          <p:cNvPr id="100033" name="TextBox 4"/>
+          <p:cNvSpPr txBox="1"/>
+          <p:nvPr/>
+        </p:nvSpPr>
+        <p:spPr>
+          <a:xfrm xmlns:a="http://schemas.openxmlformats.org/drawingml/2006/main">
+            <a:off x="720000" y="1296000"/>
+            <a:ext cx="3132000" cy="504000"/>
+          </a:xfrm>
+          <a:prstGeom xmlns:a="http://schemas.openxmlformats.org/drawingml/2006/main" prst="rect">
+            <a:avLst/>
+          </a:prstGeom>
+        </p:spPr>
+        <p:txBody>
+          <a:bodyPr xmlns:a="http://schemas.openxmlformats.org/drawingml/2006/main"/>
+          <a:lstStyle xmlns:a="http://schemas.openxmlformats.org/drawingml/2006/main"/>
+          <a:p xmlns:a="http://schemas.openxmlformats.org/drawingml/2006/main">
+            <a:r>
+              <a:rPr lang="en-US" sz="2000" b="1">
+                <a:solidFill>
+                  <a:srgbClr val="8E2430"/>
+                </a:solidFill>
+                <a:latin typeface="微软雅黑"/>
+                <a:ea typeface="微软雅黑"/>
+              </a:rPr>
+              <a:t>中国语言文学</a:t>
+            </a:r>
+          </a:p>
+        </p:txBody>
+      </p:sp>
+      <p:sp>
+        <p:nvSpPr>
+          <p:cNvPr id="100034" name="TextBox 5"/>
+          <p:cNvSpPr txBox="1"/>
+          <p:nvPr/>
+        </p:nvSpPr>
+        <p:spPr>
+          <a:xfrm xmlns:a="http://schemas.openxmlformats.org/drawingml/2006/main">
+            <a:off x="720000" y="1908000"/>
+            <a:ext cx="3132000" cy="936000"/>
+          </a:xfrm>
+          <a:prstGeom xmlns:a="http://schemas.openxmlformats.org/drawingml/2006/main" prst="rect">
+            <a:avLst/>
+          </a:prstGeom>
+        </p:spPr>
+        <p:txBody>
+          <a:bodyPr xmlns:a="http://schemas.openxmlformats.org/drawingml/2006/main"/>
+          <a:lstStyle xmlns:a="http://schemas.openxmlformats.org/drawingml/2006/main"/>
+          <a:p xmlns:a="http://schemas.openxmlformats.org/drawingml/2006/main">
+            <a:r>
+              <a:rPr lang="en-US" sz="1400">
+                <a:solidFill>
+                  <a:srgbClr val="333333"/>
+                </a:solidFill>
+                <a:latin typeface="微软雅黑"/>
+                <a:ea typeface="微软雅黑"/>
+              </a:rPr>
+              <a:t>传统优势学科，文科实力雄厚，师范方向特色突出。</a:t>
+            </a:r>
+          </a:p>
+        </p:txBody>
+      </p:sp>
+      <p:sp>
+        <p:nvSpPr>
+          <p:cNvPr id="100035" name="TextBox 6"/>
+          <p:cNvSpPr/>
+          <p:nvPr/>
+        </p:nvSpPr>
+        <p:spPr>
+          <a:xfrm xmlns:a="http://schemas.openxmlformats.org/drawingml/2006/main">
+            <a:off x="4392000" y="1188000"/>
+            <a:ext cx="3420000" cy="2016000"/>
+          </a:xfrm>
+          <a:prstGeom xmlns:a="http://schemas.openxmlformats.org/drawingml/2006/main" prst="roundRect">
+            <a:avLst/>
+          </a:prstGeom>
+          <a:solidFill xmlns:a="http://schemas.openxmlformats.org/drawingml/2006/main">
+            <a:srgbClr val="F7F1EA"/>
+          </a:solidFill>
+          <a:ln xmlns:a="http://schemas.openxmlformats.org/drawingml/2006/main">
+            <a:noFill/>
+          </a:ln>
+        </p:spPr>
+        <p:txBody>
+          <a:bodyPr xmlns:a="http://schemas.openxmlformats.org/drawingml/2006/main"/>
+          <a:lstStyle xmlns:a="http://schemas.openxmlformats.org/drawingml/2006/main"/>
+          <a:p xmlns:a="http://schemas.openxmlformats.org/drawingml/2006/main"/>
+        </p:txBody>
+      </p:sp>
+      <p:sp>
+        <p:nvSpPr>
+          <p:cNvPr id="100036" name="TextBox 7"/>
+          <p:cNvSpPr txBox="1"/>
+          <p:nvPr/>
+        </p:nvSpPr>
+        <p:spPr>
+          <a:xfrm xmlns:a="http://schemas.openxmlformats.org/drawingml/2006/main">
+            <a:off x="4536000" y="1296000"/>
+            <a:ext cx="3132000" cy="504000"/>
+          </a:xfrm>
+          <a:prstGeom xmlns:a="http://schemas.openxmlformats.org/drawingml/2006/main" prst="rect">
+            <a:avLst/>
+          </a:prstGeom>
+        </p:spPr>
+        <p:txBody>
+          <a:bodyPr xmlns:a="http://schemas.openxmlformats.org/drawingml/2006/main"/>
+          <a:lstStyle xmlns:a="http://schemas.openxmlformats.org/drawingml/2006/main"/>
+          <a:p xmlns:a="http://schemas.openxmlformats.org/drawingml/2006/main">
+            <a:r>
+              <a:rPr lang="en-US" sz="2000" b="1">
+                <a:solidFill>
+                  <a:srgbClr val="8E2430"/>
+                </a:solidFill>
+                <a:latin typeface="微软雅黑"/>
+                <a:ea typeface="微软雅黑"/>
+              </a:rPr>
+              <a:t>教育学</a:t>
+            </a:r>
+          </a:p>
+        </p:txBody>
+      </p:sp>
+      <p:sp>
+        <p:nvSpPr>
+          <p:cNvPr id="100037" name="TextBox 8"/>
+          <p:cNvSpPr txBox="1"/>
+          <p:nvPr/>
+        </p:nvSpPr>
+        <p:spPr>
+          <a:xfrm xmlns:a="http://schemas.openxmlformats.org/drawingml/2006/main">
+            <a:off x="4536000" y="1908000"/>
+            <a:ext cx="3132000" cy="936000"/>
+          </a:xfrm>
+          <a:prstGeom xmlns:a="http://schemas.openxmlformats.org/drawingml/2006/main" prst="rect">
+            <a:avLst/>
+          </a:prstGeom>
+        </p:spPr>
+        <p:txBody>
+          <a:bodyPr xmlns:a="http://schemas.openxmlformats.org/drawingml/2006/main"/>
+          <a:lstStyle xmlns:a="http://schemas.openxmlformats.org/drawingml/2006/main"/>
+          <a:p xmlns:a="http://schemas.openxmlformats.org/drawingml/2006/main">
+            <a:r>
+              <a:rPr lang="en-US" sz="1400">
+                <a:solidFill>
+                  <a:srgbClr val="333333"/>
+                </a:solidFill>
+                <a:latin typeface="微软雅黑"/>
+                <a:ea typeface="微软雅黑"/>
+              </a:rPr>
+              <a:t>面向基础教育的核心学科，一流学科建设的重点方向。</a:t>
+            </a:r>
+          </a:p>
+        </p:txBody>
+      </p:sp>
+      <p:sp>
+        <p:nvSpPr>
+          <p:cNvPr id="100038" name="TextBox 9"/>
+          <p:cNvSpPr/>
+          <p:nvPr/>
+        </p:nvSpPr>
+        <p:spPr>
+          <a:xfrm xmlns:a="http://schemas.openxmlformats.org/drawingml/2006/main">
+            <a:off x="8208000" y="1188000"/>
+            <a:ext cx="3420000" cy="2016000"/>
+          </a:xfrm>
+          <a:prstGeom xmlns:a="http://schemas.openxmlformats.org/drawingml/2006/main" prst="roundRect">
+            <a:avLst/>
+          </a:prstGeom>
+          <a:solidFill xmlns:a="http://schemas.openxmlformats.org/drawingml/2006/main">
+            <a:srgbClr val="F7F1EA"/>
+          </a:solidFill>
+          <a:ln xmlns:a="http://schemas.openxmlformats.org/drawingml/2006/main">
+            <a:noFill/>
+          </a:ln>
+        </p:spPr>
+        <p:txBody>
+          <a:bodyPr xmlns:a="http://schemas.openxmlformats.org/drawingml/2006/main"/>
+          <a:lstStyle xmlns:a="http://schemas.openxmlformats.org/drawingml/2006/main"/>
+          <a:p xmlns:a="http://schemas.openxmlformats.org/drawingml/2006/main"/>
+        </p:txBody>
+      </p:sp>
+      <p:sp>
+        <p:nvSpPr>
+          <p:cNvPr id="100039" name="TextBox 10"/>
+          <p:cNvSpPr txBox="1"/>
+          <p:nvPr/>
+        </p:nvSpPr>
+        <p:spPr>
+          <a:xfrm xmlns:a="http://schemas.openxmlformats.org/drawingml/2006/main">
+            <a:off x="8352000" y="1296000"/>
+            <a:ext cx="3132000" cy="504000"/>
+          </a:xfrm>
+          <a:prstGeom xmlns:a="http://schemas.openxmlformats.org/drawingml/2006/main" prst="rect">
+            <a:avLst/>
+          </a:prstGeom>
+        </p:spPr>
+        <p:txBody>
+          <a:bodyPr xmlns:a="http://schemas.openxmlformats.org/drawingml/2006/main"/>
+          <a:lstStyle xmlns:a="http://schemas.openxmlformats.org/drawingml/2006/main"/>
+          <a:p xmlns:a="http://schemas.openxmlformats.org/drawingml/2006/main">
+            <a:r>
+              <a:rPr lang="en-US" sz="2000" b="1">
+                <a:solidFill>
+                  <a:srgbClr val="8E2430"/>
+                </a:solidFill>
+                <a:latin typeface="微软雅黑"/>
+                <a:ea typeface="微软雅黑"/>
+              </a:rPr>
+              <a:t>历史学（中国史）</a:t>
+            </a:r>
+          </a:p>
+        </p:txBody>
+      </p:sp>
+      <p:sp>
+        <p:nvSpPr>
+          <p:cNvPr id="100040" name="TextBox 11"/>
+          <p:cNvSpPr txBox="1"/>
+          <p:nvPr/>
+        </p:nvSpPr>
+        <p:spPr>
+          <a:xfrm xmlns:a="http://schemas.openxmlformats.org/drawingml/2006/main">
+            <a:off x="8352000" y="1908000"/>
+            <a:ext cx="3132000" cy="936000"/>
+          </a:xfrm>
+          <a:prstGeom xmlns:a="http://schemas.openxmlformats.org/drawingml/2006/main" prst="rect">
+            <a:avLst/>
+          </a:prstGeom>
+        </p:spPr>
+        <p:txBody>
+          <a:bodyPr xmlns:a="http://schemas.openxmlformats.org/drawingml/2006/main"/>
+          <a:lstStyle xmlns:a="http://schemas.openxmlformats.org/drawingml/2006/main"/>
+          <a:p xmlns:a="http://schemas.openxmlformats.org/drawingml/2006/main">
+            <a:r>
+              <a:rPr lang="en-US" sz="1400">
+                <a:solidFill>
+                  <a:srgbClr val="333333"/>
+                </a:solidFill>
+                <a:latin typeface="微软雅黑"/>
+                <a:ea typeface="微软雅黑"/>
+              </a:rPr>
+              <a:t>地处西安，考古与历史研究资源得天独厚。</a:t>
+            </a:r>
+          </a:p>
+        </p:txBody>
+      </p:sp>
+      <p:sp>
+        <p:nvSpPr>
+          <p:cNvPr id="100041" name="TextBox 12"/>
+          <p:cNvSpPr/>
+          <p:nvPr/>
+        </p:nvSpPr>
+        <p:spPr>
+          <a:xfrm xmlns:a="http://schemas.openxmlformats.org/drawingml/2006/main">
+            <a:off x="576000" y="3384000"/>
+            <a:ext cx="3420000" cy="2016000"/>
+          </a:xfrm>
+          <a:prstGeom xmlns:a="http://schemas.openxmlformats.org/drawingml/2006/main" prst="roundRect">
+            <a:avLst/>
+          </a:prstGeom>
+          <a:solidFill xmlns:a="http://schemas.openxmlformats.org/drawingml/2006/main">
+            <a:srgbClr val="F7F1EA"/>
+          </a:solidFill>
+          <a:ln xmlns:a="http://schemas.openxmlformats.org/drawingml/2006/main">
+            <a:noFill/>
+          </a:ln>
+        </p:spPr>
+        <p:txBody>
+          <a:bodyPr xmlns:a="http://schemas.openxmlformats.org/drawingml/2006/main"/>
+          <a:lstStyle xmlns:a="http://schemas.openxmlformats.org/drawingml/2006/main"/>
+          <a:p xmlns:a="http://schemas.openxmlformats.org/drawingml/2006/main"/>
+        </p:txBody>
+      </p:sp>
+      <p:sp>
+        <p:nvSpPr>
+          <p:cNvPr id="100042" name="TextBox 13"/>
+          <p:cNvSpPr txBox="1"/>
+          <p:nvPr/>
+        </p:nvSpPr>
+        <p:spPr>
+          <a:xfrm xmlns:a="http://schemas.openxmlformats.org/drawingml/2006/main">
+            <a:off x="720000" y="3492000"/>
+            <a:ext cx="3132000" cy="504000"/>
+          </a:xfrm>
+          <a:prstGeom xmlns:a="http://schemas.openxmlformats.org/drawingml/2006/main" prst="rect">
+            <a:avLst/>
+          </a:prstGeom>
+        </p:spPr>
+        <p:txBody>
+          <a:bodyPr xmlns:a="http://schemas.openxmlformats.org/drawingml/2006/main"/>
+          <a:lstStyle xmlns:a="http://schemas.openxmlformats.org/drawingml/2006/main"/>
+          <a:p xmlns:a="http://schemas.openxmlformats.org/drawingml/2006/main">
+            <a:r>
+              <a:rPr lang="en-US" sz="2000" b="1">
+                <a:solidFill>
+                  <a:srgbClr val="8E2430"/>
+                </a:solidFill>
+                <a:latin typeface="微软雅黑"/>
+                <a:ea typeface="微软雅黑"/>
+              </a:rPr>
+              <a:t>数学与应用数学（师范）</a:t>
+            </a:r>
+          </a:p>
+        </p:txBody>
+      </p:sp>
+      <p:sp>
+        <p:nvSpPr>
+          <p:cNvPr id="100043" name="TextBox 14"/>
+          <p:cNvSpPr txBox="1"/>
+          <p:nvPr/>
+        </p:nvSpPr>
+        <p:spPr>
+          <a:xfrm xmlns:a="http://schemas.openxmlformats.org/drawingml/2006/main">
+            <a:off x="720000" y="4104000"/>
+            <a:ext cx="3240000" cy="936000"/>
+          </a:xfrm>
+          <a:prstGeom xmlns:a="http://schemas.openxmlformats.org/drawingml/2006/main" prst="rect">
+            <a:avLst/>
+          </a:prstGeom>
+        </p:spPr>
+        <p:txBody>
+          <a:bodyPr xmlns:a="http://schemas.openxmlformats.org/drawingml/2006/main"/>
+          <a:lstStyle xmlns:a="http://schemas.openxmlformats.org/drawingml/2006/main"/>
+          <a:p xmlns:a="http://schemas.openxmlformats.org/drawingml/2006/main">
+            <a:r>
+              <a:rPr lang="en-US" sz="1400">
+                <a:solidFill>
+                  <a:srgbClr val="333333"/>
+                </a:solidFill>
+                <a:latin typeface="微软雅黑"/>
+                <a:ea typeface="微软雅黑"/>
+              </a:rPr>
+              <a:t>理科基础扎实，师范生培养体系成熟。</a:t>
+            </a:r>
+          </a:p>
+        </p:txBody>
+      </p:sp>
+      <p:sp>
+        <p:nvSpPr>
+          <p:cNvPr id="100044" name="TextBox 15"/>
+          <p:cNvSpPr/>
+          <p:nvPr/>
+        </p:nvSpPr>
+        <p:spPr>
+          <a:xfrm xmlns:a="http://schemas.openxmlformats.org/drawingml/2006/main">
+            <a:off x="4392000" y="3384000"/>
+            <a:ext cx="3420000" cy="2016000"/>
+          </a:xfrm>
+          <a:prstGeom xmlns:a="http://schemas.openxmlformats.org/drawingml/2006/main" prst="roundRect">
+            <a:avLst/>
+          </a:prstGeom>
+          <a:solidFill xmlns:a="http://schemas.openxmlformats.org/drawingml/2006/main">
+            <a:srgbClr val="F7F1EA"/>
+          </a:solidFill>
+          <a:ln xmlns:a="http://schemas.openxmlformats.org/drawingml/2006/main">
+            <a:noFill/>
+          </a:ln>
+        </p:spPr>
+        <p:txBody>
+          <a:bodyPr xmlns:a="http://schemas.openxmlformats.org/drawingml/2006/main"/>
+          <a:lstStyle xmlns:a="http://schemas.openxmlformats.org/drawingml/2006/main"/>
+          <a:p xmlns:a="http://schemas.openxmlformats.org/drawingml/2006/main"/>
+        </p:txBody>
+      </p:sp>
+      <p:sp>
+        <p:nvSpPr>
+          <p:cNvPr id="100045" name="TextBox 16"/>
+          <p:cNvSpPr txBox="1"/>
+          <p:nvPr/>
+        </p:nvSpPr>
+        <p:spPr>
+          <a:xfrm xmlns:a="http://schemas.openxmlformats.org/drawingml/2006/main">
+            <a:off x="4536000" y="3492000"/>
+            <a:ext cx="3132000" cy="504000"/>
+          </a:xfrm>
+          <a:prstGeom xmlns:a="http://schemas.openxmlformats.org/drawingml/2006/main" prst="rect">
+            <a:avLst/>
+          </a:prstGeom>
+        </p:spPr>
+        <p:txBody>
+          <a:bodyPr xmlns:a="http://schemas.openxmlformats.org/drawingml/2006/main"/>
+          <a:lstStyle xmlns:a="http://schemas.openxmlformats.org/drawingml/2006/main"/>
+          <a:p xmlns:a="http://schemas.openxmlformats.org/drawingml/2006/main">
+            <a:r>
+              <a:rPr lang="en-US" sz="2000" b="1">
+                <a:solidFill>
+                  <a:srgbClr val="8E2430"/>
+                </a:solidFill>
+                <a:latin typeface="微软雅黑"/>
+                <a:ea typeface="微软雅黑"/>
+              </a:rPr>
+              <a:t>物理学（师范）</a:t>
+            </a:r>
+          </a:p>
+        </p:txBody>
+      </p:sp>
+      <p:sp>
+        <p:nvSpPr>
+          <p:cNvPr id="100046" name="TextBox 17"/>
+          <p:cNvSpPr txBox="1"/>
+          <p:nvPr/>
+        </p:nvSpPr>
+        <p:spPr>
+          <a:xfrm xmlns:a="http://schemas.openxmlformats.org/drawingml/2006/main">
+            <a:off x="4536000" y="4104000"/>
+            <a:ext cx="3132000" cy="936000"/>
+          </a:xfrm>
+          <a:prstGeom xmlns:a="http://schemas.openxmlformats.org/drawingml/2006/main" prst="rect">
+            <a:avLst/>
+          </a:prstGeom>
+        </p:spPr>
+        <p:txBody>
+          <a:bodyPr xmlns:a="http://schemas.openxmlformats.org/drawingml/2006/main"/>
+          <a:lstStyle xmlns:a="http://schemas.openxmlformats.org/drawingml/2006/main"/>
+          <a:p>
+            <a:r>
+              <a:rPr lang="en-US" sz="1400">
+                <a:solidFill>
+                  <a:srgbClr val="333333"/>
+                </a:solidFill>
+                <a:latin typeface="微软雅黑"/>
+                <a:ea typeface="微软雅黑"/>
+              </a:rPr>
+              <a:t>理论教学与实践兼备，</a:t>
+            </a:r>
+          </a:p>
+          <a:p>
+            <a:r>
+              <a:rPr lang="en-US" sz="1400">
+                <a:solidFill>
+                  <a:srgbClr val="333333"/>
+                </a:solidFill>
+                <a:latin typeface="微软雅黑"/>
+                <a:ea typeface="微软雅黑"/>
+              </a:rPr>
+              <a:t>科研平台不断完善。</a:t>
+            </a:r>
+          </a:p>
+        </p:txBody>
+      </p:sp>
+      <p:sp>
+        <p:nvSpPr>
+          <p:cNvPr id="100047" name="TextBox 18"/>
+          <p:cNvSpPr/>
+          <p:nvPr/>
+        </p:nvSpPr>
+        <p:spPr>
+          <a:xfrm xmlns:a="http://schemas.openxmlformats.org/drawingml/2006/main">
+            <a:off x="8208000" y="3384000"/>
+            <a:ext cx="3420000" cy="2016000"/>
+          </a:xfrm>
+          <a:prstGeom xmlns:a="http://schemas.openxmlformats.org/drawingml/2006/main" prst="roundRect">
+            <a:avLst/>
+          </a:prstGeom>
+          <a:solidFill xmlns:a="http://schemas.openxmlformats.org/drawingml/2006/main">
+            <a:srgbClr val="F7F1EA"/>
+          </a:solidFill>
+          <a:ln xmlns:a="http://schemas.openxmlformats.org/drawingml/2006/main">
+            <a:noFill/>
+          </a:ln>
+        </p:spPr>
+        <p:txBody>
+          <a:bodyPr xmlns:a="http://schemas.openxmlformats.org/drawingml/2006/main"/>
+          <a:lstStyle xmlns:a="http://schemas.openxmlformats.org/drawingml/2006/main"/>
+          <a:p xmlns:a="http://schemas.openxmlformats.org/drawingml/2006/main"/>
+        </p:txBody>
+      </p:sp>
+      <p:sp>
+        <p:nvSpPr>
+          <p:cNvPr id="100048" name="TextBox 19"/>
+          <p:cNvSpPr txBox="1"/>
+          <p:nvPr/>
+        </p:nvSpPr>
+        <p:spPr>
+          <a:xfrm xmlns:a="http://schemas.openxmlformats.org/drawingml/2006/main">
+            <a:off x="8352000" y="3492000"/>
+            <a:ext cx="3132000" cy="504000"/>
+          </a:xfrm>
+          <a:prstGeom xmlns:a="http://schemas.openxmlformats.org/drawingml/2006/main" prst="rect">
+            <a:avLst/>
+          </a:prstGeom>
+        </p:spPr>
+        <p:txBody>
+          <a:bodyPr xmlns:a="http://schemas.openxmlformats.org/drawingml/2006/main"/>
+          <a:lstStyle xmlns:a="http://schemas.openxmlformats.org/drawingml/2006/main"/>
+          <a:p xmlns:a="http://schemas.openxmlformats.org/drawingml/2006/main">
+            <a:r>
+              <a:rPr lang="en-US" sz="2000" b="1">
+                <a:solidFill>
+                  <a:srgbClr val="8E2430"/>
+                </a:solidFill>
+                <a:latin typeface="微软雅黑"/>
+                <a:ea typeface="微软雅黑"/>
+              </a:rPr>
+              <a:t>化学（师范）</a:t>
+            </a:r>
+          </a:p>
+        </p:txBody>
+      </p:sp>
+      <p:sp>
+        <p:nvSpPr>
+          <p:cNvPr id="100049" name="TextBox 20"/>
+          <p:cNvSpPr txBox="1"/>
+          <p:nvPr/>
+        </p:nvSpPr>
+        <p:spPr>
+          <a:xfrm xmlns:a="http://schemas.openxmlformats.org/drawingml/2006/main">
+            <a:off x="8352000" y="4104000"/>
+            <a:ext cx="3132000" cy="936000"/>
+          </a:xfrm>
+          <a:prstGeom xmlns:a="http://schemas.openxmlformats.org/drawingml/2006/main" prst="rect">
+            <a:avLst/>
+          </a:prstGeom>
+        </p:spPr>
+        <p:txBody>
+          <a:bodyPr xmlns:a="http://schemas.openxmlformats.org/drawingml/2006/main"/>
+          <a:lstStyle xmlns:a="http://schemas.openxmlformats.org/drawingml/2006/main"/>
+          <a:p xmlns:a="http://schemas.openxmlformats.org/drawingml/2006/main">
+            <a:r>
+              <a:rPr lang="en-US" sz="1400">
+                <a:solidFill>
+                  <a:srgbClr val="333333"/>
+                </a:solidFill>
+                <a:latin typeface="微软雅黑"/>
+                <a:ea typeface="微软雅黑"/>
+              </a:rPr>
+              <a:t>教学科研并重，实验条件优越。</a:t>
+            </a:r>
+          </a:p>
+        </p:txBody>
+      </p:sp>
+      <p:sp>
+        <p:nvSpPr>
+          <p:cNvPr id="100050" name="TextBox 21"/>
+          <p:cNvSpPr txBox="1"/>
+          <p:nvPr/>
+        </p:nvSpPr>
+        <p:spPr>
+          <a:xfrm xmlns:a="http://schemas.openxmlformats.org/drawingml/2006/main">
+            <a:off x="576000" y="5616000"/>
+            <a:ext cx="10800000" cy="360000"/>
+          </a:xfrm>
+          <a:prstGeom xmlns:a="http://schemas.openxmlformats.org/drawingml/2006/main" prst="rect">
+            <a:avLst/>
+          </a:prstGeom>
+        </p:spPr>
+        <p:txBody>
+          <a:bodyPr xmlns:a="http://schemas.openxmlformats.org/drawingml/2006/main"/>
+          <a:lstStyle xmlns:a="http://schemas.openxmlformats.org/drawingml/2006/main"/>
+          <a:p xmlns:a="http://schemas.openxmlformats.org/drawingml/2006/main">
+            <a:r>
+              <a:rPr lang="en-US" sz="1200">
+                <a:solidFill>
+                  <a:srgbClr val="8E7C6E"/>
+                </a:solidFill>
+                <a:latin typeface="微软雅黑"/>
+                <a:ea typeface="微软雅黑"/>
+              </a:rPr>
+              <a:t>注：学科方向与具体专业以当年招生计划为准。</a:t>
+            </a:r>
+          </a:p>
+        </p:txBody>
+      </p:sp>
+      <p:sp>
+        <p:nvSpPr>
+          <p:cNvPr id="100051" name="TextBox 22"/>
+          <p:cNvSpPr txBox="1"/>
+          <p:nvPr/>
+        </p:nvSpPr>
+        <p:spPr>
+          <a:xfrm xmlns:a="http://schemas.openxmlformats.org/drawingml/2006/main">
+            <a:off x="10944000" y="6552000"/>
+            <a:ext cx="720000" cy="360000"/>
+          </a:xfrm>
+          <a:prstGeom xmlns:a="http://schemas.openxmlformats.org/drawingml/2006/main" prst="rect">
+            <a:avLst/>
+          </a:prstGeom>
+        </p:spPr>
+        <p:txBody>
+          <a:bodyPr xmlns:a="http://schemas.openxmlformats.org/drawingml/2006/main"/>
+          <a:lstStyle xmlns:a="http://schemas.openxmlformats.org/drawingml/2006/main"/>
+          <a:p xmlns:a="http://schemas.openxmlformats.org/drawingml/2006/main">
+            <a:pPr algn="r"/>
+            <a:r>
+              <a:rPr lang="en-US" sz="1200">
+                <a:solidFill>
+                  <a:srgbClr val="8E7C6E"/>
+                </a:solidFill>
+                <a:latin typeface="微软雅黑"/>
+                <a:ea typeface="微软雅黑"/>
+              </a:rPr>
+              <a:t>4 / 10</a:t>
+            </a:r>
+          </a:p>
+        </p:txBody>
+      </p:sp>
+    </p:spTree>
+  </p:cSld>
+</p:sld>
+</file>
+
+<file path=ppt/slides/slide5.xml><?xml version="1.0" encoding="utf-8"?>
+<p:sld xmlns:a="http://schemas.openxmlformats.org/drawingml/2006/main" xmlns:p="http://schemas.openxmlformats.org/presentationml/2006/main">
+  <p:cSld>
+    <p:bg>
+      <p:bgPr>
+        <a:solidFill xmlns:a="http://schemas.openxmlformats.org/drawingml/2006/main">
+          <a:srgbClr val="FFFFFF"/>
+        </a:solidFill>
+      </p:bgPr>
+    </p:bg>
+    <p:spTree>
+      <p:nvGrpSpPr>
+        <p:cNvPr id="1" name=""/>
+        <p:cNvGrpSpPr/>
+        <p:nvPr/>
+      </p:nvGrpSpPr>
+      <p:grpSpPr/>
+      <p:sp>
+        <p:nvSpPr>
+          <p:cNvPr id="100052" name="TextBox 1"/>
+          <p:cNvSpPr txBox="1"/>
+          <p:nvPr/>
+        </p:nvSpPr>
+        <p:spPr>
+          <a:xfrm xmlns:a="http://schemas.openxmlformats.org/drawingml/2006/main">
+            <a:off x="864000" y="396000"/>
+            <a:ext cx="10440000" cy="648000"/>
+          </a:xfrm>
+          <a:prstGeom xmlns:a="http://schemas.openxmlformats.org/drawingml/2006/main" prst="rect">
+            <a:avLst/>
+          </a:prstGeom>
+        </p:spPr>
+        <p:txBody>
+          <a:bodyPr xmlns:a="http://schemas.openxmlformats.org/drawingml/2006/main"/>
+          <a:lstStyle xmlns:a="http://schemas.openxmlformats.org/drawingml/2006/main"/>
+          <a:p xmlns:a="http://schemas.openxmlformats.org/drawingml/2006/main">
+            <a:r>
+              <a:rPr lang="en-US" sz="3000" b="1">
+                <a:solidFill>
+                  <a:srgbClr val="8E2430"/>
+                </a:solidFill>
+                <a:latin typeface="微软雅黑"/>
+                <a:ea typeface="微软雅黑"/>
+              </a:rPr>
+              <a:t>师资力量 · 名师引领 · 贯通培养</a:t>
+            </a:r>
+          </a:p>
+        </p:txBody>
+      </p:sp>
+      <p:sp>
+        <p:nvSpPr>
+          <p:cNvPr id="100053" name="TextBox 2"/>
+          <p:cNvSpPr/>
+          <p:nvPr/>
+        </p:nvSpPr>
+        <p:spPr>
+          <a:xfrm xmlns:a="http://schemas.openxmlformats.org/drawingml/2006/main">
+            <a:off x="576000" y="540000"/>
+            <a:ext cx="162000" cy="162000"/>
+          </a:xfrm>
+          <a:prstGeom xmlns:a="http://schemas.openxmlformats.org/drawingml/2006/main" prst="rect">
+            <a:avLst/>
+          </a:prstGeom>
+          <a:solidFill xmlns:a="http://schemas.openxmlformats.org/drawingml/2006/main">
+            <a:srgbClr val="D4A843"/>
+          </a:solidFill>
+          <a:ln xmlns:a="http://schemas.openxmlformats.org/drawingml/2006/main">
+            <a:noFill/>
+          </a:ln>
+        </p:spPr>
+        <p:txBody>
+          <a:bodyPr xmlns:a="http://schemas.openxmlformats.org/drawingml/2006/main"/>
+          <a:lstStyle xmlns:a="http://schemas.openxmlformats.org/drawingml/2006/main"/>
+          <a:p xmlns:a="http://schemas.openxmlformats.org/drawingml/2006/main"/>
+        </p:txBody>
+      </p:sp>
+      <p:sp>
+        <p:nvSpPr>
+          <p:cNvPr id="100054" name="TextBox 3"/>
+          <p:cNvSpPr/>
+          <p:nvPr/>
+        </p:nvSpPr>
+        <p:spPr>
+          <a:xfrm xmlns:a="http://schemas.openxmlformats.org/drawingml/2006/main">
+            <a:off x="576000" y="1224000"/>
+            <a:ext cx="5472000" cy="3780000"/>
+          </a:xfrm>
+          <a:prstGeom xmlns:a="http://schemas.openxmlformats.org/drawingml/2006/main" prst="roundRect">
+            <a:avLst/>
+          </a:prstGeom>
+          <a:solidFill xmlns:a="http://schemas.openxmlformats.org/drawingml/2006/main">
+            <a:srgbClr val="F7F1EA"/>
+          </a:solidFill>
+          <a:ln xmlns:a="http://schemas.openxmlformats.org/drawingml/2006/main">
+            <a:noFill/>
+          </a:ln>
+        </p:spPr>
+        <p:txBody>
+          <a:bodyPr xmlns:a="http://schemas.openxmlformats.org/drawingml/2006/main"/>
+          <a:lstStyle xmlns:a="http://schemas.openxmlformats.org/drawingml/2006/main"/>
+          <a:p xmlns:a="http://schemas.openxmlformats.org/drawingml/2006/main"/>
+        </p:txBody>
+      </p:sp>
+      <p:sp>
+        <p:nvSpPr>
+          <p:cNvPr id="100055" name="TextBox 4"/>
+          <p:cNvSpPr txBox="1"/>
+          <p:nvPr/>
+        </p:nvSpPr>
+        <p:spPr>
+          <a:xfrm xmlns:a="http://schemas.openxmlformats.org/drawingml/2006/main">
+            <a:off x="720000" y="1368000"/>
+            <a:ext cx="4680000" cy="504000"/>
+          </a:xfrm>
+          <a:prstGeom xmlns:a="http://schemas.openxmlformats.org/drawingml/2006/main" prst="rect">
+            <a:avLst/>
+          </a:prstGeom>
+        </p:spPr>
+        <p:txBody>
+          <a:bodyPr xmlns:a="http://schemas.openxmlformats.org/drawingml/2006/main"/>
+          <a:lstStyle xmlns:a="http://schemas.openxmlformats.org/drawingml/2006/main"/>
+          <a:p xmlns:a="http://schemas.openxmlformats.org/drawingml/2006/main">
+            <a:r>
+              <a:rPr lang="en-US" sz="2200" b="1">
+                <a:solidFill>
+                  <a:srgbClr val="8E2430"/>
+                </a:solidFill>
+                <a:latin typeface="微软雅黑"/>
+                <a:ea typeface="微软雅黑"/>
+              </a:rPr>
+              <a:t>雄厚的师资队伍</a:t>
+            </a:r>
+          </a:p>
+        </p:txBody>
+      </p:sp>
+      <p:sp>
+        <p:nvSpPr>
+          <p:cNvPr id="100056" name="TextBox 5"/>
+          <p:cNvSpPr txBox="1"/>
+          <p:nvPr/>
+        </p:nvSpPr>
+        <p:spPr>
+          <a:xfrm xmlns:a="http://schemas.openxmlformats.org/drawingml/2006/main">
+            <a:off x="720000" y="1944000"/>
+            <a:ext cx="4824000" cy="2520000"/>
+          </a:xfrm>
+          <a:prstGeom xmlns:a="http://schemas.openxmlformats.org/drawingml/2006/main" prst="rect">
+            <a:avLst/>
+          </a:prstGeom>
+        </p:spPr>
+        <p:txBody>
+          <a:bodyPr xmlns:a="http://schemas.openxmlformats.org/drawingml/2006/main"/>
+          <a:lstStyle xmlns:a="http://schemas.openxmlformats.org/drawingml/2006/main"/>
+          <a:p xmlns:a="http://schemas.openxmlformats.org/drawingml/2006/main">
+            <a:r>
+              <a:rPr lang="en-US" sz="1700">
+                <a:solidFill>
+                  <a:srgbClr val="333333"/>
+                </a:solidFill>
+                <a:latin typeface="微软雅黑"/>
+                <a:ea typeface="微软雅黑"/>
+              </a:rPr>
+              <a:t>汇聚高水平师资，拥有国家级教学名师与各学科带头人，形成“名师 + 团队”的传帮带培养模式；众多教授长期扎根基础教育教学研究，为学子提供贯穿全程的学术指导。</a:t>
+            </a:r>
+          </a:p>
+        </p:txBody>
+      </p:sp>
+      <p:sp>
+        <p:nvSpPr>
+          <p:cNvPr id="100057" name="TextBox 6"/>
+          <p:cNvSpPr/>
+          <p:nvPr/>
+        </p:nvSpPr>
+        <p:spPr>
+          <a:xfrm xmlns:a="http://schemas.openxmlformats.org/drawingml/2006/main">
+            <a:off x="6336000" y="1224000"/>
+            <a:ext cx="5256000" cy="3780000"/>
+          </a:xfrm>
+          <a:prstGeom xmlns:a="http://schemas.openxmlformats.org/drawingml/2006/main" prst="roundRect">
+            <a:avLst/>
+          </a:prstGeom>
+          <a:solidFill xmlns:a="http://schemas.openxmlformats.org/drawingml/2006/main">
+            <a:srgbClr val="8E2430"/>
+          </a:solidFill>
+          <a:ln xmlns:a="http://schemas.openxmlformats.org/drawingml/2006/main">
+            <a:noFill/>
+          </a:ln>
+        </p:spPr>
+        <p:txBody>
+          <a:bodyPr xmlns:a="http://schemas.openxmlformats.org/drawingml/2006/main"/>
+          <a:lstStyle xmlns:a="http://schemas.openxmlformats.org/drawingml/2006/main"/>
+          <a:p xmlns:a="http://schemas.openxmlformats.org/drawingml/2006/main"/>
+        </p:txBody>
+      </p:sp>
+      <p:sp>
+        <p:nvSpPr>
+          <p:cNvPr id="100058" name="TextBox 7"/>
+          <p:cNvSpPr txBox="1"/>
+          <p:nvPr/>
+        </p:nvSpPr>
+        <p:spPr>
+          <a:xfrm xmlns:a="http://schemas.openxmlformats.org/drawingml/2006/main">
+            <a:off x="6480000" y="1368000"/>
+            <a:ext cx="4680000" cy="504000"/>
+          </a:xfrm>
+          <a:prstGeom xmlns:a="http://schemas.openxmlformats.org/drawingml/2006/main" prst="rect">
+            <a:avLst/>
+          </a:prstGeom>
+        </p:spPr>
+        <p:txBody>
+          <a:bodyPr xmlns:a="http://schemas.openxmlformats.org/drawingml/2006/main"/>
+          <a:lstStyle xmlns:a="http://schemas.openxmlformats.org/drawingml/2006/main"/>
+          <a:p xmlns:a="http://schemas.openxmlformats.org/drawingml/2006/main">
+            <a:r>
+              <a:rPr lang="en-US" sz="2200" b="1">
+                <a:solidFill>
+                  <a:srgbClr val="FFFFFF"/>
+                </a:solidFill>
+                <a:latin typeface="微软雅黑"/>
+                <a:ea typeface="微软雅黑"/>
+              </a:rPr>
+              <a:t>本硕博贯通培养</a:t>
+            </a:r>
+          </a:p>
+        </p:txBody>
+      </p:sp>
+      <p:sp>
+        <p:nvSpPr>
+          <p:cNvPr id="100059" name="TextBox 8"/>
+          <p:cNvSpPr txBox="1"/>
+          <p:nvPr/>
+        </p:nvSpPr>
+        <p:spPr>
+          <a:xfrm xmlns:a="http://schemas.openxmlformats.org/drawingml/2006/main">
+            <a:off x="6480000" y="1944000"/>
+            <a:ext cx="4896000" cy="2520000"/>
+          </a:xfrm>
+          <a:prstGeom xmlns:a="http://schemas.openxmlformats.org/drawingml/2006/main" prst="rect">
+            <a:avLst/>
+          </a:prstGeom>
+        </p:spPr>
+        <p:txBody>
+          <a:bodyPr xmlns:a="http://schemas.openxmlformats.org/drawingml/2006/main"/>
+          <a:lstStyle xmlns:a="http://schemas.openxmlformats.org/drawingml/2006/main"/>
+          <a:p xmlns:a="http://schemas.openxmlformats.org/drawingml/2006/main">
+            <a:r>
+              <a:rPr lang="en-US" sz="1700">
+                <a:solidFill>
+                  <a:srgbClr val="F4E5D2"/>
+                </a:solidFill>
+                <a:latin typeface="微软雅黑"/>
+                <a:ea typeface="微软雅黑"/>
+              </a:rPr>
+              <a:t>构建从本科到硕士、博士的贯通培养体系；师范生实施“职前培养 + 职后发展”一体化；设有拔尖创新项目与公费师范生等多元培养路径，助力学子精准定位、个性成长。</a:t>
+            </a:r>
+          </a:p>
+        </p:txBody>
+      </p:sp>
+      <p:sp>
+        <p:nvSpPr>
+          <p:cNvPr id="100060" name="TextBox 9"/>
+          <p:cNvSpPr/>
+          <p:nvPr/>
+        </p:nvSpPr>
+        <p:spPr>
+          <a:xfrm xmlns:a="http://schemas.openxmlformats.org/drawingml/2006/main">
+            <a:off x="576000" y="5292000"/>
+            <a:ext cx="11016000" cy="1080000"/>
+          </a:xfrm>
+          <a:prstGeom xmlns:a="http://schemas.openxmlformats.org/drawingml/2006/main" prst="roundRect">
+            <a:avLst/>
+          </a:prstGeom>
+          <a:solidFill xmlns:a="http://schemas.openxmlformats.org/drawingml/2006/main">
+            <a:srgbClr val="F1E7D8"/>
+          </a:solidFill>
+          <a:ln xmlns:a="http://schemas.openxmlformats.org/drawingml/2006/main">
+            <a:noFill/>
+          </a:ln>
+        </p:spPr>
+        <p:txBody>
+          <a:bodyPr xmlns:a="http://schemas.openxmlformats.org/drawingml/2006/main"/>
+          <a:lstStyle xmlns:a="http://schemas.openxmlformats.org/drawingml/2006/main"/>
+          <a:p xmlns:a="http://schemas.openxmlformats.org/drawingml/2006/main"/>
+        </p:txBody>
+      </p:sp>
+      <p:sp>
+        <p:nvSpPr>
+          <p:cNvPr id="100061" name="TextBox 10"/>
+          <p:cNvSpPr txBox="1"/>
+          <p:nvPr/>
+        </p:nvSpPr>
+        <p:spPr>
+          <a:xfrm xmlns:a="http://schemas.openxmlformats.org/drawingml/2006/main">
+            <a:off x="792000" y="5436000"/>
+            <a:ext cx="10584000" cy="504000"/>
+          </a:xfrm>
+          <a:prstGeom xmlns:a="http://schemas.openxmlformats.org/drawingml/2006/main" prst="rect">
+            <a:avLst/>
+          </a:prstGeom>
+        </p:spPr>
+        <p:txBody>
+          <a:bodyPr xmlns:a="http://schemas.openxmlformats.org/drawingml/2006/main"/>
+          <a:lstStyle xmlns:a="http://schemas.openxmlformats.org/drawingml/2006/main"/>
+          <a:p xmlns:a="http://schemas.openxmlformats.org/drawingml/2006/main">
+            <a:r>
+              <a:rPr lang="en-US" sz="1500">
+                <a:solidFill>
+                  <a:srgbClr val="8E2430"/>
+                </a:solidFill>
+                <a:latin typeface="微软雅黑"/>
+                <a:ea typeface="微软雅黑"/>
+              </a:rPr>
+              <a:t>支撑平台：国家级实验教学示范中心、省部级重点实验室与人文社科研究基地等，为你提供一流的科研与实践练兵场。</a:t>
+            </a:r>
+          </a:p>
+        </p:txBody>
+      </p:sp>
+      <p:sp>
+        <p:nvSpPr>
+          <p:cNvPr id="100062" name="TextBox 11"/>
+          <p:cNvSpPr txBox="1"/>
+          <p:nvPr/>
+        </p:nvSpPr>
+        <p:spPr>
+          <a:xfrm xmlns:a="http://schemas.openxmlformats.org/drawingml/2006/main">
+            <a:off x="10944000" y="6552000"/>
+            <a:ext cx="720000" cy="360000"/>
+          </a:xfrm>
+          <a:prstGeom xmlns:a="http://schemas.openxmlformats.org/drawingml/2006/main" prst="rect">
+            <a:avLst/>
+          </a:prstGeom>
+        </p:spPr>
+        <p:txBody>
+          <a:bodyPr xmlns:a="http://schemas.openxmlformats.org/drawingml/2006/main"/>
+          <a:lstStyle xmlns:a="http://schemas.openxmlformats.org/drawingml/2006/main"/>
+          <a:p xmlns:a="http://schemas.openxmlformats.org/drawingml/2006/main">
+            <a:pPr algn="r"/>
+            <a:r>
+              <a:rPr lang="en-US" sz="1200">
+                <a:solidFill>
+                  <a:srgbClr val="8E7C6E"/>
+                </a:solidFill>
+                <a:latin typeface="微软雅黑"/>
+                <a:ea typeface="微软雅黑"/>
+              </a:rPr>
+              <a:t>5 / 10</a:t>
+            </a:r>
+          </a:p>
+        </p:txBody>
+      </p:sp>
+    </p:spTree>
+  </p:cSld>
+</p:sld>
+</file>
+
+<file path=ppt/slides/slide6.xml><?xml version="1.0" encoding="utf-8"?>
+<p:sld xmlns:a="http://schemas.openxmlformats.org/drawingml/2006/main" xmlns:p="http://schemas.openxmlformats.org/presentationml/2006/main">
+  <p:cSld>
+    <p:bg>
+      <p:bgPr>
+        <a:solidFill xmlns:a="http://schemas.openxmlformats.org/drawingml/2006/main">
+          <a:srgbClr val="FFFFFF"/>
+        </a:solidFill>
+      </p:bgPr>
+    </p:bg>
+    <p:spTree>
+      <p:nvGrpSpPr>
+        <p:cNvPr id="1" name=""/>
+        <p:cNvGrpSpPr/>
+        <p:nvPr/>
+      </p:nvGrpSpPr>
+      <p:grpSpPr/>
+      <p:sp>
+        <p:nvSpPr>
+          <p:cNvPr id="100063" name="TextBox 1"/>
+          <p:cNvSpPr txBox="1"/>
+          <p:nvPr/>
+        </p:nvSpPr>
+        <p:spPr>
+          <a:xfrm xmlns:a="http://schemas.openxmlformats.org/drawingml/2006/main">
+            <a:off x="864000" y="396000"/>
+            <a:ext cx="10440000" cy="648000"/>
+          </a:xfrm>
+          <a:prstGeom xmlns:a="http://schemas.openxmlformats.org/drawingml/2006/main" prst="rect">
+            <a:avLst/>
+          </a:prstGeom>
+        </p:spPr>
+        <p:txBody>
+          <a:bodyPr xmlns:a="http://schemas.openxmlformats.org/drawingml/2006/main"/>
+          <a:lstStyle xmlns:a="http://schemas.openxmlformats.org/drawingml/2006/main"/>
+          <a:p xmlns:a="http://schemas.openxmlformats.org/drawingml/2006/main">
+            <a:r>
+              <a:rPr lang="en-US" sz="3000" b="1">
+                <a:solidFill>
+                  <a:srgbClr val="8E2430"/>
+                </a:solidFill>
+                <a:latin typeface="微软雅黑"/>
+                <a:ea typeface="微软雅黑"/>
+              </a:rPr>
+              <a:t>校园生活 · 在古都西安遇见更好的自己</a:t>
+            </a:r>
+          </a:p>
+        </p:txBody>
+      </p:sp>
+      <p:sp>
+        <p:nvSpPr>
+          <p:cNvPr id="100064" name="TextBox 2"/>
+          <p:cNvSpPr/>
+          <p:nvPr/>
+        </p:nvSpPr>
+        <p:spPr>
+          <a:xfrm xmlns:a="http://schemas.openxmlformats.org/drawingml/2006/main">
+            <a:off x="576000" y="540000"/>
+            <a:ext cx="162000" cy="162000"/>
+          </a:xfrm>
+          <a:prstGeom xmlns:a="http://schemas.openxmlformats.org/drawingml/2006/main" prst="rect">
+            <a:avLst/>
+          </a:prstGeom>
+          <a:solidFill xmlns:a="http://schemas.openxmlformats.org/drawingml/2006/main">
+            <a:srgbClr val="D4A843"/>
+          </a:solidFill>
+          <a:ln xmlns:a="http://schemas.openxmlformats.org/drawingml/2006/main">
+            <a:noFill/>
+          </a:ln>
+        </p:spPr>
+        <p:txBody>
+          <a:bodyPr xmlns:a="http://schemas.openxmlformats.org/drawingml/2006/main"/>
+          <a:lstStyle xmlns:a="http://schemas.openxmlformats.org/drawingml/2006/main"/>
+          <a:p xmlns:a="http://schemas.openxmlformats.org/drawingml/2006/main"/>
+        </p:txBody>
+      </p:sp>
+      <p:sp>
+        <p:nvSpPr>
+          <p:cNvPr id="100065" name="TextBox 3"/>
+          <p:cNvSpPr/>
+          <p:nvPr/>
+        </p:nvSpPr>
+        <p:spPr>
+          <a:xfrm xmlns:a="http://schemas.openxmlformats.org/drawingml/2006/main">
+            <a:off x="576000" y="1224000"/>
+            <a:ext cx="5472000" cy="2376000"/>
+          </a:xfrm>
+          <a:prstGeom xmlns:a="http://schemas.openxmlformats.org/drawingml/2006/main" prst="roundRect">
+            <a:avLst/>
+          </a:prstGeom>
+          <a:solidFill xmlns:a="http://schemas.openxmlformats.org/drawingml/2006/main">
+            <a:srgbClr val="F7F1EA"/>
+          </a:solidFill>
+          <a:ln xmlns:a="http://schemas.openxmlformats.org/drawingml/2006/main">
+            <a:noFill/>
+          </a:ln>
+        </p:spPr>
+        <p:txBody>
+          <a:bodyPr xmlns:a="http://schemas.openxmlformats.org/drawingml/2006/main"/>
+          <a:lstStyle xmlns:a="http://schemas.openxmlformats.org/drawingml/2006/main"/>
+          <a:p xmlns:a="http://schemas.openxmlformats.org/drawingml/2006/main"/>
+        </p:txBody>
+      </p:sp>
+      <p:sp>
+        <p:nvSpPr>
+          <p:cNvPr id="100066" name="TextBox 4"/>
+          <p:cNvSpPr txBox="1"/>
+          <p:nvPr/>
+        </p:nvSpPr>
+        <p:spPr>
+          <a:xfrm xmlns:a="http://schemas.openxmlformats.org/drawingml/2006/main">
+            <a:off x="720000" y="1368000"/>
+            <a:ext cx="4680000" cy="468000"/>
+          </a:xfrm>
+          <a:prstGeom xmlns:a="http://schemas.openxmlformats.org/drawingml/2006/main" prst="rect">
+            <a:avLst/>
+          </a:prstGeom>
+        </p:spPr>
+        <p:txBody>
+          <a:bodyPr xmlns:a="http://schemas.openxmlformats.org/drawingml/2006/main"/>
+          <a:lstStyle xmlns:a="http://schemas.openxmlformats.org/drawingml/2006/main"/>
+          <a:p xmlns:a="http://schemas.openxmlformats.org/drawingml/2006/main">
+            <a:r>
+              <a:rPr lang="en-US" sz="2000" b="1">
+                <a:solidFill>
+                  <a:srgbClr val="8E2430"/>
+                </a:solidFill>
+                <a:latin typeface="微软雅黑"/>
+                <a:ea typeface="微软雅黑"/>
+              </a:rPr>
+              <a:t>双校区 · 多元空间</a:t>
+            </a:r>
+          </a:p>
+        </p:txBody>
+      </p:sp>
+      <p:sp>
+        <p:nvSpPr>
+          <p:cNvPr id="100067" name="TextBox 5"/>
+          <p:cNvSpPr txBox="1"/>
+          <p:nvPr/>
+        </p:nvSpPr>
+        <p:spPr>
+          <a:xfrm xmlns:a="http://schemas.openxmlformats.org/drawingml/2006/main">
+            <a:off x="720000" y="1944000"/>
+            <a:ext cx="4752000" cy="1296000"/>
+          </a:xfrm>
+          <a:prstGeom xmlns:a="http://schemas.openxmlformats.org/drawingml/2006/main" prst="rect">
+            <a:avLst/>
+          </a:prstGeom>
+        </p:spPr>
+        <p:txBody>
+          <a:bodyPr xmlns:a="http://schemas.openxmlformats.org/drawingml/2006/main"/>
+          <a:lstStyle xmlns:a="http://schemas.openxmlformats.org/drawingml/2006/main"/>
+          <a:p xmlns:a="http://schemas.openxmlformats.org/drawingml/2006/main">
+            <a:r>
+              <a:rPr lang="en-US" sz="1600">
+                <a:solidFill>
+                  <a:srgbClr val="333333"/>
+                </a:solidFill>
+                <a:latin typeface="微软雅黑"/>
+                <a:ea typeface="微软雅黑"/>
+              </a:rPr>
+              <a:t>长安、雁塔两校区功能互补，现代化教学楼、图书馆、体育场馆一应俱全，学习生活便捷舒适。</a:t>
+            </a:r>
+          </a:p>
+        </p:txBody>
+      </p:sp>
+      <p:sp>
+        <p:nvSpPr>
+          <p:cNvPr id="100068" name="TextBox 6"/>
+          <p:cNvSpPr/>
+          <p:nvPr/>
+        </p:nvSpPr>
+        <p:spPr>
+          <a:xfrm xmlns:a="http://schemas.openxmlformats.org/drawingml/2006/main">
+            <a:off x="6336000" y="1224000"/>
+            <a:ext cx="5256000" cy="2376000"/>
+          </a:xfrm>
+          <a:prstGeom xmlns:a="http://schemas.openxmlformats.org/drawingml/2006/main" prst="roundRect">
+            <a:avLst/>
+          </a:prstGeom>
+          <a:solidFill xmlns:a="http://schemas.openxmlformats.org/drawingml/2006/main">
+            <a:srgbClr val="8E2430"/>
+          </a:solidFill>
+          <a:ln xmlns:a="http://schemas.openxmlformats.org/drawingml/2006/main">
+            <a:noFill/>
+          </a:ln>
+        </p:spPr>
+        <p:txBody>
+          <a:bodyPr xmlns:a="http://schemas.openxmlformats.org/drawingml/2006/main"/>
+          <a:lstStyle xmlns:a="http://schemas.openxmlformats.org/drawingml/2006/main"/>
+          <a:p xmlns:a="http://schemas.openxmlformats.org/drawingml/2006/main"/>
+        </p:txBody>
+      </p:sp>
+      <p:sp>
+        <p:nvSpPr>
+          <p:cNvPr id="100069" name="TextBox 7"/>
+          <p:cNvSpPr txBox="1"/>
+          <p:nvPr/>
+        </p:nvSpPr>
+        <p:spPr>
+          <a:xfrm xmlns:a="http://schemas.openxmlformats.org/drawingml/2006/main">
+            <a:off x="6480000" y="1368000"/>
+            <a:ext cx="4680000" cy="468000"/>
+          </a:xfrm>
+          <a:prstGeom xmlns:a="http://schemas.openxmlformats.org/drawingml/2006/main" prst="rect">
+            <a:avLst/>
+          </a:prstGeom>
+        </p:spPr>
+        <p:txBody>
+          <a:bodyPr xmlns:a="http://schemas.openxmlformats.org/drawingml/2006/main"/>
+          <a:lstStyle xmlns:a="http://schemas.openxmlformats.org/drawingml/2006/main"/>
+          <a:p xmlns:a="http://schemas.openxmlformats.org/drawingml/2006/main">
+            <a:r>
+              <a:rPr lang="en-US" sz="2000" b="1">
+                <a:solidFill>
+                  <a:srgbClr val="FFFFFF"/>
+                </a:solidFill>
+                <a:latin typeface="微软雅黑"/>
+                <a:ea typeface="微软雅黑"/>
+              </a:rPr>
+              <a:t>社团与文体活动</a:t>
+            </a:r>
+          </a:p>
+        </p:txBody>
+      </p:sp>
+      <p:sp>
+        <p:nvSpPr>
+          <p:cNvPr id="100070" name="TextBox 8"/>
+          <p:cNvSpPr txBox="1"/>
+          <p:nvPr/>
+        </p:nvSpPr>
+        <p:spPr>
+          <a:xfrm xmlns:a="http://schemas.openxmlformats.org/drawingml/2006/main">
+            <a:off x="6480000" y="1944000"/>
+            <a:ext cx="4896000" cy="1296000"/>
+          </a:xfrm>
+          <a:prstGeom xmlns:a="http://schemas.openxmlformats.org/drawingml/2006/main" prst="rect">
+            <a:avLst/>
+          </a:prstGeom>
+        </p:spPr>
+        <p:txBody>
+          <a:bodyPr xmlns:a="http://schemas.openxmlformats.org/drawingml/2006/main"/>
+          <a:lstStyle xmlns:a="http://schemas.openxmlformats.org/drawingml/2006/main"/>
+          <a:p xmlns:a="http://schemas.openxmlformats.org/drawingml/2006/main">
+            <a:r>
+              <a:rPr lang="en-US" sz="1600">
+                <a:solidFill>
+                  <a:srgbClr val="F4E5D2"/>
+                </a:solidFill>
+                <a:latin typeface="微软雅黑"/>
+                <a:ea typeface="微软雅黑"/>
+              </a:rPr>
+              <a:t>百余个学生社团覆盖学术、文艺、体育、公益等方向，校园文化丰富多彩，人人都能找到自己的舞台。</a:t>
+            </a:r>
+          </a:p>
+        </p:txBody>
+      </p:sp>
+      <p:sp>
+        <p:nvSpPr>
+          <p:cNvPr id="100071" name="TextBox 9"/>
+          <p:cNvSpPr/>
+          <p:nvPr/>
+        </p:nvSpPr>
+        <p:spPr>
+          <a:xfrm xmlns:a="http://schemas.openxmlformats.org/drawingml/2006/main">
+            <a:off x="576000" y="3744000"/>
+            <a:ext cx="5472000" cy="2376000"/>
+          </a:xfrm>
+          <a:prstGeom xmlns:a="http://schemas.openxmlformats.org/drawingml/2006/main" prst="roundRect">
+            <a:avLst/>
+          </a:prstGeom>
+          <a:solidFill xmlns:a="http://schemas.openxmlformats.org/drawingml/2006/main">
+            <a:srgbClr val="8E2430"/>
+          </a:solidFill>
+          <a:ln xmlns:a="http://schemas.openxmlformats.org/drawingml/2006/main">
+            <a:noFill/>
+          </a:ln>
+        </p:spPr>
+        <p:txBody>
+          <a:bodyPr xmlns:a="http://schemas.openxmlformats.org/drawingml/2006/main"/>
+          <a:lstStyle xmlns:a="http://schemas.openxmlformats.org/drawingml/2006/main"/>
+          <a:p xmlns:a="http://schemas.openxmlformats.org/drawingml/2006/main"/>
+        </p:txBody>
+      </p:sp>
+      <p:sp>
+        <p:nvSpPr>
+          <p:cNvPr id="100072" name="TextBox 10"/>
+          <p:cNvSpPr txBox="1"/>
+          <p:nvPr/>
+        </p:nvSpPr>
+        <p:spPr>
+          <a:xfrm xmlns:a="http://schemas.openxmlformats.org/drawingml/2006/main">
+            <a:off x="720000" y="3888000"/>
+            <a:ext cx="4680000" cy="468000"/>
+          </a:xfrm>
+          <a:prstGeom xmlns:a="http://schemas.openxmlformats.org/drawingml/2006/main" prst="rect">
+            <a:avLst/>
+          </a:prstGeom>
+        </p:spPr>
+        <p:txBody>
+          <a:bodyPr xmlns:a="http://schemas.openxmlformats.org/drawingml/2006/main"/>
+          <a:lstStyle xmlns:a="http://schemas.openxmlformats.org/drawingml/2006/main"/>
+          <a:p xmlns:a="http://schemas.openxmlformats.org/drawingml/2006/main">
+            <a:r>
+              <a:rPr lang="en-US" sz="2000" b="1">
+                <a:solidFill>
+                  <a:srgbClr val="FFFFFF"/>
+                </a:solidFill>
+                <a:latin typeface="微软雅黑"/>
+                <a:ea typeface="微软雅黑"/>
+              </a:rPr>
+              <a:t>学术与人文氛围</a:t>
+            </a:r>
+          </a:p>
+        </p:txBody>
+      </p:sp>
+      <p:sp>
+        <p:nvSpPr>
+          <p:cNvPr id="100073" name="TextBox 11"/>
+          <p:cNvSpPr txBox="1"/>
+          <p:nvPr/>
+        </p:nvSpPr>
+        <p:spPr>
+          <a:xfrm xmlns:a="http://schemas.openxmlformats.org/drawingml/2006/main">
+            <a:off x="720000" y="4464000"/>
+            <a:ext cx="4752000" cy="1296000"/>
+          </a:xfrm>
+          <a:prstGeom xmlns:a="http://schemas.openxmlformats.org/drawingml/2006/main" prst="rect">
+            <a:avLst/>
+          </a:prstGeom>
+        </p:spPr>
+        <p:txBody>
+          <a:bodyPr xmlns:a="http://schemas.openxmlformats.org/drawingml/2006/main"/>
+          <a:lstStyle xmlns:a="http://schemas.openxmlformats.org/drawingml/2006/main"/>
+          <a:p xmlns:a="http://schemas.openxmlformats.org/drawingml/2006/main">
+            <a:r>
+              <a:rPr lang="en-US" sz="1600">
+                <a:solidFill>
+                  <a:srgbClr val="F4E5D2"/>
+                </a:solidFill>
+                <a:latin typeface="微软雅黑"/>
+                <a:ea typeface="微软雅黑"/>
+              </a:rPr>
+              <a:t>名家讲座、学术竞赛、文博研学常态化开展，在浓厚的学术气息与人文滋养中不断成长。</a:t>
+            </a:r>
+          </a:p>
+        </p:txBody>
+      </p:sp>
+      <p:sp>
+        <p:nvSpPr>
+          <p:cNvPr id="100074" name="TextBox 12"/>
+          <p:cNvSpPr/>
+          <p:nvPr/>
+        </p:nvSpPr>
+        <p:spPr>
+          <a:xfrm xmlns:a="http://schemas.openxmlformats.org/drawingml/2006/main">
+            <a:off x="6336000" y="3744000"/>
+            <a:ext cx="5256000" cy="2376000"/>
+          </a:xfrm>
+          <a:prstGeom xmlns:a="http://schemas.openxmlformats.org/drawingml/2006/main" prst="roundRect">
+            <a:avLst/>
+          </a:prstGeom>
+          <a:solidFill xmlns:a="http://schemas.openxmlformats.org/drawingml/2006/main">
+            <a:srgbClr val="F7F1EA"/>
+          </a:solidFill>
+          <a:ln xmlns:a="http://schemas.openxmlformats.org/drawingml/2006/main">
+            <a:noFill/>
+          </a:ln>
+        </p:spPr>
+        <p:txBody>
+          <a:bodyPr xmlns:a="http://schemas.openxmlformats.org/drawingml/2006/main"/>
+          <a:lstStyle xmlns:a="http://schemas.openxmlformats.org/drawingml/2006/main"/>
+          <a:p xmlns:a="http://schemas.openxmlformats.org/drawingml/2006/main"/>
+        </p:txBody>
+      </p:sp>
+      <p:sp>
+        <p:nvSpPr>
+          <p:cNvPr id="100075" name="TextBox 13"/>
+          <p:cNvSpPr txBox="1"/>
+          <p:nvPr/>
+        </p:nvSpPr>
+        <p:spPr>
+          <a:xfrm xmlns:a="http://schemas.openxmlformats.org/drawingml/2006/main">
+            <a:off x="6480000" y="3888000"/>
+            <a:ext cx="4680000" cy="468000"/>
+          </a:xfrm>
+          <a:prstGeom xmlns:a="http://schemas.openxmlformats.org/drawingml/2006/main" prst="rect">
+            <a:avLst/>
+          </a:prstGeom>
+        </p:spPr>
+        <p:txBody>
+          <a:bodyPr xmlns:a="http://schemas.openxmlformats.org/drawingml/2006/main"/>
+          <a:lstStyle xmlns:a="http://schemas.openxmlformats.org/drawingml/2006/main"/>
+          <a:p xmlns:a="http://schemas.openxmlformats.org/drawingml/2006/main">
+            <a:r>
+              <a:rPr lang="en-US" sz="2000" b="1">
+                <a:solidFill>
+                  <a:srgbClr val="8E2430"/>
+                </a:solidFill>
+                <a:latin typeface="微软雅黑"/>
+                <a:ea typeface="微软雅黑"/>
+              </a:rPr>
+              <a:t>坐拥西安 · 城市资源</a:t>
+            </a:r>
+          </a:p>
+        </p:txBody>
+      </p:sp>
+      <p:sp>
+        <p:nvSpPr>
+          <p:cNvPr id="100076" name="TextBox 14"/>
+          <p:cNvSpPr txBox="1"/>
+          <p:nvPr/>
+        </p:nvSpPr>
+        <p:spPr>
+          <a:xfrm xmlns:a="http://schemas.openxmlformats.org/drawingml/2006/main">
+            <a:off x="6480000" y="4464000"/>
+            <a:ext cx="4896000" cy="1296000"/>
+          </a:xfrm>
+          <a:prstGeom xmlns:a="http://schemas.openxmlformats.org/drawingml/2006/main" prst="rect">
+            <a:avLst/>
+          </a:prstGeom>
+        </p:spPr>
+        <p:txBody>
+          <a:bodyPr xmlns:a="http://schemas.openxmlformats.org/drawingml/2006/main"/>
+          <a:lstStyle xmlns:a="http://schemas.openxmlformats.org/drawingml/2006/main"/>
+          <a:p xmlns:a="http://schemas.openxmlformats.org/drawingml/2006/main">
+            <a:r>
+              <a:rPr lang="en-US" sz="1600">
+                <a:solidFill>
+                  <a:srgbClr val="333333"/>
+                </a:solidFill>
+                <a:latin typeface="微软雅黑"/>
+                <a:ea typeface="微软雅黑"/>
+              </a:rPr>
+              <a:t>古都西安高校云集、文博资源丰富，实习实践与文化生活选择众多，让校园与城市同频共振。</a:t>
+            </a:r>
+          </a:p>
+        </p:txBody>
+      </p:sp>
+      <p:sp>
+        <p:nvSpPr>
+          <p:cNvPr id="100077" name="TextBox 15"/>
+          <p:cNvSpPr txBox="1"/>
+          <p:nvPr/>
+        </p:nvSpPr>
+        <p:spPr>
+          <a:xfrm xmlns:a="http://schemas.openxmlformats.org/drawingml/2006/main">
+            <a:off x="10944000" y="6552000"/>
+            <a:ext cx="720000" cy="360000"/>
+          </a:xfrm>
+          <a:prstGeom xmlns:a="http://schemas.openxmlformats.org/drawingml/2006/main" prst="rect">
+            <a:avLst/>
+          </a:prstGeom>
+        </p:spPr>
+        <p:txBody>
+          <a:bodyPr xmlns:a="http://schemas.openxmlformats.org/drawingml/2006/main"/>
+          <a:lstStyle xmlns:a="http://schemas.openxmlformats.org/drawingml/2006/main"/>
+          <a:p xmlns:a="http://schemas.openxmlformats.org/drawingml/2006/main">
+            <a:pPr algn="r"/>
+            <a:r>
+              <a:rPr lang="en-US" sz="1200">
+                <a:solidFill>
+                  <a:srgbClr val="8E7C6E"/>
+                </a:solidFill>
+                <a:latin typeface="微软雅黑"/>
+                <a:ea typeface="微软雅黑"/>
+              </a:rPr>
+              <a:t>6 / 10</a:t>
+            </a:r>
+          </a:p>
+        </p:txBody>
+      </p:sp>
+    </p:spTree>
+  </p:cSld>
+</p:sld>
+</file>
+
+<file path=ppt/slides/slide7.xml><?xml version="1.0" encoding="utf-8"?>
+<p:sld xmlns:a="http://schemas.openxmlformats.org/drawingml/2006/main" xmlns:p="http://schemas.openxmlformats.org/presentationml/2006/main">
+  <p:cSld>
+    <p:bg>
+      <p:bgPr>
+        <a:solidFill xmlns:a="http://schemas.openxmlformats.org/drawingml/2006/main">
+          <a:srgbClr val="FFFFFF"/>
+        </a:solidFill>
+      </p:bgPr>
+    </p:bg>
+    <p:spTree>
+      <p:nvGrpSpPr>
+        <p:cNvPr id="1" name=""/>
+        <p:cNvGrpSpPr/>
+        <p:nvPr/>
+      </p:nvGrpSpPr>
+      <p:grpSpPr/>
+      <p:sp>
+        <p:nvSpPr>
+          <p:cNvPr id="100078" name="TextBox 1"/>
+          <p:cNvSpPr txBox="1"/>
+          <p:nvPr/>
+        </p:nvSpPr>
+        <p:spPr>
+          <a:xfrm xmlns:a="http://schemas.openxmlformats.org/drawingml/2006/main">
+            <a:off x="864000" y="396000"/>
+            <a:ext cx="10440000" cy="648000"/>
+          </a:xfrm>
+          <a:prstGeom xmlns:a="http://schemas.openxmlformats.org/drawingml/2006/main" prst="rect">
+            <a:avLst/>
+          </a:prstGeom>
+        </p:spPr>
+        <p:txBody>
+          <a:bodyPr xmlns:a="http://schemas.openxmlformats.org/drawingml/2006/main"/>
+          <a:lstStyle xmlns:a="http://schemas.openxmlformats.org/drawingml/2006/main"/>
+          <a:p xmlns:a="http://schemas.openxmlformats.org/drawingml/2006/main">
+            <a:r>
+              <a:rPr lang="en-US" sz="3000" b="1">
+                <a:solidFill>
+                  <a:srgbClr val="8E2430"/>
+                </a:solidFill>
+                <a:latin typeface="微软雅黑"/>
+                <a:ea typeface="微软雅黑"/>
+              </a:rPr>
+              <a:t>毕业去向 · 就业深造双保障</a:t>
+            </a:r>
+          </a:p>
+        </p:txBody>
+      </p:sp>
+      <p:sp>
+        <p:nvSpPr>
+          <p:cNvPr id="100079" name="TextBox 2"/>
+          <p:cNvSpPr/>
+          <p:nvPr/>
+        </p:nvSpPr>
+        <p:spPr>
+          <a:xfrm xmlns:a="http://schemas.openxmlformats.org/drawingml/2006/main">
+            <a:off x="576000" y="540000"/>
+            <a:ext cx="162000" cy="162000"/>
+          </a:xfrm>
+          <a:prstGeom xmlns:a="http://schemas.openxmlformats.org/drawingml/2006/main" prst="rect">
+            <a:avLst/>
+          </a:prstGeom>
+          <a:solidFill xmlns:a="http://schemas.openxmlformats.org/drawingml/2006/main">
+            <a:srgbClr val="D4A843"/>
+          </a:solidFill>
+          <a:ln xmlns:a="http://schemas.openxmlformats.org/drawingml/2006/main">
+            <a:noFill/>
+          </a:ln>
+        </p:spPr>
+        <p:txBody>
+          <a:bodyPr xmlns:a="http://schemas.openxmlformats.org/drawingml/2006/main"/>
+          <a:lstStyle xmlns:a="http://schemas.openxmlformats.org/drawingml/2006/main"/>
+          <a:p xmlns:a="http://schemas.openxmlformats.org/drawingml/2006/main"/>
+        </p:txBody>
+      </p:sp>
+      <p:sp>
+        <p:nvSpPr>
+          <p:cNvPr id="100080" name="TextBox 3"/>
+          <p:cNvSpPr/>
+          <p:nvPr/>
+        </p:nvSpPr>
+        <p:spPr>
+          <a:xfrm xmlns:a="http://schemas.openxmlformats.org/drawingml/2006/main">
+            <a:off x="576000" y="1224000"/>
+            <a:ext cx="5472000" cy="3960000"/>
+          </a:xfrm>
+          <a:prstGeom xmlns:a="http://schemas.openxmlformats.org/drawingml/2006/main" prst="roundRect">
+            <a:avLst/>
+          </a:prstGeom>
+          <a:solidFill xmlns:a="http://schemas.openxmlformats.org/drawingml/2006/main">
+            <a:srgbClr val="F7F1EA"/>
+          </a:solidFill>
+          <a:ln xmlns:a="http://schemas.openxmlformats.org/drawingml/2006/main">
+            <a:noFill/>
+          </a:ln>
+        </p:spPr>
+        <p:txBody>
+          <a:bodyPr xmlns:a="http://schemas.openxmlformats.org/drawingml/2006/main"/>
+          <a:lstStyle xmlns:a="http://schemas.openxmlformats.org/drawingml/2006/main"/>
+          <a:p xmlns:a="http://schemas.openxmlformats.org/drawingml/2006/main"/>
+        </p:txBody>
+      </p:sp>
+      <p:sp>
+        <p:nvSpPr>
+          <p:cNvPr id="100081" name="TextBox 4"/>
+          <p:cNvSpPr txBox="1"/>
+          <p:nvPr/>
+        </p:nvSpPr>
+        <p:spPr>
+          <a:xfrm xmlns:a="http://schemas.openxmlformats.org/drawingml/2006/main">
+            <a:off x="720000" y="1404000"/>
+            <a:ext cx="4680000" cy="504000"/>
+          </a:xfrm>
+          <a:prstGeom xmlns:a="http://schemas.openxmlformats.org/drawingml/2006/main" prst="rect">
+            <a:avLst/>
+          </a:prstGeom>
+        </p:spPr>
+        <p:txBody>
+          <a:bodyPr xmlns:a="http://schemas.openxmlformats.org/drawingml/2006/main"/>
+          <a:lstStyle xmlns:a="http://schemas.openxmlformats.org/drawingml/2006/main"/>
+          <a:p xmlns:a="http://schemas.openxmlformats.org/drawingml/2006/main">
+            <a:r>
+              <a:rPr lang="en-US" sz="2400" b="1">
+                <a:solidFill>
+                  <a:srgbClr val="8E2430"/>
+                </a:solidFill>
+                <a:latin typeface="微软雅黑"/>
+                <a:ea typeface="微软雅黑"/>
+              </a:rPr>
+              <a:t>就业有保障</a:t>
+            </a:r>
+          </a:p>
+        </p:txBody>
+      </p:sp>
+      <p:sp>
+        <p:nvSpPr>
+          <p:cNvPr id="100082" name="TextBox 5"/>
+          <p:cNvSpPr txBox="1"/>
+          <p:nvPr/>
+        </p:nvSpPr>
+        <p:spPr>
+          <a:xfrm xmlns:a="http://schemas.openxmlformats.org/drawingml/2006/main">
+            <a:off x="720000" y="2016000"/>
+            <a:ext cx="4824000" cy="2664000"/>
+          </a:xfrm>
+          <a:prstGeom xmlns:a="http://schemas.openxmlformats.org/drawingml/2006/main" prst="rect">
+            <a:avLst/>
+          </a:prstGeom>
+        </p:spPr>
+        <p:txBody>
+          <a:bodyPr xmlns:a="http://schemas.openxmlformats.org/drawingml/2006/main"/>
+          <a:lstStyle xmlns:a="http://schemas.openxmlformats.org/drawingml/2006/main"/>
+          <a:p xmlns:a="http://schemas.openxmlformats.org/drawingml/2006/main">
+            <a:r>
+              <a:rPr lang="en-US" sz="1700">
+                <a:solidFill>
+                  <a:srgbClr val="333333"/>
+                </a:solidFill>
+                <a:latin typeface="微软雅黑"/>
+                <a:ea typeface="微软雅黑"/>
+              </a:rPr>
+              <a:t>就业去向多元，覆盖全国基础教育、政府事业单位、国有企业、教育科技等行业；依托教育部直属高校平台与师范特色，毕业生在各地教师招录中竞争优势明显，深受用人单位认可。</a:t>
+            </a:r>
+          </a:p>
+        </p:txBody>
+      </p:sp>
+      <p:sp>
+        <p:nvSpPr>
+          <p:cNvPr id="100083" name="TextBox 6"/>
+          <p:cNvSpPr/>
+          <p:nvPr/>
+        </p:nvSpPr>
+        <p:spPr>
+          <a:xfrm xmlns:a="http://schemas.openxmlformats.org/drawingml/2006/main">
+            <a:off x="6336000" y="1224000"/>
+            <a:ext cx="5256000" cy="3960000"/>
+          </a:xfrm>
+          <a:prstGeom xmlns:a="http://schemas.openxmlformats.org/drawingml/2006/main" prst="roundRect">
+            <a:avLst/>
+          </a:prstGeom>
+          <a:solidFill xmlns:a="http://schemas.openxmlformats.org/drawingml/2006/main">
+            <a:srgbClr val="8E2430"/>
+          </a:solidFill>
+          <a:ln xmlns:a="http://schemas.openxmlformats.org/drawingml/2006/main">
+            <a:noFill/>
+          </a:ln>
+        </p:spPr>
+        <p:txBody>
+          <a:bodyPr xmlns:a="http://schemas.openxmlformats.org/drawingml/2006/main"/>
+          <a:lstStyle xmlns:a="http://schemas.openxmlformats.org/drawingml/2006/main"/>
+          <a:p xmlns:a="http://schemas.openxmlformats.org/drawingml/2006/main"/>
+        </p:txBody>
+      </p:sp>
+      <p:sp>
+        <p:nvSpPr>
+          <p:cNvPr id="100084" name="TextBox 7"/>
+          <p:cNvSpPr txBox="1"/>
+          <p:nvPr/>
+        </p:nvSpPr>
+        <p:spPr>
+          <a:xfrm xmlns:a="http://schemas.openxmlformats.org/drawingml/2006/main">
+            <a:off x="6480000" y="1404000"/>
+            <a:ext cx="4752000" cy="504000"/>
+          </a:xfrm>
+          <a:prstGeom xmlns:a="http://schemas.openxmlformats.org/drawingml/2006/main" prst="rect">
+            <a:avLst/>
+          </a:prstGeom>
+        </p:spPr>
+        <p:txBody>
+          <a:bodyPr xmlns:a="http://schemas.openxmlformats.org/drawingml/2006/main"/>
+          <a:lstStyle xmlns:a="http://schemas.openxmlformats.org/drawingml/2006/main"/>
+          <a:p xmlns:a="http://schemas.openxmlformats.org/drawingml/2006/main">
+            <a:r>
+              <a:rPr lang="en-US" sz="2400" b="1">
+                <a:solidFill>
+                  <a:srgbClr val="FFFFFF"/>
+                </a:solidFill>
+                <a:latin typeface="微软雅黑"/>
+                <a:ea typeface="微软雅黑"/>
+              </a:rPr>
+              <a:t>深造路畅通</a:t>
+            </a:r>
+          </a:p>
+        </p:txBody>
+      </p:sp>
+      <p:sp>
+        <p:nvSpPr>
+          <p:cNvPr id="100085" name="TextBox 8"/>
+          <p:cNvSpPr txBox="1"/>
+          <p:nvPr/>
+        </p:nvSpPr>
+        <p:spPr>
+          <a:xfrm xmlns:a="http://schemas.openxmlformats.org/drawingml/2006/main">
+            <a:off x="6480000" y="2016000"/>
+            <a:ext cx="4896000" cy="2664000"/>
+          </a:xfrm>
+          <a:prstGeom xmlns:a="http://schemas.openxmlformats.org/drawingml/2006/main" prst="rect">
+            <a:avLst/>
+          </a:prstGeom>
+        </p:spPr>
+        <p:txBody>
+          <a:bodyPr xmlns:a="http://schemas.openxmlformats.org/drawingml/2006/main"/>
+          <a:lstStyle xmlns:a="http://schemas.openxmlformats.org/drawingml/2006/main"/>
+          <a:p xmlns:a="http://schemas.openxmlformats.org/drawingml/2006/main">
+            <a:r>
+              <a:rPr lang="en-US" sz="1700">
+                <a:solidFill>
+                  <a:srgbClr val="F4E5D2"/>
+                </a:solidFill>
+                <a:latin typeface="微软雅黑"/>
+                <a:ea typeface="微软雅黑"/>
+              </a:rPr>
+              <a:t>保研、考研与出国深造通道齐备；依托良好学风与学科平台，众多学子进入国内外一流高校继续深造，升学质量保持高位。</a:t>
+            </a:r>
+          </a:p>
+        </p:txBody>
+      </p:sp>
+      <p:sp>
+        <p:nvSpPr>
+          <p:cNvPr id="100086" name="TextBox 9"/>
+          <p:cNvSpPr txBox="1"/>
+          <p:nvPr/>
+        </p:nvSpPr>
+        <p:spPr>
+          <a:xfrm xmlns:a="http://schemas.openxmlformats.org/drawingml/2006/main">
+            <a:off x="576000" y="5472000"/>
+            <a:ext cx="10800000" cy="432000"/>
+          </a:xfrm>
+          <a:prstGeom xmlns:a="http://schemas.openxmlformats.org/drawingml/2006/main" prst="rect">
+            <a:avLst/>
+          </a:prstGeom>
+        </p:spPr>
+        <p:txBody>
+          <a:bodyPr xmlns:a="http://schemas.openxmlformats.org/drawingml/2006/main"/>
+          <a:lstStyle xmlns:a="http://schemas.openxmlformats.org/drawingml/2006/main"/>
+          <a:p xmlns:a="http://schemas.openxmlformats.org/drawingml/2006/main">
+            <a:r>
+              <a:rPr lang="en-US" sz="1300">
+                <a:solidFill>
+                  <a:srgbClr val="8E7C6E"/>
+                </a:solidFill>
+                <a:latin typeface="微软雅黑"/>
+                <a:ea typeface="微软雅黑"/>
+              </a:rPr>
+              <a:t>更详尽的就业率、升学率与就业流向，请以学校发布的年度《就业质量报告》为准。</a:t>
+            </a:r>
+          </a:p>
+        </p:txBody>
+      </p:sp>
+      <p:sp>
+        <p:nvSpPr>
+          <p:cNvPr id="100087" name="TextBox 10"/>
+          <p:cNvSpPr txBox="1"/>
+          <p:nvPr/>
+        </p:nvSpPr>
+        <p:spPr>
+          <a:xfrm xmlns:a="http://schemas.openxmlformats.org/drawingml/2006/main">
+            <a:off x="10944000" y="6552000"/>
+            <a:ext cx="720000" cy="360000"/>
+          </a:xfrm>
+          <a:prstGeom xmlns:a="http://schemas.openxmlformats.org/drawingml/2006/main" prst="rect">
+            <a:avLst/>
+          </a:prstGeom>
+        </p:spPr>
+        <p:txBody>
+          <a:bodyPr xmlns:a="http://schemas.openxmlformats.org/drawingml/2006/main"/>
+          <a:lstStyle xmlns:a="http://schemas.openxmlformats.org/drawingml/2006/main"/>
+          <a:p xmlns:a="http://schemas.openxmlformats.org/drawingml/2006/main">
+            <a:pPr algn="r"/>
+            <a:r>
+              <a:rPr lang="en-US" sz="1200">
+                <a:solidFill>
+                  <a:srgbClr val="8E7C6E"/>
+                </a:solidFill>
+                <a:latin typeface="微软雅黑"/>
+                <a:ea typeface="微软雅黑"/>
+              </a:rPr>
+              <a:t>7 / 10</a:t>
+            </a:r>
+          </a:p>
+        </p:txBody>
+      </p:sp>
+    </p:spTree>
+  </p:cSld>
+</p:sld>
+</file>
+
+<file path=ppt/slides/slide8.xml><?xml version="1.0" encoding="utf-8"?>
+<p:sld xmlns:a="http://schemas.openxmlformats.org/drawingml/2006/main" xmlns:p="http://schemas.openxmlformats.org/presentationml/2006/main">
+  <p:cSld>
+    <p:bg>
+      <p:bgPr>
+        <a:solidFill xmlns:a="http://schemas.openxmlformats.org/drawingml/2006/main">
+          <a:srgbClr val="FFFFFF"/>
+        </a:solidFill>
+      </p:bgPr>
+    </p:bg>
+    <p:spTree>
+      <p:nvGrpSpPr>
+        <p:cNvPr id="1" name=""/>
+        <p:cNvGrpSpPr/>
+        <p:nvPr/>
+      </p:nvGrpSpPr>
+      <p:grpSpPr/>
+      <p:sp>
+        <p:nvSpPr>
+          <p:cNvPr id="100088" name="TextBox 1"/>
+          <p:cNvSpPr txBox="1"/>
+          <p:nvPr/>
+        </p:nvSpPr>
+        <p:spPr>
+          <a:xfrm xmlns:a="http://schemas.openxmlformats.org/drawingml/2006/main">
+            <a:off x="864000" y="396000"/>
+            <a:ext cx="10440000" cy="648000"/>
+          </a:xfrm>
+          <a:prstGeom xmlns:a="http://schemas.openxmlformats.org/drawingml/2006/main" prst="rect">
+            <a:avLst/>
+          </a:prstGeom>
+        </p:spPr>
+        <p:txBody>
+          <a:bodyPr xmlns:a="http://schemas.openxmlformats.org/drawingml/2006/main"/>
+          <a:lstStyle xmlns:a="http://schemas.openxmlformats.org/drawingml/2006/main"/>
+          <a:p xmlns:a="http://schemas.openxmlformats.org/drawingml/2006/main">
+            <a:r>
+              <a:rPr lang="en-US" sz="3000" b="1">
+                <a:solidFill>
+                  <a:srgbClr val="8E2430"/>
+                </a:solidFill>
+                <a:latin typeface="微软雅黑"/>
+                <a:ea typeface="微软雅黑"/>
+              </a:rPr>
+              <a:t>报考录取 · 关键信息一览</a:t>
+            </a:r>
+          </a:p>
+        </p:txBody>
+      </p:sp>
+      <p:sp>
+        <p:nvSpPr>
+          <p:cNvPr id="100089" name="TextBox 2"/>
+          <p:cNvSpPr/>
+          <p:nvPr/>
+        </p:nvSpPr>
+        <p:spPr>
+          <a:xfrm xmlns:a="http://schemas.openxmlformats.org/drawingml/2006/main">
+            <a:off x="576000" y="540000"/>
+            <a:ext cx="162000" cy="162000"/>
+          </a:xfrm>
+          <a:prstGeom xmlns:a="http://schemas.openxmlformats.org/drawingml/2006/main" prst="rect">
+            <a:avLst/>
+          </a:prstGeom>
+          <a:solidFill xmlns:a="http://schemas.openxmlformats.org/drawingml/2006/main">
+            <a:srgbClr val="D4A843"/>
+          </a:solidFill>
+          <a:ln xmlns:a="http://schemas.openxmlformats.org/drawingml/2006/main">
+            <a:noFill/>
+          </a:ln>
+        </p:spPr>
+        <p:txBody>
+          <a:bodyPr xmlns:a="http://schemas.openxmlformats.org/drawingml/2006/main"/>
+          <a:lstStyle xmlns:a="http://schemas.openxmlformats.org/drawingml/2006/main"/>
+          <a:p xmlns:a="http://schemas.openxmlformats.org/drawingml/2006/main"/>
+        </p:txBody>
+      </p:sp>
+      <p:sp>
+        <p:nvSpPr>
+          <p:cNvPr id="100090" name="TextBox 3"/>
+          <p:cNvSpPr/>
+          <p:nvPr/>
+        </p:nvSpPr>
+        <p:spPr>
+          <a:xfrm xmlns:a="http://schemas.openxmlformats.org/drawingml/2006/main">
+            <a:off x="576000" y="1188000"/>
+            <a:ext cx="5472000" cy="2088000"/>
+          </a:xfrm>
+          <a:prstGeom xmlns:a="http://schemas.openxmlformats.org/drawingml/2006/main" prst="roundRect">
+            <a:avLst/>
+          </a:prstGeom>
+          <a:solidFill xmlns:a="http://schemas.openxmlformats.org/drawingml/2006/main">
+            <a:srgbClr val="F7F1EA"/>
+          </a:solidFill>
+          <a:ln xmlns:a="http://schemas.openxmlformats.org/drawingml/2006/main">
+            <a:noFill/>
+          </a:ln>
+        </p:spPr>
+        <p:txBody>
+          <a:bodyPr xmlns:a="http://schemas.openxmlformats.org/drawingml/2006/main"/>
+          <a:lstStyle xmlns:a="http://schemas.openxmlformats.org/drawingml/2006/main"/>
+          <a:p xmlns:a="http://schemas.openxmlformats.org/drawingml/2006/main"/>
+        </p:txBody>
+      </p:sp>
+      <p:sp>
+        <p:nvSpPr>
+          <p:cNvPr id="100091" name="TextBox 4"/>
+          <p:cNvSpPr txBox="1"/>
+          <p:nvPr/>
+        </p:nvSpPr>
+        <p:spPr>
+          <a:xfrm xmlns:a="http://schemas.openxmlformats.org/drawingml/2006/main">
+            <a:off x="720000" y="1332000"/>
+            <a:ext cx="4680000" cy="468000"/>
+          </a:xfrm>
+          <a:prstGeom xmlns:a="http://schemas.openxmlformats.org/drawingml/2006/main" prst="rect">
+            <a:avLst/>
+          </a:prstGeom>
+        </p:spPr>
+        <p:txBody>
+          <a:bodyPr xmlns:a="http://schemas.openxmlformats.org/drawingml/2006/main"/>
+          <a:lstStyle xmlns:a="http://schemas.openxmlformats.org/drawingml/2006/main"/>
+          <a:p xmlns:a="http://schemas.openxmlformats.org/drawingml/2006/main">
+            <a:r>
+              <a:rPr lang="en-US" sz="2000" b="1">
+                <a:solidFill>
+                  <a:srgbClr val="8E2430"/>
+                </a:solidFill>
+                <a:latin typeface="微软雅黑"/>
+                <a:ea typeface="微软雅黑"/>
+              </a:rPr>
+              <a:t>招生批次</a:t>
+            </a:r>
+          </a:p>
+        </p:txBody>
+      </p:sp>
+      <p:sp>
+        <p:nvSpPr>
+          <p:cNvPr id="100092" name="TextBox 5"/>
+          <p:cNvSpPr txBox="1"/>
+          <p:nvPr/>
+        </p:nvSpPr>
+        <p:spPr>
+          <a:xfrm xmlns:a="http://schemas.openxmlformats.org/drawingml/2006/main">
+            <a:off x="720000" y="1908000"/>
+            <a:ext cx="4824000" cy="1152000"/>
+          </a:xfrm>
+          <a:prstGeom xmlns:a="http://schemas.openxmlformats.org/drawingml/2006/main" prst="rect">
+            <a:avLst/>
+          </a:prstGeom>
+        </p:spPr>
+        <p:txBody>
+          <a:bodyPr xmlns:a="http://schemas.openxmlformats.org/drawingml/2006/main"/>
+          <a:lstStyle xmlns:a="http://schemas.openxmlformats.org/drawingml/2006/main"/>
+          <a:p xmlns:a="http://schemas.openxmlformats.org/drawingml/2006/main">
+            <a:r>
+              <a:rPr lang="en-US" sz="1500">
+                <a:solidFill>
+                  <a:srgbClr val="333333"/>
+                </a:solidFill>
+                <a:latin typeface="微软雅黑"/>
+                <a:ea typeface="微软雅黑"/>
+              </a:rPr>
+              <a:t>一般在普通类本科批次招生，部分地区或专业另有安排，具体以本省招考机构公布的批次设置为准。</a:t>
+            </a:r>
+          </a:p>
+        </p:txBody>
+      </p:sp>
+      <p:sp>
+        <p:nvSpPr>
+          <p:cNvPr id="100093" name="TextBox 6"/>
+          <p:cNvSpPr/>
+          <p:nvPr/>
+        </p:nvSpPr>
+        <p:spPr>
+          <a:xfrm xmlns:a="http://schemas.openxmlformats.org/drawingml/2006/main">
+            <a:off x="6336000" y="1188000"/>
+            <a:ext cx="5256000" cy="2088000"/>
+          </a:xfrm>
+          <a:prstGeom xmlns:a="http://schemas.openxmlformats.org/drawingml/2006/main" prst="roundRect">
+            <a:avLst/>
+          </a:prstGeom>
+          <a:solidFill xmlns:a="http://schemas.openxmlformats.org/drawingml/2006/main">
+            <a:srgbClr val="8E2430"/>
+          </a:solidFill>
+          <a:ln xmlns:a="http://schemas.openxmlformats.org/drawingml/2006/main">
+            <a:noFill/>
+          </a:ln>
+        </p:spPr>
+        <p:txBody>
+          <a:bodyPr xmlns:a="http://schemas.openxmlformats.org/drawingml/2006/main"/>
+          <a:lstStyle xmlns:a="http://schemas.openxmlformats.org/drawingml/2006/main"/>
+          <a:p xmlns:a="http://schemas.openxmlformats.org/drawingml/2006/main"/>
+        </p:txBody>
+      </p:sp>
+      <p:sp>
+        <p:nvSpPr>
+          <p:cNvPr id="100094" name="TextBox 7"/>
+          <p:cNvSpPr txBox="1"/>
+          <p:nvPr/>
+        </p:nvSpPr>
+        <p:spPr>
+          <a:xfrm xmlns:a="http://schemas.openxmlformats.org/drawingml/2006/main">
+            <a:off x="6480000" y="1332000"/>
+            <a:ext cx="4680000" cy="468000"/>
+          </a:xfrm>
+          <a:prstGeom xmlns:a="http://schemas.openxmlformats.org/drawingml/2006/main" prst="rect">
+            <a:avLst/>
+          </a:prstGeom>
+        </p:spPr>
+        <p:txBody>
+          <a:bodyPr xmlns:a="http://schemas.openxmlformats.org/drawingml/2006/main"/>
+          <a:lstStyle xmlns:a="http://schemas.openxmlformats.org/drawingml/2006/main"/>
+          <a:p xmlns:a="http://schemas.openxmlformats.org/drawingml/2006/main">
+            <a:r>
+              <a:rPr lang="en-US" sz="2000" b="1">
+                <a:solidFill>
+                  <a:srgbClr val="FFFFFF"/>
+                </a:solidFill>
+                <a:latin typeface="微软雅黑"/>
+                <a:ea typeface="微软雅黑"/>
+              </a:rPr>
+              <a:t>选科与专业组</a:t>
+            </a:r>
+          </a:p>
+        </p:txBody>
+      </p:sp>
+      <p:sp>
+        <p:nvSpPr>
+          <p:cNvPr id="100095" name="TextBox 8"/>
+          <p:cNvSpPr txBox="1"/>
+          <p:nvPr/>
+        </p:nvSpPr>
+        <p:spPr>
+          <a:xfrm xmlns:a="http://schemas.openxmlformats.org/drawingml/2006/main">
+            <a:off x="6480000" y="1908000"/>
+            <a:ext cx="4896000" cy="1152000"/>
+          </a:xfrm>
+          <a:prstGeom xmlns:a="http://schemas.openxmlformats.org/drawingml/2006/main" prst="rect">
+            <a:avLst/>
+          </a:prstGeom>
+        </p:spPr>
+        <p:txBody>
+          <a:bodyPr xmlns:a="http://schemas.openxmlformats.org/drawingml/2006/main"/>
+          <a:lstStyle xmlns:a="http://schemas.openxmlformats.org/drawingml/2006/main"/>
+          <a:p xmlns:a="http://schemas.openxmlformats.org/drawingml/2006/main">
+            <a:r>
+              <a:rPr lang="en-US" sz="1500">
+                <a:solidFill>
+                  <a:srgbClr val="F4E5D2"/>
+                </a:solidFill>
+                <a:latin typeface="微软雅黑"/>
+                <a:ea typeface="微软雅黑"/>
+              </a:rPr>
+              <a:t>不同专业组对首选与再选科目有明确要求，填报前请对照本省选科指引与专业组目录逐条核对。</a:t>
+            </a:r>
+          </a:p>
+        </p:txBody>
+      </p:sp>
+      <p:sp>
+        <p:nvSpPr>
+          <p:cNvPr id="100096" name="TextBox 9"/>
+          <p:cNvSpPr/>
+          <p:nvPr/>
+        </p:nvSpPr>
+        <p:spPr>
+          <a:xfrm xmlns:a="http://schemas.openxmlformats.org/drawingml/2006/main">
+            <a:off x="576000" y="3456000"/>
+            <a:ext cx="5472000" cy="2088000"/>
+          </a:xfrm>
+          <a:prstGeom xmlns:a="http://schemas.openxmlformats.org/drawingml/2006/main" prst="roundRect">
+            <a:avLst/>
+          </a:prstGeom>
+          <a:solidFill xmlns:a="http://schemas.openxmlformats.org/drawingml/2006/main">
+            <a:srgbClr val="8E2430"/>
+          </a:solidFill>
+          <a:ln xmlns:a="http://schemas.openxmlformats.org/drawingml/2006/main">
+            <a:noFill/>
+          </a:ln>
+        </p:spPr>
+        <p:txBody>
+          <a:bodyPr xmlns:a="http://schemas.openxmlformats.org/drawingml/2006/main"/>
+          <a:lstStyle xmlns:a="http://schemas.openxmlformats.org/drawingml/2006/main"/>
+          <a:p xmlns:a="http://schemas.openxmlformats.org/drawingml/2006/main"/>
+        </p:txBody>
+      </p:sp>
+      <p:sp>
+        <p:nvSpPr>
+          <p:cNvPr id="100097" name="TextBox 10"/>
+          <p:cNvSpPr txBox="1"/>
+          <p:nvPr/>
+        </p:nvSpPr>
+        <p:spPr>
+          <a:xfrm xmlns:a="http://schemas.openxmlformats.org/drawingml/2006/main">
+            <a:off x="720000" y="3600000"/>
+            <a:ext cx="4680000" cy="468000"/>
+          </a:xfrm>
+          <a:prstGeom xmlns:a="http://schemas.openxmlformats.org/drawingml/2006/main" prst="rect">
+            <a:avLst/>
+          </a:prstGeom>
+        </p:spPr>
+        <p:txBody>
+          <a:bodyPr xmlns:a="http://schemas.openxmlformats.org/drawingml/2006/main"/>
+          <a:lstStyle xmlns:a="http://schemas.openxmlformats.org/drawingml/2006/main"/>
+          <a:p xmlns:a="http://schemas.openxmlformats.org/drawingml/2006/main">
+            <a:r>
+              <a:rPr lang="en-US" sz="2000" b="1">
+                <a:solidFill>
+                  <a:srgbClr val="FFFFFF"/>
+                </a:solidFill>
+                <a:latin typeface="微软雅黑"/>
+                <a:ea typeface="微软雅黑"/>
+              </a:rPr>
+              <a:t>分数与位次</a:t>
+            </a:r>
+          </a:p>
+        </p:txBody>
+      </p:sp>
+      <p:sp>
+        <p:nvSpPr>
+          <p:cNvPr id="100098" name="TextBox 11"/>
+          <p:cNvSpPr txBox="1"/>
+          <p:nvPr/>
+        </p:nvSpPr>
+        <p:spPr>
+          <a:xfrm xmlns:a="http://schemas.openxmlformats.org/drawingml/2006/main">
+            <a:off x="720000" y="4176000"/>
+            <a:ext cx="4824000" cy="1152000"/>
+          </a:xfrm>
+          <a:prstGeom xmlns:a="http://schemas.openxmlformats.org/drawingml/2006/main" prst="rect">
+            <a:avLst/>
+          </a:prstGeom>
+        </p:spPr>
+        <p:txBody>
+          <a:bodyPr xmlns:a="http://schemas.openxmlformats.org/drawingml/2006/main"/>
+          <a:lstStyle xmlns:a="http://schemas.openxmlformats.org/drawingml/2006/main"/>
+          <a:p xmlns:a="http://schemas.openxmlformats.org/drawingml/2006/main">
+            <a:r>
+              <a:rPr lang="en-US" sz="1500">
+                <a:solidFill>
+                  <a:srgbClr val="F4E5D2"/>
+                </a:solidFill>
+                <a:latin typeface="微软雅黑"/>
+                <a:ea typeface="微软雅黑"/>
+              </a:rPr>
+              <a:t>录取分数线与位次逐年浮动，建议结合历年录取数据与本年度考生位次，合理设置冲、稳、保梯度。</a:t>
+            </a:r>
+          </a:p>
+        </p:txBody>
+      </p:sp>
+      <p:sp>
+        <p:nvSpPr>
+          <p:cNvPr id="100099" name="TextBox 12"/>
+          <p:cNvSpPr/>
+          <p:nvPr/>
+        </p:nvSpPr>
+        <p:spPr>
+          <a:xfrm xmlns:a="http://schemas.openxmlformats.org/drawingml/2006/main">
+            <a:off x="6336000" y="3456000"/>
+            <a:ext cx="5256000" cy="2088000"/>
+          </a:xfrm>
+          <a:prstGeom xmlns:a="http://schemas.openxmlformats.org/drawingml/2006/main" prst="roundRect">
+            <a:avLst/>
+          </a:prstGeom>
+          <a:solidFill xmlns:a="http://schemas.openxmlformats.org/drawingml/2006/main">
+            <a:srgbClr val="F7F1EA"/>
+          </a:solidFill>
+          <a:ln xmlns:a="http://schemas.openxmlformats.org/drawingml/2006/main">
+            <a:noFill/>
+          </a:ln>
+        </p:spPr>
+        <p:txBody>
+          <a:bodyPr xmlns:a="http://schemas.openxmlformats.org/drawingml/2006/main"/>
+          <a:lstStyle xmlns:a="http://schemas.openxmlformats.org/drawingml/2006/main"/>
+          <a:p xmlns:a="http://schemas.openxmlformats.org/drawingml/2006/main"/>
+        </p:txBody>
+      </p:sp>
+      <p:sp>
+        <p:nvSpPr>
+          <p:cNvPr id="100100" name="TextBox 13"/>
+          <p:cNvSpPr txBox="1"/>
+          <p:nvPr/>
+        </p:nvSpPr>
+        <p:spPr>
+          <a:xfrm xmlns:a="http://schemas.openxmlformats.org/drawingml/2006/main">
+            <a:off x="6480000" y="3600000"/>
+            <a:ext cx="4680000" cy="468000"/>
+          </a:xfrm>
+          <a:prstGeom xmlns:a="http://schemas.openxmlformats.org/drawingml/2006/main" prst="rect">
+            <a:avLst/>
+          </a:prstGeom>
+        </p:spPr>
+        <p:txBody>
+          <a:bodyPr xmlns:a="http://schemas.openxmlformats.org/drawingml/2006/main"/>
+          <a:lstStyle xmlns:a="http://schemas.openxmlformats.org/drawingml/2006/main"/>
+          <a:p xmlns:a="http://schemas.openxmlformats.org/drawingml/2006/main">
+            <a:r>
+              <a:rPr lang="en-US" sz="2000" b="1">
+                <a:solidFill>
+                  <a:srgbClr val="8E2430"/>
+                </a:solidFill>
+                <a:latin typeface="微软雅黑"/>
+                <a:ea typeface="微软雅黑"/>
+              </a:rPr>
+              <a:t>官方信息渠道</a:t>
+            </a:r>
+          </a:p>
+        </p:txBody>
+      </p:sp>
+      <p:sp>
+        <p:nvSpPr>
+          <p:cNvPr id="100101" name="TextBox 14"/>
+          <p:cNvSpPr txBox="1"/>
+          <p:nvPr/>
+        </p:nvSpPr>
+        <p:spPr>
+          <a:xfrm xmlns:a="http://schemas.openxmlformats.org/drawingml/2006/main">
+            <a:off x="6480000" y="4176000"/>
+            <a:ext cx="4896000" cy="1152000"/>
+          </a:xfrm>
+          <a:prstGeom xmlns:a="http://schemas.openxmlformats.org/drawingml/2006/main" prst="rect">
+            <a:avLst/>
+          </a:prstGeom>
+        </p:spPr>
+        <p:txBody>
+          <a:bodyPr xmlns:a="http://schemas.openxmlformats.org/drawingml/2006/main"/>
+          <a:lstStyle xmlns:a="http://schemas.openxmlformats.org/drawingml/2006/main"/>
+          <a:p xmlns:a="http://schemas.openxmlformats.org/drawingml/2006/main">
+            <a:r>
+              <a:rPr lang="en-US" sz="1500">
+                <a:solidFill>
+                  <a:srgbClr val="333333"/>
+                </a:solidFill>
+                <a:latin typeface="微软雅黑"/>
+                <a:ea typeface="微软雅黑"/>
+              </a:rPr>
+              <a:t>以学校本科招生网、官方招生办、省级教育考试院发布为准，谨防非正规渠道的虚假信息。</a:t>
+            </a:r>
+          </a:p>
+        </p:txBody>
+      </p:sp>
+      <p:sp>
+        <p:nvSpPr>
+          <p:cNvPr id="100102" name="TextBox 15"/>
+          <p:cNvSpPr txBox="1"/>
+          <p:nvPr/>
+        </p:nvSpPr>
+        <p:spPr>
+          <a:xfrm xmlns:a="http://schemas.openxmlformats.org/drawingml/2006/main">
+            <a:off x="576000" y="5760000"/>
+            <a:ext cx="10800000" cy="360000"/>
+          </a:xfrm>
+          <a:prstGeom xmlns:a="http://schemas.openxmlformats.org/drawingml/2006/main" prst="rect">
+            <a:avLst/>
+          </a:prstGeom>
+        </p:spPr>
+        <p:txBody>
+          <a:bodyPr xmlns:a="http://schemas.openxmlformats.org/drawingml/2006/main"/>
+          <a:lstStyle xmlns:a="http://schemas.openxmlformats.org/drawingml/2006/main"/>
+          <a:p xmlns:a="http://schemas.openxmlformats.org/drawingml/2006/main">
+            <a:r>
+              <a:rPr lang="en-US" sz="1300">
+                <a:solidFill>
+                  <a:srgbClr val="8E7C6E"/>
+                </a:solidFill>
+                <a:latin typeface="微软雅黑"/>
+                <a:ea typeface="微软雅黑"/>
+              </a:rPr>
+              <a:t>注：全部录取政策以教育部及陕西省当年招生文件为准。</a:t>
+            </a:r>
+          </a:p>
+        </p:txBody>
+      </p:sp>
+      <p:sp>
+        <p:nvSpPr>
+          <p:cNvPr id="100103" name="TextBox 16"/>
+          <p:cNvSpPr txBox="1"/>
+          <p:nvPr/>
+        </p:nvSpPr>
+        <p:spPr>
+          <a:xfrm xmlns:a="http://schemas.openxmlformats.org/drawingml/2006/main">
+            <a:off x="10944000" y="6552000"/>
+            <a:ext cx="720000" cy="360000"/>
+          </a:xfrm>
+          <a:prstGeom xmlns:a="http://schemas.openxmlformats.org/drawingml/2006/main" prst="rect">
+            <a:avLst/>
+          </a:prstGeom>
+        </p:spPr>
+        <p:txBody>
+          <a:bodyPr xmlns:a="http://schemas.openxmlformats.org/drawingml/2006/main"/>
+          <a:lstStyle xmlns:a="http://schemas.openxmlformats.org/drawingml/2006/main"/>
+          <a:p xmlns:a="http://schemas.openxmlformats.org/drawingml/2006/main">
+            <a:pPr algn="r"/>
+            <a:r>
+              <a:rPr lang="en-US" sz="1200">
+                <a:solidFill>
+                  <a:srgbClr val="8E7C6E"/>
+                </a:solidFill>
+                <a:latin typeface="微软雅黑"/>
+                <a:ea typeface="微软雅黑"/>
+              </a:rPr>
+              <a:t>8 / 10</a:t>
+            </a:r>
+          </a:p>
+        </p:txBody>
+      </p:sp>
+    </p:spTree>
+  </p:cSld>
+</p:sld>
+</file>
+
+<file path=ppt/slides/slide9.xml><?xml version="1.0" encoding="utf-8"?>
+<p:sld xmlns:a="http://schemas.openxmlformats.org/drawingml/2006/main" xmlns:p="http://schemas.openxmlformats.org/presentationml/2006/main">
+  <p:cSld>
+    <p:bg>
+      <p:bgPr>
+        <a:solidFill xmlns:a="http://schemas.openxmlformats.org/drawingml/2006/main">
+          <a:srgbClr val="FFFFFF"/>
+        </a:solidFill>
+      </p:bgPr>
+    </p:bg>
+    <p:spTree>
+      <p:nvGrpSpPr>
+        <p:cNvPr id="1" name=""/>
+        <p:cNvGrpSpPr/>
+        <p:nvPr/>
+      </p:nvGrpSpPr>
+      <p:grpSpPr/>
+      <p:sp>
+        <p:nvSpPr>
+          <p:cNvPr id="100104" name="TextBox 1"/>
+          <p:cNvSpPr txBox="1"/>
+          <p:nvPr/>
+        </p:nvSpPr>
+        <p:spPr>
+          <a:xfrm xmlns:a="http://schemas.openxmlformats.org/drawingml/2006/main">
+            <a:off x="864000" y="396000"/>
+            <a:ext cx="10440000" cy="648000"/>
+          </a:xfrm>
+          <a:prstGeom xmlns:a="http://schemas.openxmlformats.org/drawingml/2006/main" prst="rect">
+            <a:avLst/>
+          </a:prstGeom>
+        </p:spPr>
+        <p:txBody>
+          <a:bodyPr xmlns:a="http://schemas.openxmlformats.org/drawingml/2006/main"/>
+          <a:lstStyle xmlns:a="http://schemas.openxmlformats.org/drawingml/2006/main"/>
+          <a:p xmlns:a="http://schemas.openxmlformats.org/drawingml/2006/main">
+            <a:r>
+              <a:rPr lang="en-US" sz="3000" b="1">
+                <a:solidFill>
+                  <a:srgbClr val="8E2430"/>
+                </a:solidFill>
+                <a:latin typeface="微软雅黑"/>
+                <a:ea typeface="微软雅黑"/>
+              </a:rPr>
+              <a:t>报考流程 · 四步走进陕师大</a:t>
+            </a:r>
+          </a:p>
+        </p:txBody>
+      </p:sp>
+      <p:sp>
+        <p:nvSpPr>
+          <p:cNvPr id="100105" name="TextBox 2"/>
+          <p:cNvSpPr/>
+          <p:nvPr/>
+        </p:nvSpPr>
+        <p:spPr>
+          <a:xfrm xmlns:a="http://schemas.openxmlformats.org/drawingml/2006/main">
+            <a:off x="576000" y="540000"/>
+            <a:ext cx="162000" cy="162000"/>
+          </a:xfrm>
+          <a:prstGeom xmlns:a="http://schemas.openxmlformats.org/drawingml/2006/main" prst="rect">
+            <a:avLst/>
+          </a:prstGeom>
+          <a:solidFill xmlns:a="http://schemas.openxmlformats.org/drawingml/2006/main">
+            <a:srgbClr val="D4A843"/>
+          </a:solidFill>
+          <a:ln xmlns:a="http://schemas.openxmlformats.org/drawingml/2006/main">
+            <a:noFill/>
+          </a:ln>
+        </p:spPr>
+        <p:txBody>
+          <a:bodyPr xmlns:a="http://schemas.openxmlformats.org/drawingml/2006/main"/>
+          <a:lstStyle xmlns:a="http://schemas.openxmlformats.org/drawingml/2006/main"/>
+          <a:p xmlns:a="http://schemas.openxmlformats.org/drawingml/2006/main"/>
+        </p:txBody>
+      </p:sp>
+      <p:sp>
+        <p:nvSpPr>
+          <p:cNvPr id="100106" name="TextBox 3"/>
+          <p:cNvSpPr/>
+          <p:nvPr/>
+        </p:nvSpPr>
+        <p:spPr>
+          <a:xfrm xmlns:a="http://schemas.openxmlformats.org/drawingml/2006/main">
+            <a:off x="1566000" y="2376000"/>
+            <a:ext cx="504000" cy="504000"/>
+          </a:xfrm>
+          <a:prstGeom xmlns:a="http://schemas.openxmlformats.org/drawingml/2006/main" prst="ellipse">
+            <a:avLst/>
+          </a:prstGeom>
+          <a:solidFill xmlns:a="http://schemas.openxmlformats.org/drawingml/2006/main">
+            <a:srgbClr val="D4A843"/>
+          </a:solidFill>
+          <a:ln xmlns:a="http://schemas.openxmlformats.org/drawingml/2006/main">
+            <a:noFill/>
+          </a:ln>
+        </p:spPr>
+        <p:txBody>
+          <a:bodyPr xmlns:a="http://schemas.openxmlformats.org/drawingml/2006/main"/>
+          <a:lstStyle xmlns:a="http://schemas.openxmlformats.org/drawingml/2006/main"/>
+          <a:p xmlns:a="http://schemas.openxmlformats.org/drawingml/2006/main"/>
+        </p:txBody>
+      </p:sp>
+      <p:sp>
+        <p:nvSpPr>
+          <p:cNvPr id="100107" name="TextBox 4"/>
+          <p:cNvSpPr txBox="1"/>
+          <p:nvPr/>
+        </p:nvSpPr>
+        <p:spPr>
+          <a:xfrm xmlns:a="http://schemas.openxmlformats.org/drawingml/2006/main">
+            <a:off x="1566000" y="2466000"/>
+            <a:ext cx="504000" cy="360000"/>
+          </a:xfrm>
+          <a:prstGeom xmlns:a="http://schemas.openxmlformats.org/drawingml/2006/main" prst="rect">
+            <a:avLst/>
+          </a:prstGeom>
+        </p:spPr>
+        <p:txBody>
+          <a:bodyPr xmlns:a="http://schemas.openxmlformats.org/drawingml/2006/main"/>
+          <a:lstStyle xmlns:a="http://schemas.openxmlformats.org/drawingml/2006/main"/>
+          <a:p xmlns:a="http://schemas.openxmlformats.org/drawingml/2006/main">
+            <a:pPr algn="ctr"/>
+            <a:r>
+              <a:rPr lang="en-US" sz="1800" b="1">
+                <a:solidFill>
+                  <a:srgbClr val="8E2430"/>
+                </a:solidFill>
+                <a:latin typeface="微软雅黑"/>
+                <a:ea typeface="微软雅黑"/>
+              </a:rPr>
+              <a:t>1</a:t>
+            </a:r>
+          </a:p>
+        </p:txBody>
+      </p:sp>
+      <p:sp>
+        <p:nvSpPr>
+          <p:cNvPr id="100108" name="TextBox 5"/>
+          <p:cNvSpPr/>
+          <p:nvPr/>
+        </p:nvSpPr>
+        <p:spPr>
+          <a:xfrm xmlns:a="http://schemas.openxmlformats.org/drawingml/2006/main">
+            <a:off x="4374000" y="2376000"/>
+            <a:ext cx="504000" cy="504000"/>
+          </a:xfrm>
+          <a:prstGeom xmlns:a="http://schemas.openxmlformats.org/drawingml/2006/main" prst="ellipse">
+            <a:avLst/>
+          </a:prstGeom>
+          <a:solidFill xmlns:a="http://schemas.openxmlformats.org/drawingml/2006/main">
+            <a:srgbClr val="D4A843"/>
+          </a:solidFill>
+          <a:ln xmlns:a="http://schemas.openxmlformats.org/drawingml/2006/main">
+            <a:noFill/>
+          </a:ln>
+        </p:spPr>
+        <p:txBody>
+          <a:bodyPr xmlns:a="http://schemas.openxmlformats.org/drawingml/2006/main"/>
+          <a:lstStyle xmlns:a="http://schemas.openxmlformats.org/drawingml/2006/main"/>
+          <a:p xmlns:a="http://schemas.openxmlformats.org/drawingml/2006/main"/>
+        </p:txBody>
+      </p:sp>
+      <p:sp>
+        <p:nvSpPr>
+          <p:cNvPr id="100109" name="TextBox 6"/>
+          <p:cNvSpPr txBox="1"/>
+          <p:nvPr/>
+        </p:nvSpPr>
+        <p:spPr>
+          <a:xfrm xmlns:a="http://schemas.openxmlformats.org/drawingml/2006/main">
+            <a:off x="4374000" y="2466000"/>
+            <a:ext cx="504000" cy="360000"/>
+          </a:xfrm>
+          <a:prstGeom xmlns:a="http://schemas.openxmlformats.org/drawingml/2006/main" prst="rect">
+            <a:avLst/>
+          </a:prstGeom>
+        </p:spPr>
+        <p:txBody>
+          <a:bodyPr xmlns:a="http://schemas.openxmlformats.org/drawingml/2006/main"/>
+          <a:lstStyle xmlns:a="http://schemas.openxmlformats.org/drawingml/2006/main"/>
+          <a:p xmlns:a="http://schemas.openxmlformats.org/drawingml/2006/main">
+            <a:pPr algn="ctr"/>
+            <a:r>
+              <a:rPr lang="en-US" sz="1800" b="1">
+                <a:solidFill>
+                  <a:srgbClr val="8E2430"/>
+                </a:solidFill>
+                <a:latin typeface="微软雅黑"/>
+                <a:ea typeface="微软雅黑"/>
+              </a:rPr>
+              <a:t>2</a:t>
+            </a:r>
+          </a:p>
+        </p:txBody>
+      </p:sp>
+      <p:sp>
+        <p:nvSpPr>
+          <p:cNvPr id="100110" name="TextBox 7"/>
+          <p:cNvSpPr/>
+          <p:nvPr/>
+        </p:nvSpPr>
+        <p:spPr>
+          <a:xfrm xmlns:a="http://schemas.openxmlformats.org/drawingml/2006/main">
+            <a:off x="7182000" y="2376000"/>
+            <a:ext cx="504000" cy="504000"/>
+          </a:xfrm>
+          <a:prstGeom xmlns:a="http://schemas.openxmlformats.org/drawingml/2006/main" prst="ellipse">
+            <a:avLst/>
+          </a:prstGeom>
+          <a:solidFill xmlns:a="http://schemas.openxmlformats.org/drawingml/2006/main">
+            <a:srgbClr val="D4A843"/>
+          </a:solidFill>
+          <a:ln xmlns:a="http://schemas.openxmlformats.org/drawingml/2006/main">
+            <a:noFill/>
+          </a:ln>
+        </p:spPr>
+        <p:txBody>
+          <a:bodyPr xmlns:a="http://schemas.openxmlformats.org/drawingml/2006/main"/>
+          <a:lstStyle xmlns:a="http://schemas.openxmlformats.org/drawingml/2006/main"/>
+          <a:p xmlns:a="http://schemas.openxmlformats.org/drawingml/2006/main"/>
+        </p:txBody>
+      </p:sp>
+      <p:sp>
+        <p:nvSpPr>
+          <p:cNvPr id="100111" name="TextBox 8"/>
+          <p:cNvSpPr txBox="1"/>
+          <p:nvPr/>
+        </p:nvSpPr>
+        <p:spPr>
+          <a:xfrm xmlns:a="http://schemas.openxmlformats.org/drawingml/2006/main">
+            <a:off x="7182000" y="2466000"/>
+            <a:ext cx="504000" cy="360000"/>
+          </a:xfrm>
+          <a:prstGeom xmlns:a="http://schemas.openxmlformats.org/drawingml/2006/main" prst="rect">
+            <a:avLst/>
+          </a:prstGeom>
+        </p:spPr>
+        <p:txBody>
+          <a:bodyPr xmlns:a="http://schemas.openxmlformats.org/drawingml/2006/main"/>
+          <a:lstStyle xmlns:a="http://schemas.openxmlformats.org/drawingml/2006/main"/>
+          <a:p xmlns:a="http://schemas.openxmlformats.org/drawingml/2006/main">
+            <a:pPr algn="ctr"/>
+            <a:r>
+              <a:rPr lang="en-US" sz="1800" b="1">
+                <a:solidFill>
+                  <a:srgbClr val="8E2430"/>
+                </a:solidFill>
+                <a:latin typeface="微软雅黑"/>
+                <a:ea typeface="微软雅黑"/>
+              </a:rPr>
+              <a:t>3</a:t>
+            </a:r>
+          </a:p>
+        </p:txBody>
+      </p:sp>
+      <p:sp>
+        <p:nvSpPr>
+          <p:cNvPr id="100112" name="TextBox 9"/>
+          <p:cNvSpPr/>
+          <p:nvPr/>
+        </p:nvSpPr>
+        <p:spPr>
+          <a:xfrm xmlns:a="http://schemas.openxmlformats.org/drawingml/2006/main">
+            <a:off x="9990000" y="2376000"/>
+            <a:ext cx="504000" cy="504000"/>
+          </a:xfrm>
+          <a:prstGeom xmlns:a="http://schemas.openxmlformats.org/drawingml/2006/main" prst="ellipse">
+            <a:avLst/>
+          </a:prstGeom>
+          <a:solidFill xmlns:a="http://schemas.openxmlformats.org/drawingml/2006/main">
+            <a:srgbClr val="D4A843"/>
+          </a:solidFill>
+          <a:ln xmlns:a="http://schemas.openxmlformats.org/drawingml/2006/main">
+            <a:noFill/>
+          </a:ln>
+        </p:spPr>
+        <p:txBody>
+          <a:bodyPr xmlns:a="http://schemas.openxmlformats.org/drawingml/2006/main"/>
+          <a:lstStyle xmlns:a="http://schemas.openxmlformats.org/drawingml/2006/main"/>
+          <a:p xmlns:a="http://schemas.openxmlformats.org/drawingml/2006/main"/>
+        </p:txBody>
+      </p:sp>
+      <p:sp>
+        <p:nvSpPr>
+          <p:cNvPr id="100113" name="TextBox 10"/>
+          <p:cNvSpPr txBox="1"/>
+          <p:nvPr/>
+        </p:nvSpPr>
+        <p:spPr>
+          <a:xfrm xmlns:a="http://schemas.openxmlformats.org/drawingml/2006/main">
+            <a:off x="9990000" y="2466000"/>
+            <a:ext cx="504000" cy="360000"/>
+          </a:xfrm>
+          <a:prstGeom xmlns:a="http://schemas.openxmlformats.org/drawingml/2006/main" prst="rect">
+            <a:avLst/>
+          </a:prstGeom>
+        </p:spPr>
+        <p:txBody>
+          <a:bodyPr xmlns:a="http://schemas.openxmlformats.org/drawingml/2006/main"/>
+          <a:lstStyle xmlns:a="http://schemas.openxmlformats.org/drawingml/2006/main"/>
+          <a:p xmlns:a="http://schemas.openxmlformats.org/drawingml/2006/main">
+            <a:pPr algn="ctr"/>
+            <a:r>
+              <a:rPr lang="en-US" sz="1800" b="1">
+                <a:solidFill>
+                  <a:srgbClr val="8E2430"/>
+                </a:solidFill>
+                <a:latin typeface="微软雅黑"/>
+                <a:ea typeface="微软雅黑"/>
+              </a:rPr>
+              <a:t>4</a:t>
+            </a:r>
+          </a:p>
+        </p:txBody>
+      </p:sp>
+      <p:sp>
+        <p:nvSpPr>
+          <p:cNvPr id="100114" name="B1"/>
+          <p:cNvSpPr/>
+          <p:nvPr/>
+        </p:nvSpPr>
+        <p:spPr>
+          <a:xfrm xmlns:a="http://schemas.openxmlformats.org/drawingml/2006/main">
+            <a:off x="576000" y="3096000"/>
+            <a:ext cx="2340000" cy="1188000"/>
+          </a:xfrm>
+          <a:prstGeom xmlns:a="http://schemas.openxmlformats.org/drawingml/2006/main" prst="roundRect">
+            <a:avLst/>
+          </a:prstGeom>
+          <a:solidFill xmlns:a="http://schemas.openxmlformats.org/drawingml/2006/main">
+            <a:srgbClr val="8E2430"/>
+          </a:solidFill>
+          <a:ln xmlns:a="http://schemas.openxmlformats.org/drawingml/2006/main">
+            <a:noFill/>
+          </a:ln>
+        </p:spPr>
+        <p:txBody>
+          <a:bodyPr xmlns:a="http://schemas.openxmlformats.org/drawingml/2006/main"/>
+          <a:lstStyle xmlns:a="http://schemas.openxmlformats.org/drawingml/2006/main"/>
+          <a:p xmlns:a="http://schemas.openxmlformats.org/drawingml/2006/main"/>
+        </p:txBody>
+      </p:sp>
+      <p:sp>
+        <p:nvSpPr>
+          <p:cNvPr id="100115" name="TextBox 12"/>
+          <p:cNvSpPr txBox="1"/>
+          <p:nvPr/>
+        </p:nvSpPr>
+        <p:spPr>
+          <a:xfrm xmlns:a="http://schemas.openxmlformats.org/drawingml/2006/main">
+            <a:off x="576000" y="3240000"/>
+            <a:ext cx="2340000" cy="432000"/>
+          </a:xfrm>
+          <a:prstGeom xmlns:a="http://schemas.openxmlformats.org/drawingml/2006/main" prst="rect">
+            <a:avLst/>
+          </a:prstGeom>
+        </p:spPr>
+        <p:txBody>
+          <a:bodyPr xmlns:a="http://schemas.openxmlformats.org/drawingml/2006/main"/>
+          <a:lstStyle xmlns:a="http://schemas.openxmlformats.org/drawingml/2006/main"/>
+          <a:p xmlns:a="http://schemas.openxmlformats.org/drawingml/2006/main">
+            <a:pPr algn="ctr"/>
+            <a:r>
+              <a:rPr lang="en-US" sz="1700" b="1">
+                <a:solidFill>
+                  <a:srgbClr val="FFFFFF"/>
+                </a:solidFill>
+                <a:latin typeface="微软雅黑"/>
+                <a:ea typeface="微软雅黑"/>
+              </a:rPr>
+              <a:t>关注招生简章</a:t>
+            </a:r>
+          </a:p>
+        </p:txBody>
+      </p:sp>
+      <p:sp>
+        <p:nvSpPr>
+          <p:cNvPr id="100116" name="TextBox 13"/>
+          <p:cNvSpPr txBox="1"/>
+          <p:nvPr/>
+        </p:nvSpPr>
+        <p:spPr>
+          <a:xfrm xmlns:a="http://schemas.openxmlformats.org/drawingml/2006/main">
+            <a:off x="576000" y="3708000"/>
+            <a:ext cx="2340000" cy="360000"/>
+          </a:xfrm>
+          <a:prstGeom xmlns:a="http://schemas.openxmlformats.org/drawingml/2006/main" prst="rect">
+            <a:avLst/>
+          </a:prstGeom>
+        </p:spPr>
+        <p:txBody>
+          <a:bodyPr xmlns:a="http://schemas.openxmlformats.org/drawingml/2006/main"/>
+          <a:lstStyle xmlns:a="http://schemas.openxmlformats.org/drawingml/2006/main"/>
+          <a:p xmlns:a="http://schemas.openxmlformats.org/drawingml/2006/main">
+            <a:pPr algn="ctr"/>
+            <a:r>
+              <a:rPr lang="en-US" sz="1200">
+                <a:solidFill>
+                  <a:srgbClr val="F4E5D2"/>
+                </a:solidFill>
+                <a:latin typeface="微软雅黑"/>
+                <a:ea typeface="微软雅黑"/>
+              </a:rPr>
+              <a:t>查政策、看专业与招生计划</a:t>
+            </a:r>
+          </a:p>
+        </p:txBody>
+      </p:sp>
+      <p:sp>
+        <p:nvSpPr>
+          <p:cNvPr id="100117" name="B2"/>
+          <p:cNvSpPr/>
+          <p:nvPr/>
+        </p:nvSpPr>
+        <p:spPr>
+          <a:xfrm xmlns:a="http://schemas.openxmlformats.org/drawingml/2006/main">
+            <a:off x="3384000" y="3096000"/>
+            <a:ext cx="2340000" cy="1188000"/>
+          </a:xfrm>
+          <a:prstGeom xmlns:a="http://schemas.openxmlformats.org/drawingml/2006/main" prst="roundRect">
+            <a:avLst/>
+          </a:prstGeom>
+          <a:solidFill xmlns:a="http://schemas.openxmlformats.org/drawingml/2006/main">
+            <a:srgbClr val="8E2430"/>
+          </a:solidFill>
+          <a:ln xmlns:a="http://schemas.openxmlformats.org/drawingml/2006/main">
+            <a:noFill/>
+          </a:ln>
+        </p:spPr>
+        <p:txBody>
+          <a:bodyPr xmlns:a="http://schemas.openxmlformats.org/drawingml/2006/main"/>
+          <a:lstStyle xmlns:a="http://schemas.openxmlformats.org/drawingml/2006/main"/>
+          <a:p xmlns:a="http://schemas.openxmlformats.org/drawingml/2006/main"/>
+        </p:txBody>
+      </p:sp>
+      <p:sp>
+        <p:nvSpPr>
+          <p:cNvPr id="100118" name="TextBox 15"/>
+          <p:cNvSpPr txBox="1"/>
+          <p:nvPr/>
+        </p:nvSpPr>
+        <p:spPr>
+          <a:xfrm xmlns:a="http://schemas.openxmlformats.org/drawingml/2006/main">
+            <a:off x="3384000" y="3240000"/>
+            <a:ext cx="2340000" cy="432000"/>
+          </a:xfrm>
+          <a:prstGeom xmlns:a="http://schemas.openxmlformats.org/drawingml/2006/main" prst="rect">
+            <a:avLst/>
+          </a:prstGeom>
+        </p:spPr>
+        <p:txBody>
+          <a:bodyPr xmlns:a="http://schemas.openxmlformats.org/drawingml/2006/main"/>
+          <a:lstStyle xmlns:a="http://schemas.openxmlformats.org/drawingml/2006/main"/>
+          <a:p xmlns:a="http://schemas.openxmlformats.org/drawingml/2006/main">
+            <a:pPr algn="ctr"/>
+            <a:r>
+              <a:rPr lang="en-US" sz="1700" b="1">
+                <a:solidFill>
+                  <a:srgbClr val="FFFFFF"/>
+                </a:solidFill>
+                <a:latin typeface="微软雅黑"/>
+                <a:ea typeface="微软雅黑"/>
+              </a:rPr>
+              <a:t>网上填报志愿</a:t>
+            </a:r>
+          </a:p>
+        </p:txBody>
+      </p:sp>
+      <p:sp>
+        <p:nvSpPr>
+          <p:cNvPr id="100119" name="TextBox 16"/>
+          <p:cNvSpPr txBox="1"/>
+          <p:nvPr/>
+        </p:nvSpPr>
+        <p:spPr>
+          <a:xfrm xmlns:a="http://schemas.openxmlformats.org/drawingml/2006/main">
+            <a:off x="3384000" y="3708000"/>
+            <a:ext cx="2340000" cy="360000"/>
+          </a:xfrm>
+          <a:prstGeom xmlns:a="http://schemas.openxmlformats.org/drawingml/2006/main" prst="rect">
+            <a:avLst/>
+          </a:prstGeom>
+        </p:spPr>
+        <p:txBody>
+          <a:bodyPr xmlns:a="http://schemas.openxmlformats.org/drawingml/2006/main"/>
+          <a:lstStyle xmlns:a="http://schemas.openxmlformats.org/drawingml/2006/main"/>
+          <a:p xmlns:a="http://schemas.openxmlformats.org/drawingml/2006/main">
+            <a:pPr algn="ctr"/>
+            <a:r>
+              <a:rPr lang="en-US" sz="1200">
+                <a:solidFill>
+                  <a:srgbClr val="F4E5D2"/>
+                </a:solidFill>
+                <a:latin typeface="微软雅黑"/>
+                <a:ea typeface="微软雅黑"/>
+              </a:rPr>
+              <a:t>按本省批次与专业组填报</a:t>
+            </a:r>
+          </a:p>
+        </p:txBody>
+      </p:sp>
+      <p:sp>
+        <p:nvSpPr>
+          <p:cNvPr id="100120" name="B3"/>
+          <p:cNvSpPr/>
+          <p:nvPr/>
+        </p:nvSpPr>
+        <p:spPr>
+          <a:xfrm xmlns:a="http://schemas.openxmlformats.org/drawingml/2006/main">
+            <a:off x="6192000" y="3096000"/>
+            <a:ext cx="2340000" cy="1188000"/>
+          </a:xfrm>
+          <a:prstGeom xmlns:a="http://schemas.openxmlformats.org/drawingml/2006/main" prst="roundRect">
+            <a:avLst/>
+          </a:prstGeom>
+          <a:solidFill xmlns:a="http://schemas.openxmlformats.org/drawingml/2006/main">
+            <a:srgbClr val="8E2430"/>
+          </a:solidFill>
+          <a:ln xmlns:a="http://schemas.openxmlformats.org/drawingml/2006/main">
+            <a:noFill/>
+          </a:ln>
+        </p:spPr>
+        <p:txBody>
+          <a:bodyPr xmlns:a="http://schemas.openxmlformats.org/drawingml/2006/main"/>
+          <a:lstStyle xmlns:a="http://schemas.openxmlformats.org/drawingml/2006/main"/>
+          <a:p xmlns:a="http://schemas.openxmlformats.org/drawingml/2006/main"/>
+        </p:txBody>
+      </p:sp>
+      <p:sp>
+        <p:nvSpPr>
+          <p:cNvPr id="100121" name="TextBox 18"/>
+          <p:cNvSpPr txBox="1"/>
+          <p:nvPr/>
+        </p:nvSpPr>
+        <p:spPr>
+          <a:xfrm xmlns:a="http://schemas.openxmlformats.org/drawingml/2006/main">
+            <a:off x="6192000" y="3240000"/>
+            <a:ext cx="2340000" cy="432000"/>
+          </a:xfrm>
+          <a:prstGeom xmlns:a="http://schemas.openxmlformats.org/drawingml/2006/main" prst="rect">
+            <a:avLst/>
+          </a:prstGeom>
+        </p:spPr>
+        <p:txBody>
+          <a:bodyPr xmlns:a="http://schemas.openxmlformats.org/drawingml/2006/main"/>
+          <a:lstStyle xmlns:a="http://schemas.openxmlformats.org/drawingml/2006/main"/>
+          <a:p xmlns:a="http://schemas.openxmlformats.org/drawingml/2006/main">
+            <a:pPr algn="ctr"/>
+            <a:r>
+              <a:rPr lang="en-US" sz="1700" b="1">
+                <a:solidFill>
+                  <a:srgbClr val="FFFFFF"/>
+                </a:solidFill>
+                <a:latin typeface="微软雅黑"/>
+                <a:ea typeface="微软雅黑"/>
+              </a:rPr>
+              <a:t>投档与录取</a:t>
+            </a:r>
+          </a:p>
+        </p:txBody>
+      </p:sp>
+      <p:sp>
+        <p:nvSpPr>
+          <p:cNvPr id="100122" name="TextBox 19"/>
+          <p:cNvSpPr txBox="1"/>
+          <p:nvPr/>
+        </p:nvSpPr>
+        <p:spPr>
+          <a:xfrm xmlns:a="http://schemas.openxmlformats.org/drawingml/2006/main">
+            <a:off x="6192000" y="3708000"/>
+            <a:ext cx="2340000" cy="360000"/>
+          </a:xfrm>
+          <a:prstGeom xmlns:a="http://schemas.openxmlformats.org/drawingml/2006/main" prst="rect">
+            <a:avLst/>
+          </a:prstGeom>
+        </p:spPr>
+        <p:txBody>
+          <a:bodyPr xmlns:a="http://schemas.openxmlformats.org/drawingml/2006/main"/>
+          <a:lstStyle xmlns:a="http://schemas.openxmlformats.org/drawingml/2006/main"/>
+          <a:p xmlns:a="http://schemas.openxmlformats.org/drawingml/2006/main">
+            <a:pPr algn="ctr"/>
+            <a:r>
+              <a:rPr lang="en-US" sz="1200">
+                <a:solidFill>
+                  <a:srgbClr val="F4E5D2"/>
+                </a:solidFill>
+                <a:latin typeface="微软雅黑"/>
+                <a:ea typeface="微软雅黑"/>
+              </a:rPr>
+              <a:t>关注投档线与录取结果</a:t>
+            </a:r>
+          </a:p>
+        </p:txBody>
+      </p:sp>
+      <p:sp>
+        <p:nvSpPr>
+          <p:cNvPr id="100123" name="B4"/>
+          <p:cNvSpPr/>
+          <p:nvPr/>
+        </p:nvSpPr>
+        <p:spPr>
+          <a:xfrm xmlns:a="http://schemas.openxmlformats.org/drawingml/2006/main">
+            <a:off x="9000000" y="3096000"/>
+            <a:ext cx="2340000" cy="1188000"/>
+          </a:xfrm>
+          <a:prstGeom xmlns:a="http://schemas.openxmlformats.org/drawingml/2006/main" prst="roundRect">
+            <a:avLst/>
+          </a:prstGeom>
+          <a:solidFill xmlns:a="http://schemas.openxmlformats.org/drawingml/2006/main">
+            <a:srgbClr val="8E2430"/>
+          </a:solidFill>
+          <a:ln xmlns:a="http://schemas.openxmlformats.org/drawingml/2006/main">
+            <a:noFill/>
+          </a:ln>
+        </p:spPr>
+        <p:txBody>
+          <a:bodyPr xmlns:a="http://schemas.openxmlformats.org/drawingml/2006/main"/>
+          <a:lstStyle xmlns:a="http://schemas.openxmlformats.org/drawingml/2006/main"/>
+          <a:p xmlns:a="http://schemas.openxmlformats.org/drawingml/2006/main"/>
+        </p:txBody>
+      </p:sp>
+      <p:sp>
+        <p:nvSpPr>
+          <p:cNvPr id="100124" name="TextBox 21"/>
+          <p:cNvSpPr txBox="1"/>
+          <p:nvPr/>
+        </p:nvSpPr>
+        <p:spPr>
+          <a:xfrm xmlns:a="http://schemas.openxmlformats.org/drawingml/2006/main">
+            <a:off x="9000000" y="3240000"/>
+            <a:ext cx="2340000" cy="432000"/>
+          </a:xfrm>
+          <a:prstGeom xmlns:a="http://schemas.openxmlformats.org/drawingml/2006/main" prst="rect">
+            <a:avLst/>
+          </a:prstGeom>
+        </p:spPr>
+        <p:txBody>
+          <a:bodyPr xmlns:a="http://schemas.openxmlformats.org/drawingml/2006/main"/>
+          <a:lstStyle xmlns:a="http://schemas.openxmlformats.org/drawingml/2006/main"/>
+          <a:p xmlns:a="http://schemas.openxmlformats.org/drawingml/2006/main">
+            <a:pPr algn="ctr"/>
+            <a:r>
+              <a:rPr lang="en-US" sz="1700" b="1">
+                <a:solidFill>
+                  <a:srgbClr val="FFFFFF"/>
+                </a:solidFill>
+                <a:latin typeface="微软雅黑"/>
+                <a:ea typeface="微软雅黑"/>
+              </a:rPr>
+              <a:t>报到注册</a:t>
+            </a:r>
+          </a:p>
+        </p:txBody>
+      </p:sp>
+      <p:sp>
+        <p:nvSpPr>
+          <p:cNvPr id="100125" name="TextBox 22"/>
+          <p:cNvSpPr txBox="1"/>
+          <p:nvPr/>
+        </p:nvSpPr>
+        <p:spPr>
+          <a:xfrm xmlns:a="http://schemas.openxmlformats.org/drawingml/2006/main">
+            <a:off x="9000000" y="3708000"/>
+            <a:ext cx="2340000" cy="360000"/>
+          </a:xfrm>
+          <a:prstGeom xmlns:a="http://schemas.openxmlformats.org/drawingml/2006/main" prst="rect">
+            <a:avLst/>
+          </a:prstGeom>
+        </p:spPr>
+        <p:txBody>
+          <a:bodyPr xmlns:a="http://schemas.openxmlformats.org/drawingml/2006/main"/>
+          <a:lstStyle xmlns:a="http://schemas.openxmlformats.org/drawingml/2006/main"/>
+          <a:p xmlns:a="http://schemas.openxmlformats.org/drawingml/2006/main">
+            <a:pPr algn="ctr"/>
+            <a:r>
+              <a:rPr lang="en-US" sz="1200">
+                <a:solidFill>
+                  <a:srgbClr val="F4E5D2"/>
+                </a:solidFill>
+                <a:latin typeface="微软雅黑"/>
+                <a:ea typeface="微软雅黑"/>
+              </a:rPr>
+              <a:t>按通知完成报到与入学</a:t>
+            </a:r>
+          </a:p>
+        </p:txBody>
+      </p:sp>
+      <p:cxnSp>
+        <p:nvCxnSpPr>
+          <p:cNvPr id="100126" name="Connector 1"/>
+          <p:cNvCxnSpPr>
+            <a:stCxn xmlns:a="http://schemas.openxmlformats.org/drawingml/2006/main" id="100114" idx="0"/>
+            <a:endCxn xmlns:a="http://schemas.openxmlformats.org/drawingml/2006/main" id="100117" idx="0"/>
+          </p:cNvCxnSpPr>
+          <p:nvPr/>
+        </p:nvCxnSpPr>
+        <p:spPr>
+          <a:xfrm xmlns:a="http://schemas.openxmlformats.org/drawingml/2006/main">
+            <a:off x="2916000" y="3690000"/>
+            <a:ext cx="468000" cy="0"/>
+          </a:xfrm>
+          <a:prstGeom xmlns:a="http://schemas.openxmlformats.org/drawingml/2006/main" prst="bentConnector3">
+            <a:avLst/>
+          </a:prstGeom>
+          <a:ln xmlns:a="http://schemas.openxmlformats.org/drawingml/2006/main" w="12700">
+            <a:solidFill>
+              <a:srgbClr val="8E2430"/>
+            </a:solidFill>
+            <a:tailEnd type="triangle"/>
+          </a:ln>
+        </p:spPr>
+      </p:cxnSp>
+      <p:cxnSp>
+        <p:nvCxnSpPr>
+          <p:cNvPr id="100127" name="Connector 2"/>
+          <p:cNvCxnSpPr>
+            <a:stCxn xmlns:a="http://schemas.openxmlformats.org/drawingml/2006/main" id="100117" idx="0"/>
+            <a:endCxn xmlns:a="http://schemas.openxmlformats.org/drawingml/2006/main" id="100120" idx="0"/>
+          </p:cNvCxnSpPr>
+          <p:nvPr/>
+        </p:nvCxnSpPr>
+        <p:spPr>
+          <a:xfrm xmlns:a="http://schemas.openxmlformats.org/drawingml/2006/main">
+            <a:off x="5724000" y="3690000"/>
+            <a:ext cx="468000" cy="0"/>
+          </a:xfrm>
+          <a:prstGeom xmlns:a="http://schemas.openxmlformats.org/drawingml/2006/main" prst="bentConnector3">
+            <a:avLst/>
+          </a:prstGeom>
+          <a:ln xmlns:a="http://schemas.openxmlformats.org/drawingml/2006/main" w="12700">
+            <a:solidFill>
+              <a:srgbClr val="8E2430"/>
+            </a:solidFill>
+            <a:tailEnd type="triangle"/>
+          </a:ln>
+        </p:spPr>
+      </p:cxnSp>
+      <p:cxnSp>
+        <p:nvCxnSpPr>
+          <p:cNvPr id="100128" name="Connector 3"/>
+          <p:cNvCxnSpPr>
+            <a:stCxn xmlns:a="http://schemas.openxmlformats.org/drawingml/2006/main" id="100120" idx="0"/>
+            <a:endCxn xmlns:a="http://schemas.openxmlformats.org/drawingml/2006/main" id="100123" idx="0"/>
+          </p:cNvCxnSpPr>
+          <p:nvPr/>
+        </p:nvCxnSpPr>
+        <p:spPr>
+          <a:xfrm xmlns:a="http://schemas.openxmlformats.org/drawingml/2006/main">
+            <a:off x="8532000" y="3690000"/>
+            <a:ext cx="468000" cy="0"/>
+          </a:xfrm>
+          <a:prstGeom xmlns:a="http://schemas.openxmlformats.org/drawingml/2006/main" prst="bentConnector3">
+            <a:avLst/>
+          </a:prstGeom>
+          <a:ln xmlns:a="http://schemas.openxmlformats.org/drawingml/2006/main" w="12700">
+            <a:solidFill>
+              <a:srgbClr val="8E2430"/>
+            </a:solidFill>
+            <a:tailEnd type="triangle"/>
+          </a:ln>
+        </p:spPr>
+      </p:cxnSp>
+      <p:sp>
+        <p:nvSpPr>
+          <p:cNvPr id="100129" name="TextBox 23"/>
+          <p:cNvSpPr txBox="1"/>
+          <p:nvPr/>
+        </p:nvSpPr>
+        <p:spPr>
+          <a:xfrm xmlns:a="http://schemas.openxmlformats.org/drawingml/2006/main">
+            <a:off x="576000" y="4752000"/>
+            <a:ext cx="10800000" cy="360000"/>
+          </a:xfrm>
+          <a:prstGeom xmlns:a="http://schemas.openxmlformats.org/drawingml/2006/main" prst="rect">
+            <a:avLst/>
+          </a:prstGeom>
+        </p:spPr>
+        <p:txBody>
+          <a:bodyPr xmlns:a="http://schemas.openxmlformats.org/drawingml/2006/main"/>
+          <a:lstStyle xmlns:a="http://schemas.openxmlformats.org/drawingml/2006/main"/>
+          <a:p xmlns:a="http://schemas.openxmlformats.org/drawingml/2006/main">
+            <a:r>
+              <a:rPr lang="en-US" sz="1300">
+                <a:solidFill>
+                  <a:srgbClr val="8E7C6E"/>
+                </a:solidFill>
+                <a:latin typeface="微软雅黑"/>
+                <a:ea typeface="微软雅黑"/>
+              </a:rPr>
+              <a:t>注：各环节具体时间以各省招办与学校官方网站发布为准。</a:t>
+            </a:r>
+          </a:p>
+        </p:txBody>
+      </p:sp>
+      <p:sp>
+        <p:nvSpPr>
+          <p:cNvPr id="100130" name="TextBox 24"/>
+          <p:cNvSpPr txBox="1"/>
+          <p:nvPr/>
+        </p:nvSpPr>
+        <p:spPr>
+          <a:xfrm xmlns:a="http://schemas.openxmlformats.org/drawingml/2006/main">
+            <a:off x="10944000" y="6552000"/>
+            <a:ext cx="720000" cy="360000"/>
+          </a:xfrm>
+          <a:prstGeom xmlns:a="http://schemas.openxmlformats.org/drawingml/2006/main" prst="rect">
+            <a:avLst/>
+          </a:prstGeom>
+        </p:spPr>
+        <p:txBody>
+          <a:bodyPr xmlns:a="http://schemas.openxmlformats.org/drawingml/2006/main"/>
+          <a:lstStyle xmlns:a="http://schemas.openxmlformats.org/drawingml/2006/main"/>
+          <a:p xmlns:a="http://schemas.openxmlformats.org/drawingml/2006/main">
+            <a:pPr algn="r"/>
+            <a:r>
+              <a:rPr lang="en-US" sz="1200">
+                <a:solidFill>
+                  <a:srgbClr val="8E7C6E"/>
+                </a:solidFill>
+                <a:latin typeface="微软雅黑"/>
+                <a:ea typeface="微软雅黑"/>
+              </a:rPr>
+              <a:t>9 / 10</a:t>
+            </a:r>
+          </a:p>
         </p:txBody>
       </p:sp>
     </p:spTree>
